--- a/3-Master_Plan/re_entry/HEROs_and_PASSes/slides/auto/CHAR_Phase_B_characterization_AUTO.pptx
+++ b/3-Master_Plan/re_entry/HEROs_and_PASSes/slides/auto/CHAR_Phase_B_characterization_AUTO.pptx
@@ -12,6 +12,10 @@
     <p:sldId id="260" r:id="rId11"/>
     <p:sldId id="261" r:id="rId12"/>
     <p:sldId id="262" r:id="rId13"/>
+    <p:sldId id="263" r:id="rId14"/>
+    <p:sldId id="264" r:id="rId15"/>
+    <p:sldId id="265" r:id="rId16"/>
+    <p:sldId id="266" r:id="rId17"/>
   </p:sldIdLst>
   <p:sldSz cx="12191695" cy="6858000" type="screen4x3"/>
   <p:notesSz cx="6858000" cy="9144000"/>
@@ -3102,6 +3106,1451 @@
         </p:nvSpPr>
         <p:spPr>
           <a:xfrm>
+            <a:off x="384048" y="219456"/>
+            <a:ext cx="11423599" cy="457200"/>
+          </a:xfrm>
+          <a:prstGeom prst="rect">
+            <a:avLst/>
+          </a:prstGeom>
+          <a:noFill/>
+        </p:spPr>
+        <p:txBody>
+          <a:bodyPr wrap="none">
+            <a:spAutoFit/>
+          </a:bodyPr>
+          <a:lstStyle/>
+          <a:p>
+            <a:pPr>
+              <a:defRPr b="1"/>
+            </a:pPr>
+            <a:r>
+              <a:rPr sz="2000"/>
+              <a:t>Phase B — Fake-league characterization (not curve fitting)</a:t>
+            </a:r>
+          </a:p>
+        </p:txBody>
+      </p:sp>
+      <p:sp>
+        <p:nvSpPr>
+          <p:cNvPr id="3" name="TextBox 2"/>
+          <p:cNvSpPr txBox="1"/>
+          <p:nvPr/>
+        </p:nvSpPr>
+        <p:spPr>
+          <a:xfrm>
+            <a:off x="384048" y="749808"/>
+            <a:ext cx="5806440" cy="256032"/>
+          </a:xfrm>
+          <a:prstGeom prst="rect">
+            <a:avLst/>
+          </a:prstGeom>
+          <a:noFill/>
+        </p:spPr>
+        <p:txBody>
+          <a:bodyPr wrap="none">
+            <a:spAutoFit/>
+          </a:bodyPr>
+          <a:lstStyle/>
+          <a:p>
+            <a:pPr>
+              <a:defRPr b="1"/>
+            </a:pPr>
+            <a:r>
+              <a:rPr sz="1200"/>
+              <a:t>Knobs (mini glossary)</a:t>
+            </a:r>
+          </a:p>
+        </p:txBody>
+      </p:sp>
+      <p:graphicFrame>
+        <p:nvGraphicFramePr>
+          <p:cNvPr id="4" name="Table 3"/>
+          <p:cNvGraphicFramePr>
+            <a:graphicFrameLocks noGrp="1"/>
+          </p:cNvGraphicFramePr>
+          <p:nvPr/>
+        </p:nvGraphicFramePr>
+        <p:xfrm>
+          <a:off x="384048" y="1024128"/>
+          <a:ext cx="5806439" cy="5102352"/>
+        </p:xfrm>
+        <a:graphic>
+          <a:graphicData uri="http://schemas.openxmlformats.org/drawingml/2006/table">
+            <a:tbl>
+              <a:tblPr firstRow="1" bandRow="1">
+                <a:tableStyleId>{5C22544A-7EE6-4342-B048-85BDC9FD1C3A}</a:tableStyleId>
+              </a:tblPr>
+              <a:tblGrid>
+                <a:gridCol w="812901"/>
+                <a:gridCol w="1625803"/>
+                <a:gridCol w="3367735"/>
+              </a:tblGrid>
+              <a:tr h="510235">
+                <a:tc>
+                  <a:txBody>
+                    <a:bodyPr wrap="square" lIns="50800" rIns="50800" tIns="25400" bIns="25400"/>
+                    <a:lstStyle/>
+                    <a:p>
+                      <a:pPr>
+                        <a:defRPr sz="900" b="1">
+                          <a:latin typeface="Calibri"/>
+                        </a:defRPr>
+                      </a:pPr>
+                      <a:r>
+                        <a:t>Symbol</a:t>
+                      </a:r>
+                    </a:p>
+                  </a:txBody>
+                  <a:tcPr anchor="ctr">
+                    <a:solidFill>
+                      <a:srgbClr val="EEEEEE"/>
+                    </a:solidFill>
+                  </a:tcPr>
+                </a:tc>
+                <a:tc>
+                  <a:txBody>
+                    <a:bodyPr wrap="square" lIns="50800" rIns="50800" tIns="25400" bIns="25400"/>
+                    <a:lstStyle/>
+                    <a:p>
+                      <a:pPr>
+                        <a:defRPr sz="900" b="1">
+                          <a:latin typeface="Calibri"/>
+                        </a:defRPr>
+                      </a:pPr>
+                      <a:r>
+                        <a:t>Plain name</a:t>
+                      </a:r>
+                    </a:p>
+                  </a:txBody>
+                  <a:tcPr anchor="ctr">
+                    <a:solidFill>
+                      <a:srgbClr val="EEEEEE"/>
+                    </a:solidFill>
+                  </a:tcPr>
+                </a:tc>
+                <a:tc>
+                  <a:txBody>
+                    <a:bodyPr wrap="square" lIns="50800" rIns="50800" tIns="25400" bIns="25400"/>
+                    <a:lstStyle/>
+                    <a:p>
+                      <a:pPr>
+                        <a:defRPr sz="900" b="1">
+                          <a:latin typeface="Calibri"/>
+                        </a:defRPr>
+                      </a:pPr>
+                      <a:r>
+                        <a:t>What it controls</a:t>
+                      </a:r>
+                    </a:p>
+                  </a:txBody>
+                  <a:tcPr anchor="ctr">
+                    <a:solidFill>
+                      <a:srgbClr val="EEEEEE"/>
+                    </a:solidFill>
+                  </a:tcPr>
+                </a:tc>
+              </a:tr>
+              <a:tr h="510235">
+                <a:tc>
+                  <a:txBody>
+                    <a:bodyPr wrap="square" lIns="50800" rIns="50800" tIns="25400" bIns="25400"/>
+                    <a:lstStyle/>
+                    <a:p>
+                      <a:r>
+                        <a:rPr sz="900" i="1">
+                          <a:latin typeface="Cambria Math"/>
+                        </a:rPr>
+                        <a:t>A</a:t>
+                      </a:r>
+                      <a:r>
+                        <a:rPr sz="800" i="1" baseline="-25000">
+                          <a:latin typeface="Cambria Math"/>
+                        </a:rPr>
+                        <a:t>i</a:t>
+                      </a:r>
+                    </a:p>
+                  </a:txBody>
+                  <a:tcPr anchor="ctr"/>
+                </a:tc>
+                <a:tc>
+                  <a:txBody>
+                    <a:bodyPr wrap="square" lIns="50800" rIns="50800" tIns="25400" bIns="25400"/>
+                    <a:lstStyle/>
+                    <a:p>
+                      <a:pPr>
+                        <a:defRPr sz="900">
+                          <a:latin typeface="Calibri"/>
+                        </a:defRPr>
+                      </a:pPr>
+                      <a:r>
+                        <a:t>Player ability</a:t>
+                      </a:r>
+                    </a:p>
+                  </a:txBody>
+                  <a:tcPr anchor="ctr"/>
+                </a:tc>
+                <a:tc>
+                  <a:txBody>
+                    <a:bodyPr wrap="square" lIns="50800" rIns="50800" tIns="25400" bIns="25400"/>
+                    <a:lstStyle/>
+                    <a:p>
+                      <a:pPr>
+                        <a:defRPr sz="800">
+                          <a:latin typeface="Calibri"/>
+                        </a:defRPr>
+                      </a:pPr>
+                      <a:r>
+                        <a:t>Innate talent draw — Beta(2,2) on [0,1] (539 preset)</a:t>
+                      </a:r>
+                    </a:p>
+                  </a:txBody>
+                  <a:tcPr anchor="ctr"/>
+                </a:tc>
+              </a:tr>
+              <a:tr h="510235">
+                <a:tc>
+                  <a:txBody>
+                    <a:bodyPr wrap="square" lIns="50800" rIns="50800" tIns="25400" bIns="25400"/>
+                    <a:lstStyle/>
+                    <a:p>
+                      <a:r>
+                        <a:rPr sz="900" i="1">
+                          <a:latin typeface="Cambria Math"/>
+                        </a:rPr>
+                        <a:t>T</a:t>
+                      </a:r>
+                      <a:r>
+                        <a:rPr sz="800" i="1" baseline="-25000">
+                          <a:latin typeface="Cambria Math"/>
+                        </a:rPr>
+                        <a:t>j^*</a:t>
+                      </a:r>
+                    </a:p>
+                  </a:txBody>
+                  <a:tcPr anchor="ctr"/>
+                </a:tc>
+                <a:tc>
+                  <a:txBody>
+                    <a:bodyPr wrap="square" lIns="50800" rIns="50800" tIns="25400" bIns="25400"/>
+                    <a:lstStyle/>
+                    <a:p>
+                      <a:pPr>
+                        <a:defRPr sz="900">
+                          <a:latin typeface="Calibri"/>
+                        </a:defRPr>
+                      </a:pPr>
+                      <a:r>
+                        <a:t>Sim assignment target</a:t>
+                      </a:r>
+                    </a:p>
+                  </a:txBody>
+                  <a:tcPr anchor="ctr"/>
+                </a:tc>
+                <a:tc>
+                  <a:txBody>
+                    <a:bodyPr wrap="square" lIns="50800" rIns="50800" tIns="25400" bIns="25400"/>
+                    <a:lstStyle/>
+                    <a:p>
+                      <a:pPr>
+                        <a:defRPr sz="800">
+                          <a:latin typeface="Calibri"/>
+                        </a:defRPr>
+                      </a:pPr>
+                      <a:r>
+                        <a:t>Synthetic iid Uniform[0,1] per team (`draw_target_means`); soft-assign attractor — not realized roster talent</a:t>
+                      </a:r>
+                    </a:p>
+                  </a:txBody>
+                  <a:tcPr anchor="ctr"/>
+                </a:tc>
+              </a:tr>
+              <a:tr h="510235">
+                <a:tc>
+                  <a:txBody>
+                    <a:bodyPr wrap="square" lIns="50800" rIns="50800" tIns="25400" bIns="25400"/>
+                    <a:lstStyle/>
+                    <a:p>
+                      <a:r>
+                        <a:rPr sz="900" i="1">
+                          <a:latin typeface="Cambria Math"/>
+                        </a:rPr>
+                        <a:t>T</a:t>
+                      </a:r>
+                      <a:r>
+                        <a:rPr sz="800" i="1" baseline="-25000">
+                          <a:latin typeface="Cambria Math"/>
+                        </a:rPr>
+                        <a:t>j</a:t>
+                      </a:r>
+                    </a:p>
+                  </a:txBody>
+                  <a:tcPr anchor="ctr"/>
+                </a:tc>
+                <a:tc>
+                  <a:txBody>
+                    <a:bodyPr wrap="square" lIns="50800" rIns="50800" tIns="25400" bIns="25400"/>
+                    <a:lstStyle/>
+                    <a:p>
+                      <a:pPr>
+                        <a:defRPr sz="900">
+                          <a:latin typeface="Calibri"/>
+                        </a:defRPr>
+                      </a:pPr>
+                      <a:r>
+                        <a:t>Realized team talent</a:t>
+                      </a:r>
+                    </a:p>
+                  </a:txBody>
+                  <a:tcPr anchor="ctr"/>
+                </a:tc>
+                <a:tc>
+                  <a:txBody>
+                    <a:bodyPr wrap="square" lIns="50800" rIns="50800" tIns="25400" bIns="25400"/>
+                    <a:lstStyle/>
+                    <a:p>
+                      <a:r>
+                        <a:rPr sz="800"/>
+                        <a:t>Mean </a:t>
+                      </a:r>
+                      <a:r>
+                        <a:rPr sz="800" i="1">
+                          <a:latin typeface="Cambria Math"/>
+                        </a:rPr>
+                        <a:t>A</a:t>
+                      </a:r>
+                      <a:r>
+                        <a:rPr sz="800" i="1" baseline="-25000">
+                          <a:latin typeface="Cambria Math"/>
+                        </a:rPr>
+                        <a:t>i</a:t>
+                      </a:r>
+                      <a:r>
+                        <a:rPr sz="800"/>
+                        <a:t> on team </a:t>
+                      </a:r>
+                      <a:r>
+                        <a:rPr sz="800" i="1">
+                          <a:latin typeface="Cambria Math"/>
+                        </a:rPr>
+                        <a:t>j</a:t>
+                      </a:r>
+                      <a:r>
+                        <a:rPr sz="800"/>
+                        <a:t>'s roster after ASSIGN; empirical </a:t>
+                      </a:r>
+                      <a:r>
+                        <a:rPr sz="800" i="1">
+                          <a:latin typeface="Cambria Math"/>
+                        </a:rPr>
+                        <a:t>T</a:t>
+                      </a:r>
+                      <a:r>
+                        <a:rPr sz="800" i="1" baseline="-25000">
+                          <a:latin typeface="Cambria Math"/>
+                        </a:rPr>
+                        <a:t>jt</a:t>
+                      </a:r>
+                      <a:r>
+                        <a:rPr sz="800"/>
+                        <a:t> from </a:t>
+                      </a:r>
+                      <a:r>
+                        <a:rPr sz="800" i="1">
+                          <a:latin typeface="Cambria Math"/>
+                        </a:rPr>
+                        <a:t>\hat{A}</a:t>
+                      </a:r>
+                      <a:r>
+                        <a:rPr sz="800" i="1" baseline="-25000">
+                          <a:latin typeface="Cambria Math"/>
+                        </a:rPr>
+                        <a:t>i</a:t>
+                      </a:r>
+                    </a:p>
+                  </a:txBody>
+                  <a:tcPr anchor="ctr"/>
+                </a:tc>
+              </a:tr>
+              <a:tr h="510235">
+                <a:tc>
+                  <a:txBody>
+                    <a:bodyPr wrap="square" lIns="50800" rIns="50800" tIns="25400" bIns="25400"/>
+                    <a:lstStyle/>
+                    <a:p>
+                      <a:r>
+                        <a:rPr sz="900" i="1">
+                          <a:latin typeface="Cambria Math"/>
+                        </a:rPr>
+                        <a:t>ρ</a:t>
+                      </a:r>
+                    </a:p>
+                  </a:txBody>
+                  <a:tcPr anchor="ctr"/>
+                </a:tc>
+                <a:tc>
+                  <a:txBody>
+                    <a:bodyPr wrap="square" lIns="50800" rIns="50800" tIns="25400" bIns="25400"/>
+                    <a:lstStyle/>
+                    <a:p>
+                      <a:pPr>
+                        <a:defRPr sz="900">
+                          <a:latin typeface="Calibri"/>
+                        </a:defRPr>
+                      </a:pPr>
+                      <a:r>
+                        <a:t>Assignment assortativity</a:t>
+                      </a:r>
+                    </a:p>
+                  </a:txBody>
+                  <a:tcPr anchor="ctr"/>
+                </a:tc>
+                <a:tc>
+                  <a:txBody>
+                    <a:bodyPr wrap="square" lIns="50800" rIns="50800" tIns="25400" bIns="25400"/>
+                    <a:lstStyle/>
+                    <a:p>
+                      <a:r>
+                        <a:rPr sz="800"/>
+                        <a:t>Soft match strength: players </a:t>
+                      </a:r>
+                      <a:r>
+                        <a:rPr sz="800" i="1">
+                          <a:latin typeface="Cambria Math"/>
+                        </a:rPr>
+                        <a:t>\to</a:t>
+                      </a:r>
+                      <a:r>
+                        <a:rPr sz="800"/>
+                        <a:t> teams with </a:t>
+                      </a:r>
+                      <a:r>
+                        <a:rPr sz="800" i="1">
+                          <a:latin typeface="Cambria Math"/>
+                        </a:rPr>
+                        <a:t>T</a:t>
+                      </a:r>
+                      <a:r>
+                        <a:rPr sz="800" i="1" baseline="-25000">
+                          <a:latin typeface="Cambria Math"/>
+                        </a:rPr>
+                        <a:t>j^*</a:t>
+                      </a:r>
+                      <a:r>
+                        <a:rPr sz="800" i="1">
+                          <a:latin typeface="Cambria Math"/>
+                        </a:rPr>
+                        <a:t> ≈ A</a:t>
+                      </a:r>
+                      <a:r>
+                        <a:rPr sz="800" i="1" baseline="-25000">
+                          <a:latin typeface="Cambria Math"/>
+                        </a:rPr>
+                        <a:t>i</a:t>
+                      </a:r>
+                    </a:p>
+                  </a:txBody>
+                  <a:tcPr anchor="ctr"/>
+                </a:tc>
+              </a:tr>
+              <a:tr h="510235">
+                <a:tc>
+                  <a:txBody>
+                    <a:bodyPr wrap="square" lIns="50800" rIns="50800" tIns="25400" bIns="25400"/>
+                    <a:lstStyle/>
+                    <a:p>
+                      <a:r>
+                        <a:rPr sz="900" i="1">
+                          <a:latin typeface="Cambria Math"/>
+                        </a:rPr>
+                        <a:t>L</a:t>
+                      </a:r>
+                      <a:r>
+                        <a:rPr sz="800" i="1" baseline="-25000">
+                          <a:latin typeface="Cambria Math"/>
+                        </a:rPr>
+                        <a:t>C</a:t>
+                      </a:r>
+                    </a:p>
+                  </a:txBody>
+                  <a:tcPr anchor="ctr"/>
+                </a:tc>
+                <a:tc>
+                  <a:txBody>
+                    <a:bodyPr wrap="square" lIns="50800" rIns="50800" tIns="25400" bIns="25400"/>
+                    <a:lstStyle/>
+                    <a:p>
+                      <a:pPr>
+                        <a:defRPr sz="900">
+                          <a:latin typeface="Calibri"/>
+                        </a:defRPr>
+                      </a:pPr>
+                      <a:r>
+                        <a:t>Congestion measure</a:t>
+                      </a:r>
+                    </a:p>
+                  </a:txBody>
+                  <a:tcPr anchor="ctr"/>
+                </a:tc>
+                <a:tc>
+                  <a:txBody>
+                    <a:bodyPr wrap="square" lIns="50800" rIns="50800" tIns="25400" bIns="25400"/>
+                    <a:lstStyle/>
+                    <a:p>
+                      <a:r>
+                        <a:rPr sz="800"/>
+                        <a:t>LOO peer viability — deck uses smooth </a:t>
+                      </a:r>
+                      <a:r>
+                        <a:rPr sz="800" i="1">
+                          <a:latin typeface="Cambria Math"/>
+                        </a:rPr>
+                        <a:t>σ</a:t>
+                      </a:r>
+                      <a:r>
+                        <a:rPr sz="800"/>
+                        <a:t>; code also has hard share (</a:t>
+                      </a:r>
+                      <a:r>
+                        <a:rPr sz="800" i="1">
+                          <a:latin typeface="Cambria Math"/>
+                        </a:rPr>
+                        <a:t>A</a:t>
+                      </a:r>
+                      <a:r>
+                        <a:rPr sz="800" i="1" baseline="-25000">
+                          <a:latin typeface="Cambria Math"/>
+                        </a:rPr>
+                        <a:t>j</a:t>
+                      </a:r>
+                      <a:r>
+                        <a:rPr sz="800" i="1">
+                          <a:latin typeface="Cambria Math"/>
+                        </a:rPr>
+                        <a:t>&gt;\theta</a:t>
+                      </a:r>
+                      <a:r>
+                        <a:rPr sz="800"/>
+                        <a:t>)</a:t>
+                      </a:r>
+                    </a:p>
+                  </a:txBody>
+                  <a:tcPr anchor="ctr"/>
+                </a:tc>
+              </a:tr>
+              <a:tr h="510235">
+                <a:tc>
+                  <a:txBody>
+                    <a:bodyPr wrap="square" lIns="50800" rIns="50800" tIns="25400" bIns="25400"/>
+                    <a:lstStyle/>
+                    <a:p>
+                      <a:r>
+                        <a:rPr sz="900" i="1">
+                          <a:latin typeface="Cambria Math"/>
+                        </a:rPr>
+                        <a:t>λ</a:t>
+                      </a:r>
+                    </a:p>
+                  </a:txBody>
+                  <a:tcPr anchor="ctr"/>
+                </a:tc>
+                <a:tc>
+                  <a:txBody>
+                    <a:bodyPr wrap="square" lIns="50800" rIns="50800" tIns="25400" bIns="25400"/>
+                    <a:lstStyle/>
+                    <a:p>
+                      <a:pPr>
+                        <a:defRPr sz="900">
+                          <a:latin typeface="Calibri"/>
+                        </a:defRPr>
+                      </a:pPr>
+                      <a:r>
+                        <a:t>Congestion weight in score</a:t>
+                      </a:r>
+                    </a:p>
+                  </a:txBody>
+                  <a:tcPr anchor="ctr"/>
+                </a:tc>
+                <a:tc>
+                  <a:txBody>
+                    <a:bodyPr wrap="square" lIns="50800" rIns="50800" tIns="25400" bIns="25400"/>
+                    <a:lstStyle/>
+                    <a:p>
+                      <a:r>
+                        <a:rPr sz="800"/>
+                        <a:t>How hard </a:t>
+                      </a:r>
+                      <a:r>
+                        <a:rPr sz="800" i="1">
+                          <a:latin typeface="Cambria Math"/>
+                        </a:rPr>
+                        <a:t>L</a:t>
+                      </a:r>
+                      <a:r>
+                        <a:rPr sz="800" i="1" baseline="-25000">
+                          <a:latin typeface="Cambria Math"/>
+                        </a:rPr>
+                        <a:t>C</a:t>
+                      </a:r>
+                      <a:r>
+                        <a:rPr sz="800"/>
+                        <a:t> penalizes ranking — not congestion itself</a:t>
+                      </a:r>
+                    </a:p>
+                  </a:txBody>
+                  <a:tcPr anchor="ctr"/>
+                </a:tc>
+              </a:tr>
+              <a:tr h="510235">
+                <a:tc>
+                  <a:txBody>
+                    <a:bodyPr wrap="square" lIns="50800" rIns="50800" tIns="25400" bIns="25400"/>
+                    <a:lstStyle/>
+                    <a:p>
+                      <a:r>
+                        <a:rPr sz="900" i="1">
+                          <a:latin typeface="Cambria Math"/>
+                        </a:rPr>
+                        <a:t>\theta</a:t>
+                      </a:r>
+                    </a:p>
+                  </a:txBody>
+                  <a:tcPr anchor="ctr"/>
+                </a:tc>
+                <a:tc>
+                  <a:txBody>
+                    <a:bodyPr wrap="square" lIns="50800" rIns="50800" tIns="25400" bIns="25400"/>
+                    <a:lstStyle/>
+                    <a:p>
+                      <a:pPr>
+                        <a:defRPr sz="900">
+                          <a:latin typeface="Calibri"/>
+                        </a:defRPr>
+                      </a:pPr>
+                      <a:r>
+                        <a:t>Viability cutline</a:t>
+                      </a:r>
+                    </a:p>
+                  </a:txBody>
+                  <a:tcPr anchor="ctr"/>
+                </a:tc>
+                <a:tc>
+                  <a:txBody>
+                    <a:bodyPr wrap="square" lIns="50800" rIns="50800" tIns="25400" bIns="25400"/>
+                    <a:lstStyle/>
+                    <a:p>
+                      <a:pPr>
+                        <a:defRPr sz="800">
+                          <a:latin typeface="Calibri"/>
+                        </a:defRPr>
+                      </a:pPr>
+                      <a:r>
+                        <a:t>Center of the sigmoid</a:t>
+                      </a:r>
+                    </a:p>
+                  </a:txBody>
+                  <a:tcPr anchor="ctr"/>
+                </a:tc>
+              </a:tr>
+              <a:tr h="510235">
+                <a:tc>
+                  <a:txBody>
+                    <a:bodyPr wrap="square" lIns="50800" rIns="50800" tIns="25400" bIns="25400"/>
+                    <a:lstStyle/>
+                    <a:p>
+                      <a:r>
+                        <a:rPr sz="900" i="1">
+                          <a:latin typeface="Cambria Math"/>
+                        </a:rPr>
+                        <a:t>\gamma</a:t>
+                      </a:r>
+                    </a:p>
+                  </a:txBody>
+                  <a:tcPr anchor="ctr"/>
+                </a:tc>
+                <a:tc>
+                  <a:txBody>
+                    <a:bodyPr wrap="square" lIns="50800" rIns="50800" tIns="25400" bIns="25400"/>
+                    <a:lstStyle/>
+                    <a:p>
+                      <a:pPr>
+                        <a:defRPr sz="900">
+                          <a:latin typeface="Calibri"/>
+                        </a:defRPr>
+                      </a:pPr>
+                      <a:r>
+                        <a:t>Sigmoid sharpness</a:t>
+                      </a:r>
+                    </a:p>
+                  </a:txBody>
+                  <a:tcPr anchor="ctr"/>
+                </a:tc>
+                <a:tc>
+                  <a:txBody>
+                    <a:bodyPr wrap="square" lIns="50800" rIns="50800" tIns="25400" bIns="25400"/>
+                    <a:lstStyle/>
+                    <a:p>
+                      <a:r>
+                        <a:rPr sz="800"/>
+                        <a:t>Steepness of viability step around </a:t>
+                      </a:r>
+                      <a:r>
+                        <a:rPr sz="800" i="1">
+                          <a:latin typeface="Cambria Math"/>
+                        </a:rPr>
+                        <a:t>\theta</a:t>
+                      </a:r>
+                    </a:p>
+                  </a:txBody>
+                  <a:tcPr anchor="ctr"/>
+                </a:tc>
+              </a:tr>
+              <a:tr h="510237">
+                <a:tc>
+                  <a:txBody>
+                    <a:bodyPr wrap="square" lIns="50800" rIns="50800" tIns="25400" bIns="25400"/>
+                    <a:lstStyle/>
+                    <a:p>
+                      <a:r>
+                        <a:rPr sz="900" i="1">
+                          <a:latin typeface="Cambria Math"/>
+                        </a:rPr>
+                        <a:t>K/N</a:t>
+                      </a:r>
+                    </a:p>
+                  </a:txBody>
+                  <a:tcPr anchor="ctr"/>
+                </a:tc>
+                <a:tc>
+                  <a:txBody>
+                    <a:bodyPr wrap="square" lIns="50800" rIns="50800" tIns="25400" bIns="25400"/>
+                    <a:lstStyle/>
+                    <a:p>
+                      <a:pPr>
+                        <a:defRPr sz="900">
+                          <a:latin typeface="Calibri"/>
+                        </a:defRPr>
+                      </a:pPr>
+                      <a:r>
+                        <a:t>Selectivity</a:t>
+                      </a:r>
+                    </a:p>
+                  </a:txBody>
+                  <a:tcPr anchor="ctr"/>
+                </a:tc>
+                <a:tc>
+                  <a:txBody>
+                    <a:bodyPr wrap="square" lIns="50800" rIns="50800" tIns="25400" bIns="25400"/>
+                    <a:lstStyle/>
+                    <a:p>
+                      <a:r>
+                        <a:rPr sz="800"/>
+                        <a:t>Fraction of league selected (</a:t>
+                      </a:r>
+                      <a:r>
+                        <a:rPr sz="800" i="1">
+                          <a:latin typeface="Cambria Math"/>
+                        </a:rPr>
+                        <a:t>K \div N</a:t>
+                      </a:r>
+                      <a:r>
+                        <a:rPr sz="800"/>
+                        <a:t>)</a:t>
+                      </a:r>
+                    </a:p>
+                  </a:txBody>
+                  <a:tcPr anchor="ctr"/>
+                </a:tc>
+              </a:tr>
+            </a:tbl>
+          </a:graphicData>
+        </a:graphic>
+      </p:graphicFrame>
+      <p:sp>
+        <p:nvSpPr>
+          <p:cNvPr id="5" name="TextBox 4"/>
+          <p:cNvSpPr txBox="1"/>
+          <p:nvPr/>
+        </p:nvSpPr>
+        <p:spPr>
+          <a:xfrm>
+            <a:off x="6446520" y="749808"/>
+            <a:ext cx="5361127" cy="1874519"/>
+          </a:xfrm>
+          <a:prstGeom prst="rect">
+            <a:avLst/>
+          </a:prstGeom>
+          <a:noFill/>
+        </p:spPr>
+        <p:txBody>
+          <a:bodyPr wrap="square">
+            <a:spAutoFit/>
+          </a:bodyPr>
+          <a:lstStyle/>
+          <a:p>
+            <a:pPr>
+              <a:spcBef>
+                <a:spcPts val="0"/>
+              </a:spcBef>
+              <a:spcAft>
+                <a:spcPts val="0"/>
+              </a:spcAft>
+              <a:defRPr b="1"/>
+            </a:pPr>
+            <a:r>
+              <a:rPr sz="900"/>
+              <a:t>Not curve fitting: which rules \emph{bend} synthetic selection curves — not NCAA fit yet.</a:t>
+            </a:r>
+          </a:p>
+          <a:p>
+            <a:pPr>
+              <a:spcBef>
+                <a:spcPts val="0"/>
+              </a:spcBef>
+              <a:spcAft>
+                <a:spcPts val="0"/>
+              </a:spcAft>
+            </a:pPr>
+            <a:r>
+              <a:rPr sz="900"/>
+              <a:t>Three steps: ASSIGN (</a:t>
+            </a:r>
+            <a:r>
+              <a:rPr sz="900" i="1">
+                <a:latin typeface="Cambria Math"/>
+              </a:rPr>
+              <a:t>ρ</a:t>
+            </a:r>
+            <a:r>
+              <a:rPr sz="900"/>
+              <a:t>) </a:t>
+            </a:r>
+            <a:r>
+              <a:rPr sz="900" i="1">
+                <a:latin typeface="Cambria Math"/>
+              </a:rPr>
+              <a:t>\to</a:t>
+            </a:r>
+            <a:r>
+              <a:rPr sz="900"/>
+              <a:t> SCORE (</a:t>
+            </a:r>
+            <a:r>
+              <a:rPr sz="900" i="1">
+                <a:latin typeface="Cambria Math"/>
+              </a:rPr>
+              <a:t>S</a:t>
+            </a:r>
+            <a:r>
+              <a:rPr sz="800" i="1" baseline="-25000">
+                <a:latin typeface="Cambria Math"/>
+              </a:rPr>
+              <a:t>i</a:t>
+            </a:r>
+            <a:r>
+              <a:rPr sz="900" i="1">
+                <a:latin typeface="Cambria Math"/>
+              </a:rPr>
+              <a:t> = A</a:t>
+            </a:r>
+            <a:r>
+              <a:rPr sz="800" i="1" baseline="-25000">
+                <a:latin typeface="Cambria Math"/>
+              </a:rPr>
+              <a:t>i</a:t>
+            </a:r>
+            <a:r>
+              <a:rPr sz="900" i="1">
+                <a:latin typeface="Cambria Math"/>
+              </a:rPr>
+              <a:t> - λ L</a:t>
+            </a:r>
+            <a:r>
+              <a:rPr sz="800" i="1" baseline="-25000">
+                <a:latin typeface="Cambria Math"/>
+              </a:rPr>
+              <a:t>C</a:t>
+            </a:r>
+            <a:r>
+              <a:rPr sz="900"/>
+              <a:t>) </a:t>
+            </a:r>
+            <a:r>
+              <a:rPr sz="900" i="1">
+                <a:latin typeface="Cambria Math"/>
+              </a:rPr>
+              <a:t>\to</a:t>
+            </a:r>
+            <a:r>
+              <a:rPr sz="900"/>
+              <a:t> SELECT (top-</a:t>
+            </a:r>
+            <a:r>
+              <a:rPr sz="900" i="1">
+                <a:latin typeface="Cambria Math"/>
+              </a:rPr>
+              <a:t>K</a:t>
+            </a:r>
+            <a:r>
+              <a:rPr sz="900"/>
+              <a:t>); then VISUALIZE by pool-mean bin.</a:t>
+            </a:r>
+          </a:p>
+          <a:p>
+            <a:pPr>
+              <a:spcBef>
+                <a:spcPts val="0"/>
+              </a:spcBef>
+              <a:spcAft>
+                <a:spcPts val="0"/>
+              </a:spcAft>
+            </a:pPr>
+            <a:r>
+              <a:rPr sz="900" i="1">
+                <a:latin typeface="Cambria Math"/>
+              </a:rPr>
+              <a:t>L</a:t>
+            </a:r>
+            <a:r>
+              <a:rPr sz="800" i="1" baseline="-25000">
+                <a:latin typeface="Cambria Math"/>
+              </a:rPr>
+              <a:t>C</a:t>
+            </a:r>
+            <a:r>
+              <a:rPr sz="900"/>
+              <a:t> in this deck: \texttt{crowding\_smooth} (mean </a:t>
+            </a:r>
+            <a:r>
+              <a:rPr sz="900" i="1">
+                <a:latin typeface="Cambria Math"/>
+              </a:rPr>
+              <a:t>σ</a:t>
+            </a:r>
+            <a:r>
+              <a:rPr sz="900"/>
+              <a:t>). Code also builds hard </a:t>
+            </a:r>
+            <a:r>
+              <a:rPr sz="900" i="1">
+                <a:latin typeface="Cambria Math"/>
+              </a:rPr>
+              <a:t>L</a:t>
+            </a:r>
+            <a:r>
+              <a:rPr sz="800" i="1" baseline="-25000">
+                <a:latin typeface="Cambria Math"/>
+              </a:rPr>
+              <a:t>C</a:t>
+            </a:r>
+            <a:r>
+              <a:rPr sz="900"/>
+              <a:t> = LOO share with </a:t>
+            </a:r>
+            <a:r>
+              <a:rPr sz="900" i="1">
+                <a:latin typeface="Cambria Math"/>
+              </a:rPr>
+              <a:t>A</a:t>
+            </a:r>
+            <a:r>
+              <a:rPr sz="800" i="1" baseline="-25000">
+                <a:latin typeface="Cambria Math"/>
+              </a:rPr>
+              <a:t>j</a:t>
+            </a:r>
+            <a:r>
+              <a:rPr sz="900" i="1">
+                <a:latin typeface="Cambria Math"/>
+              </a:rPr>
+              <a:t> &gt; \theta</a:t>
+            </a:r>
+            <a:r>
+              <a:rPr sz="900"/>
+              <a:t> — not shown here.</a:t>
+            </a:r>
+          </a:p>
+          <a:p>
+            <a:pPr>
+              <a:spcBef>
+                <a:spcPts val="0"/>
+              </a:spcBef>
+              <a:spcAft>
+                <a:spcPts val="0"/>
+              </a:spcAft>
+            </a:pPr>
+            <a:r>
+              <a:rPr sz="900"/>
+              <a:t>One-at-a-time (OAT): each slide moves one knob; other settings stay at benchmark values.</a:t>
+            </a:r>
+          </a:p>
+          <a:p>
+            <a:pPr>
+              <a:spcBef>
+                <a:spcPts val="0"/>
+              </a:spcBef>
+              <a:spcAft>
+                <a:spcPts val="0"/>
+              </a:spcAft>
+            </a:pPr>
+            <a:r>
+              <a:rPr sz="900"/>
+              <a:t>Seed 42 on stochastic steps: draw </a:t>
+            </a:r>
+            <a:r>
+              <a:rPr sz="900" i="1">
+                <a:latin typeface="Cambria Math"/>
+              </a:rPr>
+              <a:t>A</a:t>
+            </a:r>
+            <a:r>
+              <a:rPr sz="800" i="1" baseline="-25000">
+                <a:latin typeface="Cambria Math"/>
+              </a:rPr>
+              <a:t>i</a:t>
+            </a:r>
+            <a:r>
+              <a:rPr sz="900"/>
+              <a:t>, </a:t>
+            </a:r>
+            <a:r>
+              <a:rPr sz="900" i="1">
+                <a:latin typeface="Cambria Math"/>
+              </a:rPr>
+              <a:t>T</a:t>
+            </a:r>
+            <a:r>
+              <a:rPr sz="800" i="1" baseline="-25000">
+                <a:latin typeface="Cambria Math"/>
+              </a:rPr>
+              <a:t>j^*</a:t>
+            </a:r>
+            <a:r>
+              <a:rPr sz="900"/>
+              <a:t>; soft-</a:t>
+            </a:r>
+            <a:r>
+              <a:rPr sz="900" i="1">
+                <a:latin typeface="Cambria Math"/>
+              </a:rPr>
+              <a:t>ρ</a:t>
+            </a:r>
+            <a:r>
+              <a:rPr sz="900"/>
+              <a:t> assignment. Score, top-</a:t>
+            </a:r>
+            <a:r>
+              <a:rPr sz="900" i="1">
+                <a:latin typeface="Cambria Math"/>
+              </a:rPr>
+              <a:t>K</a:t>
+            </a:r>
+            <a:r>
+              <a:rPr sz="900"/>
+              <a:t>, bins are deterministic.</a:t>
+            </a:r>
+          </a:p>
+          <a:p>
+            <a:pPr>
+              <a:spcBef>
+                <a:spcPts val="0"/>
+              </a:spcBef>
+              <a:spcAft>
+                <a:spcPts val="0"/>
+              </a:spcAft>
+            </a:pPr>
+            <a:r>
+              <a:rPr sz="900"/>
+              <a:t>League: </a:t>
+            </a:r>
+            <a:r>
+              <a:rPr sz="900" i="1">
+                <a:latin typeface="Cambria Math"/>
+              </a:rPr>
+              <a:t>N=5600</a:t>
+            </a:r>
+            <a:r>
+              <a:rPr sz="900"/>
+              <a:t>, </a:t>
+            </a:r>
+            <a:r>
+              <a:rPr sz="900" i="1">
+                <a:latin typeface="Cambria Math"/>
+              </a:rPr>
+              <a:t>K=560</a:t>
+            </a:r>
+            <a:r>
+              <a:rPr sz="900"/>
+              <a:t>, </a:t>
+            </a:r>
+            <a:r>
+              <a:rPr sz="900" i="1">
+                <a:latin typeface="Cambria Math"/>
+              </a:rPr>
+              <a:t>K/N=10%</a:t>
+            </a:r>
+            <a:r>
+              <a:rPr sz="900"/>
+              <a:t> (539 preset).</a:t>
+            </a:r>
+          </a:p>
+        </p:txBody>
+      </p:sp>
+      <p:sp>
+        <p:nvSpPr>
+          <p:cNvPr id="6" name="TextBox 5"/>
+          <p:cNvSpPr txBox="1"/>
+          <p:nvPr/>
+        </p:nvSpPr>
+        <p:spPr>
+          <a:xfrm>
+            <a:off x="6446520" y="2660903"/>
+            <a:ext cx="5361127" cy="1417320"/>
+          </a:xfrm>
+          <a:prstGeom prst="rect">
+            <a:avLst/>
+          </a:prstGeom>
+          <a:noFill/>
+        </p:spPr>
+        <p:txBody>
+          <a:bodyPr wrap="square">
+            <a:spAutoFit/>
+          </a:bodyPr>
+          <a:lstStyle/>
+          <a:p>
+            <a:pPr>
+              <a:spcBef>
+                <a:spcPts val="0"/>
+              </a:spcBef>
+              <a:spcAft>
+                <a:spcPts val="0"/>
+              </a:spcAft>
+              <a:defRPr b="1"/>
+            </a:pPr>
+            <a:r>
+              <a:rPr sz="900" i="1">
+                <a:latin typeface="Cambria Math"/>
+              </a:rPr>
+              <a:t>A</a:t>
+            </a:r>
+            <a:r>
+              <a:rPr sz="800" i="1" baseline="-25000">
+                <a:latin typeface="Cambria Math"/>
+              </a:rPr>
+              <a:t>i</a:t>
+            </a:r>
+            <a:r>
+              <a:rPr sz="900"/>
+              <a:t>: Beta(2,2) on [0,1] — \texttt{SELECTION\_539\_ABILITY\_DRAW}</a:t>
+            </a:r>
+          </a:p>
+          <a:p>
+            <a:pPr>
+              <a:spcBef>
+                <a:spcPts val="0"/>
+              </a:spcBef>
+              <a:spcAft>
+                <a:spcPts val="0"/>
+              </a:spcAft>
+            </a:pPr>
+            <a:r>
+              <a:rPr sz="900" i="1">
+                <a:latin typeface="Cambria Math"/>
+              </a:rPr>
+              <a:t>T</a:t>
+            </a:r>
+            <a:r>
+              <a:rPr sz="800" i="1" baseline="-25000">
+                <a:latin typeface="Cambria Math"/>
+              </a:rPr>
+              <a:t>j^*</a:t>
+            </a:r>
+            <a:r>
+              <a:rPr sz="900"/>
+              <a:t>: Uniform[0,1] iid per team — \texttt{draw\_target\_means}; synthetic assignment targets, not NCAA roster data</a:t>
+            </a:r>
+          </a:p>
+          <a:p>
+            <a:pPr>
+              <a:spcBef>
+                <a:spcPts val="0"/>
+              </a:spcBef>
+              <a:spcAft>
+                <a:spcPts val="0"/>
+              </a:spcAft>
+            </a:pPr>
+            <a:r>
+              <a:rPr sz="900" i="1">
+                <a:latin typeface="Cambria Math"/>
+              </a:rPr>
+              <a:t>T</a:t>
+            </a:r>
+            <a:r>
+              <a:rPr sz="800" i="1" baseline="-25000">
+                <a:latin typeface="Cambria Math"/>
+              </a:rPr>
+              <a:t>j</a:t>
+            </a:r>
+            <a:r>
+              <a:rPr sz="900"/>
+              <a:t>: realized roster mean after ASSIGN — not drawn; Sketch A 2D </a:t>
+            </a:r>
+            <a:r>
+              <a:rPr sz="900" i="1">
+                <a:latin typeface="Cambria Math"/>
+              </a:rPr>
+              <a:t>y</a:t>
+            </a:r>
+            <a:r>
+              <a:rPr sz="900"/>
+              <a:t>-axis</a:t>
+            </a:r>
+          </a:p>
+          <a:p>
+            <a:pPr>
+              <a:spcBef>
+                <a:spcPts val="0"/>
+              </a:spcBef>
+              <a:spcAft>
+                <a:spcPts val="0"/>
+              </a:spcAft>
+            </a:pPr>
+            <a:r>
+              <a:rPr sz="900" i="1">
+                <a:latin typeface="Cambria Math"/>
+              </a:rPr>
+              <a:t>λ=0.55</a:t>
+            </a:r>
+            <a:r>
+              <a:rPr sz="900"/>
+              <a:t> — \texttt{tier1\_539\_reference\_settings.json} / playground default</a:t>
+            </a:r>
+          </a:p>
+          <a:p>
+            <a:pPr>
+              <a:spcBef>
+                <a:spcPts val="0"/>
+              </a:spcBef>
+              <a:spcAft>
+                <a:spcPts val="0"/>
+              </a:spcAft>
+            </a:pPr>
+            <a:r>
+              <a:rPr sz="900" i="1">
+                <a:latin typeface="Cambria Math"/>
+              </a:rPr>
+              <a:t>\theta=0.72</a:t>
+            </a:r>
+            <a:r>
+              <a:rPr sz="900"/>
+              <a:t>, </a:t>
+            </a:r>
+            <a:r>
+              <a:rPr sz="900" i="1">
+                <a:latin typeface="Cambria Math"/>
+              </a:rPr>
+              <a:t>\gamma=10</a:t>
+            </a:r>
+            <a:r>
+              <a:rPr sz="900"/>
+              <a:t> — same 539 reference JSON</a:t>
+            </a:r>
+          </a:p>
+          <a:p>
+            <a:pPr>
+              <a:spcBef>
+                <a:spcPts val="0"/>
+              </a:spcBef>
+              <a:spcAft>
+                <a:spcPts val="0"/>
+              </a:spcAft>
+            </a:pPr>
+            <a:r>
+              <a:rPr sz="900" i="1">
+                <a:latin typeface="Cambria Math"/>
+              </a:rPr>
+              <a:t>ρ=8</a:t>
+            </a:r>
+            <a:r>
+              <a:rPr sz="900"/>
+              <a:t> — gallery fixed assign for </a:t>
+            </a:r>
+            <a:r>
+              <a:rPr sz="900" i="1">
+                <a:latin typeface="Cambria Math"/>
+              </a:rPr>
+              <a:t>λ</a:t>
+            </a:r>
+            <a:r>
+              <a:rPr sz="900"/>
+              <a:t> / </a:t>
+            </a:r>
+            <a:r>
+              <a:rPr sz="900" i="1">
+                <a:latin typeface="Cambria Math"/>
+              </a:rPr>
+              <a:t>\theta</a:t>
+            </a:r>
+            <a:r>
+              <a:rPr sz="900"/>
+              <a:t> slides (moderate-high mixing; not a 539 JSON field)</a:t>
+            </a:r>
+          </a:p>
+          <a:p>
+            <a:pPr>
+              <a:spcBef>
+                <a:spcPts val="0"/>
+              </a:spcBef>
+              <a:spcAft>
+                <a:spcPts val="0"/>
+              </a:spcAft>
+            </a:pPr>
+            <a:r>
+              <a:rPr sz="900" i="1">
+                <a:latin typeface="Cambria Math"/>
+              </a:rPr>
+              <a:t>K/N=10%</a:t>
+            </a:r>
+            <a:r>
+              <a:rPr sz="900"/>
+              <a:t> — characterization default (MBB draft </a:t>
+            </a:r>
+            <a:r>
+              <a:rPr sz="900" i="1">
+                <a:latin typeface="Cambria Math"/>
+              </a:rPr>
+              <a:t>≈</a:t>
+            </a:r>
+            <a:r>
+              <a:rPr sz="900"/>
+              <a:t> 1% is a separate calibration point)</a:t>
+            </a:r>
+          </a:p>
+        </p:txBody>
+      </p:sp>
+      <p:sp>
+        <p:nvSpPr>
+          <p:cNvPr id="7" name="TextBox 6"/>
+          <p:cNvSpPr txBox="1"/>
+          <p:nvPr/>
+        </p:nvSpPr>
+        <p:spPr>
+          <a:xfrm>
+            <a:off x="6446520" y="4114799"/>
+            <a:ext cx="5361127" cy="1975105"/>
+          </a:xfrm>
+          <a:prstGeom prst="rect">
+            <a:avLst/>
+          </a:prstGeom>
+          <a:noFill/>
+        </p:spPr>
+        <p:txBody>
+          <a:bodyPr wrap="square">
+            <a:spAutoFit/>
+          </a:bodyPr>
+          <a:lstStyle/>
+          <a:p>
+            <a:pPr>
+              <a:spcBef>
+                <a:spcPts val="0"/>
+              </a:spcBef>
+              <a:spcAft>
+                <a:spcPts val="0"/>
+              </a:spcAft>
+              <a:defRPr b="1"/>
+            </a:pPr>
+            <a:r>
+              <a:rPr sz="900"/>
+              <a:t>Real hero: draft rate vs \textbf{poolq\_loo} (teammate quality, leave-one-out) — a \textbf{bend} at the top bins.</a:t>
+            </a:r>
+          </a:p>
+          <a:p>
+            <a:pPr>
+              <a:spcBef>
+                <a:spcPts val="0"/>
+              </a:spcBef>
+              <a:spcAft>
+                <a:spcPts val="0"/>
+              </a:spcAft>
+            </a:pPr>
+            <a:r>
+              <a:rPr sz="900"/>
+              <a:t>This deck: fraction selected vs \textbf{pool mean} in a fake league — same \emph{kind} of question, different axis and league.</a:t>
+            </a:r>
+          </a:p>
+          <a:p>
+            <a:pPr>
+              <a:spcBef>
+                <a:spcPts val="0"/>
+              </a:spcBef>
+              <a:spcAft>
+                <a:spcPts val="0"/>
+              </a:spcAft>
+            </a:pPr>
+            <a:r>
+              <a:rPr sz="900"/>
+              <a:t>Benchmarks anchor to the Alex 539 playground track so sim slides stay comparable; we have \textbf{not} re-fit those numbers to NCAA data in Phase B.</a:t>
+            </a:r>
+          </a:p>
+        </p:txBody>
+      </p:sp>
+      <p:sp>
+        <p:nvSpPr>
+          <p:cNvPr id="8" name="TextBox 7"/>
+          <p:cNvSpPr txBox="1"/>
+          <p:nvPr/>
+        </p:nvSpPr>
+        <p:spPr>
+          <a:xfrm>
+            <a:off x="384048" y="6126480"/>
+            <a:ext cx="11423599" cy="347472"/>
+          </a:xfrm>
+          <a:prstGeom prst="rect">
+            <a:avLst/>
+          </a:prstGeom>
+          <a:noFill/>
+        </p:spPr>
+        <p:txBody>
+          <a:bodyPr wrap="none">
+            <a:spAutoFit/>
+          </a:bodyPr>
+          <a:lstStyle/>
+          <a:p>
+            <a:pPr>
+              <a:defRPr b="1"/>
+            </a:pPr>
+            <a:r>
+              <a:rPr sz="1100"/>
+              <a:t>Claim: Phase B maps which generative knobs move \emph{who gets selected} — prerequisite before Phase C calibration to the hero.</a:t>
+            </a:r>
+          </a:p>
+        </p:txBody>
+      </p:sp>
+    </p:spTree>
+  </p:cSld>
+  <p:clrMapOvr>
+    <a:masterClrMapping/>
+  </p:clrMapOvr>
+</p:sld>
+</file>
+
+<file path=ppt/slides/slide10.xml><?xml version="1.0" encoding="utf-8"?>
+<p:sld xmlns:a="http://schemas.openxmlformats.org/drawingml/2006/main" xmlns:p="http://schemas.openxmlformats.org/presentationml/2006/main" xmlns:r="http://schemas.openxmlformats.org/officeDocument/2006/relationships">
+  <p:cSld>
+    <p:spTree>
+      <p:nvGrpSpPr>
+        <p:cNvPr id="1" name=""/>
+        <p:cNvGrpSpPr/>
+        <p:nvPr/>
+      </p:nvGrpSpPr>
+      <p:grpSpPr/>
+      <p:sp>
+        <p:nvSpPr>
+          <p:cNvPr id="2" name="TextBox 1"/>
+          <p:cNvSpPr txBox="1"/>
+          <p:nvPr/>
+        </p:nvSpPr>
+        <p:spPr>
+          <a:xfrm>
             <a:off x="411480" y="256032"/>
             <a:ext cx="11368735" cy="420624"/>
           </a:xfrm>
@@ -3127,11 +4576,11 @@
               <a:rPr sz="2000" i="1">
                 <a:latin typeface="Cambria Math"/>
               </a:rPr>
-              <a:t>ρ</a:t>
+              <a:t>\gamma</a:t>
             </a:r>
             <a:r>
               <a:rPr sz="2000"/>
-              <a:t> (assignment assortativity) — sort-and-chop shown</a:t>
+              <a:t> (viability sharpness) — selection curves</a:t>
             </a:r>
           </a:p>
         </p:txBody>
@@ -3172,21 +4621,46 @@
               <a:rPr sz="1100" i="1">
                 <a:latin typeface="Cambria Math"/>
               </a:rPr>
-              <a:t>ρ</a:t>
+              <a:t>\gamma</a:t>
             </a:r>
             <a:r>
               <a:rPr sz="1100"/>
-              <a:t> — one-at-a-time at 539 baseline (score + top-</a:t>
-            </a:r>
+              <a:t> — one-at-a-time (539 sort-and-chop benchmark)</a:t>
+            </a:r>
+          </a:p>
+          <a:p>
+            <a:pPr>
+              <a:spcAft>
+                <a:spcPts val="0"/>
+              </a:spcAft>
+            </a:pPr>
             <a:r>
               <a:rPr sz="1100" i="1">
                 <a:latin typeface="Cambria Math"/>
               </a:rPr>
-              <a:t>K</a:t>
+              <a:t>σ(x) = 1/(1+e</a:t>
+            </a:r>
+            <a:r>
+              <a:rPr sz="900" baseline="30000">
+                <a:latin typeface="Cambria Math"/>
+              </a:rPr>
+              <a:t>-x</a:t>
+            </a:r>
+            <a:r>
+              <a:rPr sz="1100" i="1">
+                <a:latin typeface="Cambria Math"/>
+              </a:rPr>
+              <a:t>)</a:t>
             </a:r>
             <a:r>
               <a:rPr sz="1100"/>
-              <a:t> fixed)</a:t>
+              <a:t>, </a:t>
+            </a:r>
+            <a:r>
+              <a:rPr sz="1100" i="1">
+                <a:latin typeface="Cambria Math"/>
+              </a:rPr>
+              <a:t>x = \gamma(A-\theta)</a:t>
             </a:r>
           </a:p>
           <a:p>
@@ -3194,40 +4668,16 @@
               <a:spcAft>
                 <a:spcPts val="0"/>
               </a:spcAft>
-              <a:defRPr sz="1000" b="1"/>
-            </a:pPr>
-            <a:r>
-              <a:t>ASSIGN (knob ρ) — LaTeX:</a:t>
-            </a:r>
-          </a:p>
-          <a:p>
-            <a:pPr>
-              <a:spcAft>
-                <a:spcPts val="0"/>
-              </a:spcAft>
-            </a:pPr>
-            <a:r>
-              <a:rPr sz="1000">
-                <a:latin typeface="Courier New"/>
-              </a:rPr>
-              <a:t>\pi_{ij} \propto \exp\left(-\rho \cdot \frac{(A_i-T_j)^2}{2\sigma^2}\right)</a:t>
-            </a:r>
-          </a:p>
-          <a:p>
-            <a:pPr>
-              <a:spcAft>
-                <a:spcPts val="0"/>
-              </a:spcAft>
             </a:pPr>
             <a:r>
               <a:rPr sz="1000" i="1">
                 <a:latin typeface="Cambria Math"/>
               </a:rPr>
-              <a:t>σ=0.65</a:t>
+              <a:t>\theta=0.72</a:t>
             </a:r>
             <a:r>
               <a:rPr sz="1000"/>
-              <a:t> fixed</a:t>
+              <a:t> fixed; sort-and-chop assign</a:t>
             </a:r>
           </a:p>
           <a:p>
@@ -3244,91 +4694,34 @@
               <a:rPr sz="1000" i="1">
                 <a:latin typeface="Cambria Math"/>
               </a:rPr>
-              <a:t>ρ ∈ {0.1, 1, 8, 32}</a:t>
-            </a:r>
+              <a:t>\gamma ∈ {5, 10, 20}</a:t>
+            </a:r>
+          </a:p>
+          <a:p>
+            <a:pPr>
+              <a:spcAft>
+                <a:spcPts val="0"/>
+              </a:spcAft>
+            </a:pPr>
             <a:r>
               <a:rPr sz="1000"/>
-              <a:t> + sort-and-chop</a:t>
-            </a:r>
-          </a:p>
-          <a:p>
-            <a:pPr>
-              <a:spcAft>
-                <a:spcPts val="0"/>
-              </a:spcAft>
-            </a:pPr>
+              <a:t>within each </a:t>
+            </a:r>
             <a:r>
               <a:rPr sz="1000" i="1">
                 <a:latin typeface="Cambria Math"/>
               </a:rPr>
-              <a:t>S</a:t>
-            </a:r>
-            <a:r>
-              <a:rPr sz="800" i="1" baseline="-25000">
-                <a:latin typeface="Cambria Math"/>
-              </a:rPr>
-              <a:t>i</a:t>
+              <a:t>\gamma</a:t>
+            </a:r>
+            <a:r>
+              <a:rPr sz="1000"/>
+              <a:t>: </a:t>
             </a:r>
             <a:r>
               <a:rPr sz="1000" i="1">
                 <a:latin typeface="Cambria Math"/>
               </a:rPr>
-              <a:t> = A</a:t>
-            </a:r>
-            <a:r>
-              <a:rPr sz="800" i="1" baseline="-25000">
-                <a:latin typeface="Cambria Math"/>
-              </a:rPr>
-              <a:t>i</a:t>
-            </a:r>
-            <a:r>
-              <a:rPr sz="1000" i="1">
-                <a:latin typeface="Cambria Math"/>
-              </a:rPr>
-              <a:t> - 0.55 · L</a:t>
-            </a:r>
-            <a:r>
-              <a:rPr sz="800" i="1" baseline="-25000">
-                <a:latin typeface="Cambria Math"/>
-              </a:rPr>
-              <a:t>C</a:t>
-            </a:r>
-            <a:r>
-              <a:rPr sz="1000"/>
-              <a:t> (crowding in score held constant across arms)</a:t>
-            </a:r>
-          </a:p>
-          <a:p>
-            <a:pPr>
-              <a:spcAft>
-                <a:spcPts val="0"/>
-              </a:spcAft>
-            </a:pPr>
-            <a:r>
-              <a:rPr sz="1000"/>
-              <a:t>top-</a:t>
-            </a:r>
-            <a:r>
-              <a:rPr sz="1000" i="1">
-                <a:latin typeface="Cambria Math"/>
-              </a:rPr>
-              <a:t>K</a:t>
-            </a:r>
-            <a:r>
-              <a:rPr sz="1000"/>
-              <a:t> by </a:t>
-            </a:r>
-            <a:r>
-              <a:rPr sz="1000" i="1">
-                <a:latin typeface="Cambria Math"/>
-              </a:rPr>
-              <a:t>S</a:t>
-            </a:r>
-            <a:r>
-              <a:rPr sz="800" i="1" baseline="-25000">
-                <a:latin typeface="Cambria Math"/>
-              </a:rPr>
-              <a:t>i</a:t>
+              <a:t>λ ∈ {0, 0.25, 0.55, 0.75, 1.0}</a:t>
             </a:r>
           </a:p>
           <a:p>
@@ -3386,8 +4779,8 @@
         </p:blipFill>
         <p:spPr>
           <a:xfrm>
-            <a:off x="5273272" y="768096"/>
-            <a:ext cx="6006838" cy="3895344"/>
+            <a:off x="6476591" y="768096"/>
+            <a:ext cx="3600201" cy="3895344"/>
           </a:xfrm>
           <a:prstGeom prst="rect">
             <a:avLst/>
@@ -3426,49 +4819,37 @@
             </a:pPr>
             <a:r>
               <a:rPr sz="900"/>
-              <a:t>OAT: one draw of </a:t>
-            </a:r>
-            <a:r>
-              <a:rPr sz="900" i="1">
-                <a:latin typeface="Cambria Math"/>
-              </a:rPr>
-              <a:t>A</a:t>
-            </a:r>
-            <a:r>
-              <a:rPr sz="800" i="1" baseline="-25000">
-                <a:latin typeface="Cambria Math"/>
-              </a:rPr>
-              <a:t>i</a:t>
-            </a:r>
-            <a:r>
-              <a:rPr sz="900"/>
-              <a:t>, </a:t>
-            </a:r>
-            <a:r>
-              <a:rPr sz="900" i="1">
-                <a:latin typeface="Cambria Math"/>
-              </a:rPr>
-              <a:t>T</a:t>
-            </a:r>
-            <a:r>
-              <a:rPr sz="800" i="1" baseline="-25000">
-                <a:latin typeface="Cambria Math"/>
-              </a:rPr>
-              <a:t>j</a:t>
-            </a:r>
-            <a:r>
-              <a:rPr sz="900"/>
-              <a:t> (seed </a:t>
-            </a:r>
-            <a:r>
-              <a:rPr sz="900" i="1">
-                <a:latin typeface="Cambria Math"/>
-              </a:rPr>
-              <a:t>42</a:t>
-            </a:r>
-            <a:r>
-              <a:rPr sz="900"/>
-              <a:t>); only ASSIGN changes across arms.</a:t>
+              <a:t>Sort-and-chop benchmark: same rosters per </a:t>
+            </a:r>
+            <a:r>
+              <a:rPr sz="900" i="1">
+                <a:latin typeface="Cambria Math"/>
+              </a:rPr>
+              <a:t>\gamma</a:t>
+            </a:r>
+            <a:r>
+              <a:rPr sz="900"/>
+              <a:t>; only </a:t>
+            </a:r>
+            <a:r>
+              <a:rPr sz="900" i="1">
+                <a:latin typeface="Cambria Math"/>
+              </a:rPr>
+              <a:t>\gamma</a:t>
+            </a:r>
+            <a:r>
+              <a:rPr sz="900"/>
+              <a:t> and </a:t>
+            </a:r>
+            <a:r>
+              <a:rPr sz="900" i="1">
+                <a:latin typeface="Cambria Math"/>
+              </a:rPr>
+              <a:t>λ</a:t>
+            </a:r>
+            <a:r>
+              <a:rPr sz="900"/>
+              <a:t> in score change.</a:t>
             </a:r>
           </a:p>
           <a:p>
@@ -3482,17 +4863,17 @@
             </a:pPr>
             <a:r>
               <a:rPr sz="900"/>
-              <a:t>Low </a:t>
-            </a:r>
-            <a:r>
-              <a:rPr sz="900" i="1">
-                <a:latin typeface="Cambria Math"/>
-              </a:rPr>
-              <a:t>ρ</a:t>
-            </a:r>
-            <a:r>
-              <a:rPr sz="900"/>
-              <a:t>: players mix across teams — selection vs pool mean stays nearly flat.</a:t>
+              <a:t>Figure uses key arms </a:t>
+            </a:r>
+            <a:r>
+              <a:rPr sz="900" i="1">
+                <a:latin typeface="Cambria Math"/>
+              </a:rPr>
+              <a:t>λ ∈ {0, 0.55, 1.0}</a:t>
+            </a:r>
+            <a:r>
+              <a:rPr sz="900"/>
+              <a:t> — full five-arm grid in \texttt{GAMMA\_sweep\_lambda\_curves.png}.</a:t>
             </a:r>
           </a:p>
           <a:p>
@@ -3505,28 +4886,46 @@
               </a:spcAft>
             </a:pPr>
             <a:r>
-              <a:rPr sz="900"/>
-              <a:t>High </a:t>
-            </a:r>
-            <a:r>
-              <a:rPr sz="900" i="1">
-                <a:latin typeface="Cambria Math"/>
-              </a:rPr>
-              <a:t>ρ</a:t>
-            </a:r>
-            <a:r>
-              <a:rPr sz="900"/>
-              <a:t>: assortative matching — peer environments concentrate; inverted-</a:t>
-            </a:r>
-            <a:r>
-              <a:rPr sz="900" i="1">
-                <a:latin typeface="Cambria Math"/>
-              </a:rPr>
-              <a:t>U</a:t>
-            </a:r>
-            <a:r>
-              <a:rPr sz="900"/>
-              <a:t> emerges.</a:t>
+              <a:rPr sz="900" i="1">
+                <a:latin typeface="Cambria Math"/>
+              </a:rPr>
+              <a:t>\gamma=5</a:t>
+            </a:r>
+            <a:r>
+              <a:rPr sz="900"/>
+              <a:t>: </a:t>
+            </a:r>
+            <a:r>
+              <a:rPr sz="900" i="1">
+                <a:latin typeface="Cambria Math"/>
+              </a:rPr>
+              <a:t>λ</a:t>
+            </a:r>
+            <a:r>
+              <a:rPr sz="800" i="1" baseline="-25000">
+                <a:latin typeface="Cambria Math"/>
+              </a:rPr>
+              <a:t>crit</a:t>
+            </a:r>
+            <a:r>
+              <a:rPr sz="900" i="1">
+                <a:latin typeface="Cambria Math"/>
+              </a:rPr>
+              <a:t>≈ 0.8</a:t>
+            </a:r>
+            <a:r>
+              <a:rPr sz="900"/>
+              <a:t> — hump needs larger </a:t>
+            </a:r>
+            <a:r>
+              <a:rPr sz="900" i="1">
+                <a:latin typeface="Cambria Math"/>
+              </a:rPr>
+              <a:t>λ</a:t>
+            </a:r>
+            <a:r>
+              <a:rPr sz="900"/>
+              <a:t>.</a:t>
             </a:r>
           </a:p>
           <a:p>
@@ -3539,8 +4938,70 @@
               </a:spcAft>
             </a:pPr>
             <a:r>
-              <a:rPr sz="900"/>
-              <a:t>Sort-and-chop benchmark: hard rank match (same score rule as soft arms).</a:t>
+              <a:rPr sz="900" i="1">
+                <a:latin typeface="Cambria Math"/>
+              </a:rPr>
+              <a:t>\gamma=10</a:t>
+            </a:r>
+            <a:r>
+              <a:rPr sz="900"/>
+              <a:t> (539): </a:t>
+            </a:r>
+            <a:r>
+              <a:rPr sz="900" i="1">
+                <a:latin typeface="Cambria Math"/>
+              </a:rPr>
+              <a:t>λ</a:t>
+            </a:r>
+            <a:r>
+              <a:rPr sz="800" i="1" baseline="-25000">
+                <a:latin typeface="Cambria Math"/>
+              </a:rPr>
+              <a:t>crit</a:t>
+            </a:r>
+            <a:r>
+              <a:rPr sz="900" i="1">
+                <a:latin typeface="Cambria Math"/>
+              </a:rPr>
+              <a:t>≈ 0.4</a:t>
+            </a:r>
+            <a:r>
+              <a:rPr sz="900"/>
+              <a:t> — curve morph near </a:t>
+            </a:r>
+            <a:r>
+              <a:rPr sz="900" i="1">
+                <a:latin typeface="Cambria Math"/>
+              </a:rPr>
+              <a:t>λ \gtrsim 0.4</a:t>
+            </a:r>
+            <a:r>
+              <a:rPr sz="900"/>
+              <a:t>.</a:t>
+            </a:r>
+          </a:p>
+          <a:p>
+            <a:pPr>
+              <a:spcBef>
+                <a:spcPts val="0"/>
+              </a:spcBef>
+              <a:spcAft>
+                <a:spcPts val="0"/>
+              </a:spcAft>
+            </a:pPr>
+            <a:r>
+              <a:rPr sz="900"/>
+              <a:t>Below crit: monotone elite-edge shape; above crit: inverted-</a:t>
+            </a:r>
+            <a:r>
+              <a:rPr sz="900" i="1">
+                <a:latin typeface="Cambria Math"/>
+              </a:rPr>
+              <a:t>U</a:t>
+            </a:r>
+            <a:r>
+              <a:rPr sz="900"/>
+              <a:t> / hump.</a:t>
             </a:r>
           </a:p>
         </p:txBody>
@@ -3572,13 +5033,217 @@
             </a:pPr>
             <a:r>
               <a:rPr sz="1100"/>
-              <a:t>Claim: at fixed score and top-</a:t>
+              <a:t>Claim: </a:t>
             </a:r>
             <a:r>
               <a:rPr sz="1100" i="1">
                 <a:latin typeface="Cambria Math"/>
               </a:rPr>
-              <a:t>K</a:t>
+              <a:t>\gamma</a:t>
+            </a:r>
+            <a:r>
+              <a:rPr sz="1100"/>
+              <a:t> (sigmoid slope in </a:t>
+            </a:r>
+            <a:r>
+              <a:rPr sz="1100" i="1">
+                <a:latin typeface="Cambria Math"/>
+              </a:rPr>
+              <a:t>L</a:t>
+            </a:r>
+            <a:r>
+              <a:rPr sz="900" i="1" baseline="-25000">
+                <a:latin typeface="Cambria Math"/>
+              </a:rPr>
+              <a:t>C</a:t>
+            </a:r>
+            <a:r>
+              <a:rPr sz="1100"/>
+              <a:t>) shifts when congestion bites — higher </a:t>
+            </a:r>
+            <a:r>
+              <a:rPr sz="1100" i="1">
+                <a:latin typeface="Cambria Math"/>
+              </a:rPr>
+              <a:t>\gamma</a:t>
+            </a:r>
+            <a:r>
+              <a:rPr sz="1100"/>
+              <a:t> lowers </a:t>
+            </a:r>
+            <a:r>
+              <a:rPr sz="1100" i="1">
+                <a:latin typeface="Cambria Math"/>
+              </a:rPr>
+              <a:t>λ</a:t>
+            </a:r>
+            <a:r>
+              <a:rPr sz="900" i="1" baseline="-25000">
+                <a:latin typeface="Cambria Math"/>
+              </a:rPr>
+              <a:t>crit</a:t>
+            </a:r>
+            <a:r>
+              <a:rPr sz="1100" i="1">
+                <a:latin typeface="Cambria Math"/>
+              </a:rPr>
+              <a:t> ≈ 4/\gamma</a:t>
+            </a:r>
+            <a:r>
+              <a:rPr sz="1100"/>
+              <a:t> on sort-and-chop; below crit, </a:t>
+            </a:r>
+            <a:r>
+              <a:rPr sz="1100" i="1">
+                <a:latin typeface="Cambria Math"/>
+              </a:rPr>
+              <a:t>λ</a:t>
+            </a:r>
+            <a:r>
+              <a:rPr sz="1100"/>
+              <a:t> arms can look identical.</a:t>
+            </a:r>
+          </a:p>
+        </p:txBody>
+      </p:sp>
+    </p:spTree>
+  </p:cSld>
+  <p:clrMapOvr>
+    <a:masterClrMapping/>
+  </p:clrMapOvr>
+</p:sld>
+</file>
+
+<file path=ppt/slides/slide11.xml><?xml version="1.0" encoding="utf-8"?>
+<p:sld xmlns:a="http://schemas.openxmlformats.org/drawingml/2006/main" xmlns:p="http://schemas.openxmlformats.org/presentationml/2006/main" xmlns:r="http://schemas.openxmlformats.org/officeDocument/2006/relationships">
+  <p:cSld>
+    <p:spTree>
+      <p:nvGrpSpPr>
+        <p:cNvPr id="1" name=""/>
+        <p:cNvGrpSpPr/>
+        <p:nvPr/>
+      </p:nvGrpSpPr>
+      <p:grpSpPr/>
+      <p:sp>
+        <p:nvSpPr>
+          <p:cNvPr id="2" name="TextBox 1"/>
+          <p:cNvSpPr txBox="1"/>
+          <p:nvPr/>
+        </p:nvSpPr>
+        <p:spPr>
+          <a:xfrm>
+            <a:off x="411480" y="256032"/>
+            <a:ext cx="11368735" cy="420624"/>
+          </a:xfrm>
+          <a:prstGeom prst="rect">
+            <a:avLst/>
+          </a:prstGeom>
+          <a:noFill/>
+        </p:spPr>
+        <p:txBody>
+          <a:bodyPr wrap="none">
+            <a:spAutoFit/>
+          </a:bodyPr>
+          <a:lstStyle/>
+          <a:p>
+            <a:pPr>
+              <a:defRPr b="1"/>
+            </a:pPr>
+            <a:r>
+              <a:rPr sz="2000"/>
+              <a:t>Phase B — </a:t>
+            </a:r>
+            <a:r>
+              <a:rPr sz="2000" i="1">
+                <a:latin typeface="Cambria Math"/>
+              </a:rPr>
+              <a:t>λ</a:t>
+            </a:r>
+            <a:r>
+              <a:rPr sz="1800" i="1" baseline="-25000">
+                <a:latin typeface="Cambria Math"/>
+              </a:rPr>
+              <a:t>crit</a:t>
+            </a:r>
+            <a:r>
+              <a:rPr sz="2000" i="1">
+                <a:latin typeface="Cambria Math"/>
+              </a:rPr>
+              <a:t> ≈ 4/\gamma</a:t>
+            </a:r>
+            <a:r>
+              <a:rPr sz="2000"/>
+              <a:t> (sort-and-chop algebra)</a:t>
+            </a:r>
+          </a:p>
+        </p:txBody>
+      </p:sp>
+      <p:sp>
+        <p:nvSpPr>
+          <p:cNvPr id="3" name="TextBox 2"/>
+          <p:cNvSpPr txBox="1"/>
+          <p:nvPr/>
+        </p:nvSpPr>
+        <p:spPr>
+          <a:xfrm>
+            <a:off x="411480" y="768096"/>
+            <a:ext cx="4160520" cy="3895344"/>
+          </a:xfrm>
+          <a:prstGeom prst="rect">
+            <a:avLst/>
+          </a:prstGeom>
+          <a:noFill/>
+        </p:spPr>
+        <p:txBody>
+          <a:bodyPr wrap="square">
+            <a:spAutoFit/>
+          </a:bodyPr>
+          <a:lstStyle/>
+          <a:p>
+            <a:pPr>
+              <a:spcAft>
+                <a:spcPts val="0"/>
+              </a:spcAft>
+              <a:defRPr b="1"/>
+            </a:pPr>
+            <a:r>
+              <a:rPr sz="1100"/>
+              <a:t>Characterize </a:t>
+            </a:r>
+            <a:r>
+              <a:rPr sz="1100" i="1">
+                <a:latin typeface="Cambria Math"/>
+              </a:rPr>
+              <a:t>\gamma</a:t>
+            </a:r>
+            <a:r>
+              <a:rPr sz="1100"/>
+              <a:t> — one-at-a-time (539 sort-and-chop benchmark)</a:t>
+            </a:r>
+          </a:p>
+          <a:p>
+            <a:pPr>
+              <a:spcAft>
+                <a:spcPts val="0"/>
+              </a:spcAft>
+            </a:pPr>
+            <a:r>
+              <a:rPr sz="1100" i="1">
+                <a:latin typeface="Cambria Math"/>
+              </a:rPr>
+              <a:t>σ(x) = 1/(1+e</a:t>
+            </a:r>
+            <a:r>
+              <a:rPr sz="900" baseline="30000">
+                <a:latin typeface="Cambria Math"/>
+              </a:rPr>
+              <a:t>-x</a:t>
+            </a:r>
+            <a:r>
+              <a:rPr sz="1100" i="1">
+                <a:latin typeface="Cambria Math"/>
+              </a:rPr>
+              <a:t>)</a:t>
             </a:r>
             <a:r>
               <a:rPr sz="1100"/>
@@ -3588,41 +5253,518 @@
               <a:rPr sz="1100" i="1">
                 <a:latin typeface="Cambria Math"/>
               </a:rPr>
-              <a:t>ρ</a:t>
-            </a:r>
+              <a:t>x = \gamma(A-\theta)</a:t>
+            </a:r>
+          </a:p>
+          <a:p>
+            <a:pPr>
+              <a:spcAft>
+                <a:spcPts val="0"/>
+              </a:spcAft>
+            </a:pPr>
+            <a:r>
+              <a:rPr sz="1000"/>
+              <a:t>Educational: how </a:t>
+            </a:r>
+            <a:r>
+              <a:rPr sz="1000" i="1">
+                <a:latin typeface="Cambria Math"/>
+              </a:rPr>
+              <a:t>\gamma</a:t>
+            </a:r>
+            <a:r>
+              <a:rPr sz="1000"/>
+              <a:t> shapes </a:t>
+            </a:r>
+            <a:r>
+              <a:rPr sz="1000" i="1">
+                <a:latin typeface="Cambria Math"/>
+              </a:rPr>
+              <a:t>L</a:t>
+            </a:r>
+            <a:r>
+              <a:rPr sz="800" i="1" baseline="-25000">
+                <a:latin typeface="Cambria Math"/>
+              </a:rPr>
+              <a:t>C</a:t>
+            </a:r>
+            <a:r>
+              <a:rPr sz="1000"/>
+              <a:t> along ability axis</a:t>
+            </a:r>
+          </a:p>
+          <a:p>
+            <a:pPr>
+              <a:spcAft>
+                <a:spcPts val="0"/>
+              </a:spcAft>
+            </a:pPr>
+            <a:r>
+              <a:rPr sz="1000"/>
+              <a:t>vertical lines: </a:t>
+            </a:r>
+            <a:r>
+              <a:rPr sz="1000" i="1">
+                <a:latin typeface="Cambria Math"/>
+              </a:rPr>
+              <a:t>λ</a:t>
+            </a:r>
+            <a:r>
+              <a:rPr sz="800" i="1" baseline="-25000">
+                <a:latin typeface="Cambria Math"/>
+              </a:rPr>
+              <a:t>crit</a:t>
+            </a:r>
+            <a:r>
+              <a:rPr sz="1000" i="1">
+                <a:latin typeface="Cambria Math"/>
+              </a:rPr>
+              <a:t> = 4/\gamma</a:t>
+            </a:r>
+            <a:r>
+              <a:rPr sz="1000"/>
+              <a:t> for each </a:t>
+            </a:r>
+            <a:r>
+              <a:rPr sz="1000" i="1">
+                <a:latin typeface="Cambria Math"/>
+              </a:rPr>
+              <a:t>\gamma</a:t>
+            </a:r>
+          </a:p>
+          <a:p>
+            <a:pPr>
+              <a:spcAft>
+                <a:spcPts val="0"/>
+              </a:spcAft>
+            </a:pPr>
+            <a:r>
+              <a:rPr sz="1000"/>
+              <a:t>539 defaults: </a:t>
+            </a:r>
+            <a:r>
+              <a:rPr sz="1000" i="1">
+                <a:latin typeface="Cambria Math"/>
+              </a:rPr>
+              <a:t>\theta=0.72</a:t>
+            </a:r>
+            <a:r>
+              <a:rPr sz="1000"/>
+              <a:t>, </a:t>
+            </a:r>
+            <a:r>
+              <a:rPr sz="1000" i="1">
+                <a:latin typeface="Cambria Math"/>
+              </a:rPr>
+              <a:t>\gamma=10</a:t>
+            </a:r>
+            <a:r>
+              <a:rPr sz="1000"/>
+              <a:t> → crit </a:t>
+            </a:r>
+            <a:r>
+              <a:rPr sz="1000" i="1">
+                <a:latin typeface="Cambria Math"/>
+              </a:rPr>
+              <a:t>= 0.4</a:t>
+            </a:r>
+          </a:p>
+          <a:p>
+            <a:pPr>
+              <a:spcAft>
+                <a:spcPts val="0"/>
+              </a:spcAft>
+            </a:pPr>
+            <a:r>
+              <a:rPr sz="1000"/>
+              <a:t>Pairs with sort-and-chop </a:t>
+            </a:r>
+            <a:r>
+              <a:rPr sz="1000" i="1">
+                <a:latin typeface="Cambria Math"/>
+              </a:rPr>
+              <a:t>λ</a:t>
+            </a:r>
+            <a:r>
+              <a:rPr sz="1000"/>
+              <a:t> threshold memo (doc 06)</a:t>
+            </a:r>
+          </a:p>
+        </p:txBody>
+      </p:sp>
+      <p:pic>
+        <p:nvPicPr>
+          <p:cNvPr id="4" name="Picture 3" descr="image.png"/>
+          <p:cNvPicPr>
+            <a:picLocks noChangeAspect="1"/>
+          </p:cNvPicPr>
+          <p:nvPr/>
+        </p:nvPicPr>
+        <p:blipFill>
+          <a:blip r:embed="rId2"/>
+          <a:stretch>
+            <a:fillRect/>
+          </a:stretch>
+        </p:blipFill>
+        <p:spPr>
+          <a:xfrm>
+            <a:off x="4773168" y="768096"/>
+            <a:ext cx="7007047" cy="3177248"/>
+          </a:xfrm>
+          <a:prstGeom prst="rect">
+            <a:avLst/>
+          </a:prstGeom>
+        </p:spPr>
+      </p:pic>
+      <p:sp>
+        <p:nvSpPr>
+          <p:cNvPr id="5" name="TextBox 4"/>
+          <p:cNvSpPr txBox="1"/>
+          <p:nvPr/>
+        </p:nvSpPr>
+        <p:spPr>
+          <a:xfrm>
+            <a:off x="411480" y="4681728"/>
+            <a:ext cx="11368735" cy="1234440"/>
+          </a:xfrm>
+          <a:prstGeom prst="rect">
+            <a:avLst/>
+          </a:prstGeom>
+          <a:noFill/>
+        </p:spPr>
+        <p:txBody>
+          <a:bodyPr wrap="square">
+            <a:spAutoFit/>
+          </a:bodyPr>
+          <a:lstStyle/>
+          <a:p>
+            <a:pPr>
+              <a:spcBef>
+                <a:spcPts val="0"/>
+              </a:spcBef>
+              <a:spcAft>
+                <a:spcPts val="0"/>
+              </a:spcAft>
+            </a:pPr>
+            <a:r>
+              <a:rPr sz="900"/>
+              <a:t>Soft viability: </a:t>
+            </a:r>
+            <a:r>
+              <a:rPr sz="900" i="1">
+                <a:latin typeface="Cambria Math"/>
+              </a:rPr>
+              <a:t>σ(\gamma(A-\theta))</a:t>
+            </a:r>
+            <a:r>
+              <a:rPr sz="900"/>
+              <a:t> — not a hard step; </a:t>
+            </a:r>
+            <a:r>
+              <a:rPr sz="900" i="1">
+                <a:latin typeface="Cambria Math"/>
+              </a:rPr>
+              <a:t>\gamma</a:t>
+            </a:r>
+            <a:r>
+              <a:rPr sz="900"/>
+              <a:t> sets knee steepness.</a:t>
+            </a:r>
+          </a:p>
+          <a:p>
+            <a:pPr>
+              <a:spcBef>
+                <a:spcPts val="0"/>
+              </a:spcBef>
+              <a:spcAft>
+                <a:spcPts val="0"/>
+              </a:spcAft>
+            </a:pPr>
+            <a:r>
+              <a:rPr sz="900"/>
+              <a:t>On sort-and-chop, </a:t>
+            </a:r>
+            <a:r>
+              <a:rPr sz="900" i="1">
+                <a:latin typeface="Cambria Math"/>
+              </a:rPr>
+              <a:t>A</a:t>
+            </a:r>
+            <a:r>
+              <a:rPr sz="800" i="1" baseline="-25000">
+                <a:latin typeface="Cambria Math"/>
+              </a:rPr>
+              <a:t>i</a:t>
+            </a:r>
+            <a:r>
+              <a:rPr sz="900" i="1">
+                <a:latin typeface="Cambria Math"/>
+              </a:rPr>
+              <a:t> \parallel L</a:t>
+            </a:r>
+            <a:r>
+              <a:rPr sz="800" i="1" baseline="-25000">
+                <a:latin typeface="Cambria Math"/>
+              </a:rPr>
+              <a:t>C</a:t>
+            </a:r>
+            <a:r>
+              <a:rPr sz="900"/>
+              <a:t> within teams → small </a:t>
+            </a:r>
+            <a:r>
+              <a:rPr sz="900" i="1">
+                <a:latin typeface="Cambria Math"/>
+              </a:rPr>
+              <a:t>λ</a:t>
+            </a:r>
+            <a:r>
+              <a:rPr sz="900"/>
+              <a:t> may not reorder top-</a:t>
+            </a:r>
+            <a:r>
+              <a:rPr sz="900" i="1">
+                <a:latin typeface="Cambria Math"/>
+              </a:rPr>
+              <a:t>K</a:t>
+            </a:r>
+            <a:r>
+              <a:rPr sz="900"/>
+              <a:t>.</a:t>
+            </a:r>
+          </a:p>
+          <a:p>
+            <a:pPr>
+              <a:spcBef>
+                <a:spcPts val="0"/>
+              </a:spcBef>
+              <a:spcAft>
+                <a:spcPts val="0"/>
+              </a:spcAft>
+            </a:pPr>
+            <a:r>
+              <a:rPr sz="900" i="1">
+                <a:latin typeface="Cambria Math"/>
+              </a:rPr>
+              <a:t>λ</a:t>
+            </a:r>
+            <a:r>
+              <a:rPr sz="800" i="1" baseline="-25000">
+                <a:latin typeface="Cambria Math"/>
+              </a:rPr>
+              <a:t>crit</a:t>
+            </a:r>
+            <a:r>
+              <a:rPr sz="900"/>
+              <a:t>: first </a:t>
+            </a:r>
+            <a:r>
+              <a:rPr sz="900" i="1">
+                <a:latin typeface="Cambria Math"/>
+              </a:rPr>
+              <a:t>λ</a:t>
+            </a:r>
+            <a:r>
+              <a:rPr sz="900"/>
+              <a:t> where </a:t>
+            </a:r>
+            <a:r>
+              <a:rPr sz="900" i="1">
+                <a:latin typeface="Cambria Math"/>
+              </a:rPr>
+              <a:t>S</a:t>
+            </a:r>
+            <a:r>
+              <a:rPr sz="800" i="1" baseline="-25000">
+                <a:latin typeface="Cambria Math"/>
+              </a:rPr>
+              <a:t>i</a:t>
+            </a:r>
+            <a:r>
+              <a:rPr sz="900" i="1">
+                <a:latin typeface="Cambria Math"/>
+              </a:rPr>
+              <a:t> = A</a:t>
+            </a:r>
+            <a:r>
+              <a:rPr sz="800" i="1" baseline="-25000">
+                <a:latin typeface="Cambria Math"/>
+              </a:rPr>
+              <a:t>i</a:t>
+            </a:r>
+            <a:r>
+              <a:rPr sz="900" i="1">
+                <a:latin typeface="Cambria Math"/>
+              </a:rPr>
+              <a:t> - λ L</a:t>
+            </a:r>
+            <a:r>
+              <a:rPr sz="800" i="1" baseline="-25000">
+                <a:latin typeface="Cambria Math"/>
+              </a:rPr>
+              <a:t>C</a:t>
+            </a:r>
+            <a:r>
+              <a:rPr sz="900"/>
+              <a:t> changes who gets selected.</a:t>
+            </a:r>
+          </a:p>
+          <a:p>
+            <a:pPr>
+              <a:spcBef>
+                <a:spcPts val="0"/>
+              </a:spcBef>
+              <a:spcAft>
+                <a:spcPts val="0"/>
+              </a:spcAft>
+            </a:pPr>
+            <a:r>
+              <a:rPr sz="900"/>
+              <a:t>Visual curve departure in </a:t>
+            </a:r>
+            <a:r>
+              <a:rPr sz="900" i="1">
+                <a:latin typeface="Cambria Math"/>
+              </a:rPr>
+              <a:t>16</a:t>
+            </a:r>
+            <a:r>
+              <a:rPr sz="900"/>
+              <a:t> bins can lag </a:t>
+            </a:r>
+            <a:r>
+              <a:rPr sz="900" i="1">
+                <a:latin typeface="Cambria Math"/>
+              </a:rPr>
+              <a:t>λ</a:t>
+            </a:r>
+            <a:r>
+              <a:rPr sz="800" i="1" baseline="-25000">
+                <a:latin typeface="Cambria Math"/>
+              </a:rPr>
+              <a:t>crit</a:t>
+            </a:r>
+            <a:r>
+              <a:rPr sz="900"/>
+              <a:t> — use finer bins or check reorder.</a:t>
+            </a:r>
+          </a:p>
+          <a:p>
+            <a:pPr>
+              <a:spcBef>
+                <a:spcPts val="0"/>
+              </a:spcBef>
+              <a:spcAft>
+                <a:spcPts val="0"/>
+              </a:spcAft>
+            </a:pPr>
+            <a:r>
+              <a:rPr sz="900"/>
+              <a:t>Ties to Alex Q: why </a:t>
+            </a:r>
+            <a:r>
+              <a:rPr sz="900" i="1">
+                <a:latin typeface="Cambria Math"/>
+              </a:rPr>
+              <a:t>λ=0</a:t>
+            </a:r>
+            <a:r>
+              <a:rPr sz="900"/>
+              <a:t> and </a:t>
+            </a:r>
+            <a:r>
+              <a:rPr sz="900" i="1">
+                <a:latin typeface="Cambria Math"/>
+              </a:rPr>
+              <a:t>λ=0.25</a:t>
+            </a:r>
+            <a:r>
+              <a:rPr sz="900"/>
+              <a:t> match until </a:t>
+            </a:r>
+            <a:r>
+              <a:rPr sz="900" i="1">
+                <a:latin typeface="Cambria Math"/>
+              </a:rPr>
+              <a:t>λ \gtrsim 4/\gamma</a:t>
+            </a:r>
+            <a:r>
+              <a:rPr sz="900"/>
+              <a:t>.</a:t>
+            </a:r>
+          </a:p>
+        </p:txBody>
+      </p:sp>
+      <p:sp>
+        <p:nvSpPr>
+          <p:cNvPr id="6" name="TextBox 5"/>
+          <p:cNvSpPr txBox="1"/>
+          <p:nvPr/>
+        </p:nvSpPr>
+        <p:spPr>
+          <a:xfrm>
+            <a:off x="411480" y="5971032"/>
+            <a:ext cx="11368735" cy="475488"/>
+          </a:xfrm>
+          <a:prstGeom prst="rect">
+            <a:avLst/>
+          </a:prstGeom>
+          <a:noFill/>
+        </p:spPr>
+        <p:txBody>
+          <a:bodyPr wrap="none">
+            <a:spAutoFit/>
+          </a:bodyPr>
+          <a:lstStyle/>
+          <a:p>
+            <a:pPr algn="l">
+              <a:defRPr b="1"/>
+            </a:pPr>
             <a:r>
               <a:rPr sz="1100"/>
-              <a:t> in assignment matters — low-</a:t>
+              <a:t>Claim: </a:t>
             </a:r>
             <a:r>
               <a:rPr sz="1100" i="1">
                 <a:latin typeface="Cambria Math"/>
               </a:rPr>
-              <a:t>ρ</a:t>
+              <a:t>λ</a:t>
+            </a:r>
+            <a:r>
+              <a:rPr sz="900" i="1" baseline="-25000">
+                <a:latin typeface="Cambria Math"/>
+              </a:rPr>
+              <a:t>crit</a:t>
+            </a:r>
+            <a:r>
+              <a:rPr sz="1100" i="1">
+                <a:latin typeface="Cambria Math"/>
+              </a:rPr>
+              <a:t> ≈ 4/\gamma</a:t>
             </a:r>
             <a:r>
               <a:rPr sz="1100"/>
-              <a:t> mixing yields a nearly flat curve; high-</a:t>
+              <a:t> is the first </a:t>
             </a:r>
             <a:r>
               <a:rPr sz="1100" i="1">
                 <a:latin typeface="Cambria Math"/>
               </a:rPr>
-              <a:t>ρ</a:t>
+              <a:t>λ</a:t>
             </a:r>
             <a:r>
               <a:rPr sz="1100"/>
-              <a:t> assortativity delivers the peer-pressure inverted-</a:t>
+              <a:t> where score reorder beats talent-only on sort-and-chop — not when the curve visually departs from </a:t>
             </a:r>
             <a:r>
               <a:rPr sz="1100" i="1">
                 <a:latin typeface="Cambria Math"/>
               </a:rPr>
-              <a:t>U</a:t>
+              <a:t>λ=0</a:t>
             </a:r>
             <a:r>
               <a:rPr sz="1100"/>
-              <a:t> readout.</a:t>
+              <a:t> in coarse bins.</a:t>
             </a:r>
           </a:p>
         </p:txBody>
@@ -3653,8 +5795,8 @@
         </p:nvSpPr>
         <p:spPr>
           <a:xfrm>
-            <a:off x="411480" y="256032"/>
-            <a:ext cx="11368735" cy="420624"/>
+            <a:off x="384048" y="201168"/>
+            <a:ext cx="11423599" cy="438912"/>
           </a:xfrm>
           <a:prstGeom prst="rect">
             <a:avLst/>
@@ -3671,18 +5813,40 @@
               <a:defRPr b="1"/>
             </a:pPr>
             <a:r>
-              <a:rPr sz="2000"/>
-              <a:t>Phase B — Characterize </a:t>
-            </a:r>
-            <a:r>
-              <a:rPr sz="2000" i="1">
-                <a:latin typeface="Cambria Math"/>
-              </a:rPr>
-              <a:t>ρ</a:t>
-            </a:r>
-            <a:r>
-              <a:rPr sz="2000"/>
-              <a:t> (assignment assortativity) — sort-and-chop suppressed</a:t>
+              <a:rPr sz="1800"/>
+              <a:t>Phase B — Simulated league inputs: actual </a:t>
+            </a:r>
+            <a:r>
+              <a:rPr sz="1800" i="1">
+                <a:latin typeface="Cambria Math"/>
+              </a:rPr>
+              <a:t>A</a:t>
+            </a:r>
+            <a:r>
+              <a:rPr sz="1600" i="1" baseline="-25000">
+                <a:latin typeface="Cambria Math"/>
+              </a:rPr>
+              <a:t>i</a:t>
+            </a:r>
+            <a:r>
+              <a:rPr sz="1800"/>
+              <a:t> and </a:t>
+            </a:r>
+            <a:r>
+              <a:rPr sz="1800" i="1">
+                <a:latin typeface="Cambria Math"/>
+              </a:rPr>
+              <a:t>T</a:t>
+            </a:r>
+            <a:r>
+              <a:rPr sz="1600" i="1" baseline="-25000">
+                <a:latin typeface="Cambria Math"/>
+              </a:rPr>
+              <a:t>j^*</a:t>
+            </a:r>
+            <a:r>
+              <a:rPr sz="1800"/>
+              <a:t> draws</a:t>
             </a:r>
           </a:p>
         </p:txBody>
@@ -3695,8 +5859,8 @@
         </p:nvSpPr>
         <p:spPr>
           <a:xfrm>
-            <a:off x="411480" y="768096"/>
-            <a:ext cx="4160520" cy="3895344"/>
+            <a:off x="384048" y="676656"/>
+            <a:ext cx="11423599" cy="237744"/>
           </a:xfrm>
           <a:prstGeom prst="rect">
             <a:avLst/>
@@ -3704,222 +5868,236 @@
           <a:noFill/>
         </p:spPr>
         <p:txBody>
+          <a:bodyPr wrap="none">
+            <a:spAutoFit/>
+          </a:bodyPr>
+          <a:lstStyle/>
+          <a:p>
+            <a:r>
+              <a:rPr sz="900"/>
+              <a:t>539 preset · seed 42 · </a:t>
+            </a:r>
+            <a:r>
+              <a:rPr sz="900" i="1">
+                <a:latin typeface="Cambria Math"/>
+              </a:rPr>
+              <a:t>N=5,600</a:t>
+            </a:r>
+            <a:r>
+              <a:rPr sz="900"/>
+              <a:t> players · 350 teams × roster 16</a:t>
+            </a:r>
+          </a:p>
+        </p:txBody>
+      </p:sp>
+      <p:sp>
+        <p:nvSpPr>
+          <p:cNvPr id="4" name="TextBox 3"/>
+          <p:cNvSpPr txBox="1"/>
+          <p:nvPr/>
+        </p:nvSpPr>
+        <p:spPr>
+          <a:xfrm>
+            <a:off x="384048" y="1005840"/>
+            <a:ext cx="3063240" cy="4974336"/>
+          </a:xfrm>
+          <a:prstGeom prst="rect">
+            <a:avLst/>
+          </a:prstGeom>
+          <a:noFill/>
+        </p:spPr>
+        <p:txBody>
           <a:bodyPr wrap="square">
             <a:spAutoFit/>
           </a:bodyPr>
           <a:lstStyle/>
           <a:p>
             <a:pPr>
+              <a:spcBef>
+                <a:spcPts val="0"/>
+              </a:spcBef>
               <a:spcAft>
                 <a:spcPts val="0"/>
               </a:spcAft>
-              <a:defRPr b="1"/>
-            </a:pPr>
-            <a:r>
-              <a:rPr sz="1100"/>
-              <a:t>Characterize </a:t>
-            </a:r>
-            <a:r>
-              <a:rPr sz="1100" i="1">
-                <a:latin typeface="Cambria Math"/>
-              </a:rPr>
-              <a:t>ρ</a:t>
-            </a:r>
-            <a:r>
-              <a:rPr sz="1100"/>
-              <a:t> — one-at-a-time at 539 baseline (score + top-</a:t>
-            </a:r>
-            <a:r>
-              <a:rPr sz="1100" i="1">
-                <a:latin typeface="Cambria Math"/>
-              </a:rPr>
-              <a:t>K</a:t>
-            </a:r>
-            <a:r>
-              <a:rPr sz="1100"/>
-              <a:t> fixed)</a:t>
-            </a:r>
-          </a:p>
-          <a:p>
-            <a:pPr>
+            </a:pPr>
+            <a:r>
+              <a:rPr sz="900"/>
+              <a:t>One draw reused across all OAT arms — only placement / score rules change.</a:t>
+            </a:r>
+          </a:p>
+          <a:p>
+            <a:pPr>
+              <a:spcBef>
+                <a:spcPts val="0"/>
+              </a:spcBef>
               <a:spcAft>
                 <a:spcPts val="0"/>
               </a:spcAft>
-              <a:defRPr sz="1000" b="1"/>
-            </a:pPr>
-            <a:r>
-              <a:t>ASSIGN (knob ρ) — LaTeX:</a:t>
-            </a:r>
-          </a:p>
-          <a:p>
-            <a:pPr>
+            </a:pPr>
+            <a:r>
+              <a:rPr sz="900"/>
+              <a:t>Left: </a:t>
+            </a:r>
+            <a:r>
+              <a:rPr sz="900" i="1">
+                <a:latin typeface="Cambria Math"/>
+              </a:rPr>
+              <a:t>A</a:t>
+            </a:r>
+            <a:r>
+              <a:rPr sz="800" i="1" baseline="-25000">
+                <a:latin typeface="Cambria Math"/>
+              </a:rPr>
+              <a:t>i</a:t>
+            </a:r>
+            <a:r>
+              <a:rPr sz="900" i="1">
+                <a:latin typeface="Cambria Math"/>
+              </a:rPr>
+              <a:t> ∼</a:t>
+            </a:r>
+            <a:r>
+              <a:rPr sz="900"/>
+              <a:t> Beta(2,2) on [0,1] — unimodal, mean </a:t>
+            </a:r>
+            <a:r>
+              <a:rPr sz="900" i="1">
+                <a:latin typeface="Cambria Math"/>
+              </a:rPr>
+              <a:t>≈ 0.5</a:t>
+            </a:r>
+            <a:r>
+              <a:rPr sz="900"/>
+              <a:t>.</a:t>
+            </a:r>
+          </a:p>
+          <a:p>
+            <a:pPr>
+              <a:spcBef>
+                <a:spcPts val="0"/>
+              </a:spcBef>
               <a:spcAft>
                 <a:spcPts val="0"/>
               </a:spcAft>
             </a:pPr>
             <a:r>
-              <a:rPr sz="1000">
-                <a:latin typeface="Courier New"/>
-              </a:rPr>
-              <a:t>\pi_{ij} \propto \exp\left(-\rho \cdot \frac{(A_i-T_j)^2}{2\sigma^2}\right)</a:t>
-            </a:r>
-          </a:p>
-          <a:p>
-            <a:pPr>
+              <a:rPr sz="900"/>
+              <a:t>Right: </a:t>
+            </a:r>
+            <a:r>
+              <a:rPr sz="900" i="1">
+                <a:latin typeface="Cambria Math"/>
+              </a:rPr>
+              <a:t>T</a:t>
+            </a:r>
+            <a:r>
+              <a:rPr sz="800" i="1" baseline="-25000">
+                <a:latin typeface="Cambria Math"/>
+              </a:rPr>
+              <a:t>j^*</a:t>
+            </a:r>
+            <a:r>
+              <a:rPr sz="900" i="1">
+                <a:latin typeface="Cambria Math"/>
+              </a:rPr>
+              <a:t> ∼</a:t>
+            </a:r>
+            <a:r>
+              <a:rPr sz="900"/>
+              <a:t> iid Uniform[0,1] per team — sim assignment targets.</a:t>
+            </a:r>
+          </a:p>
+          <a:p>
+            <a:pPr>
+              <a:spcBef>
+                <a:spcPts val="0"/>
+              </a:spcBef>
               <a:spcAft>
                 <a:spcPts val="0"/>
               </a:spcAft>
             </a:pPr>
             <a:r>
-              <a:rPr sz="1000" i="1">
-                <a:latin typeface="Cambria Math"/>
-              </a:rPr>
-              <a:t>σ=0.65</a:t>
-            </a:r>
-            <a:r>
-              <a:rPr sz="1000"/>
-              <a:t> fixed</a:t>
-            </a:r>
-          </a:p>
-          <a:p>
-            <a:pPr>
+              <a:rPr sz="900"/>
+              <a:t>Orange curve = theoretical pdf scaled to histogram bin width.</a:t>
+            </a:r>
+          </a:p>
+          <a:p>
+            <a:pPr>
+              <a:spcBef>
+                <a:spcPts val="0"/>
+              </a:spcBef>
               <a:spcAft>
                 <a:spcPts val="0"/>
               </a:spcAft>
             </a:pPr>
             <a:r>
-              <a:rPr sz="1000"/>
-              <a:t>arms: </a:t>
-            </a:r>
-            <a:r>
-              <a:rPr sz="1000" i="1">
-                <a:latin typeface="Cambria Math"/>
-              </a:rPr>
-              <a:t>ρ ∈ {0.1, 1, 8, 32}</a:t>
-            </a:r>
-          </a:p>
-          <a:p>
-            <a:pPr>
+              <a:rPr sz="900"/>
+              <a:t>This run: mean </a:t>
+            </a:r>
+            <a:r>
+              <a:rPr sz="900" i="1">
+                <a:latin typeface="Cambria Math"/>
+              </a:rPr>
+              <a:t>A</a:t>
+            </a:r>
+            <a:r>
+              <a:rPr sz="800" i="1" baseline="-25000">
+                <a:latin typeface="Cambria Math"/>
+              </a:rPr>
+              <a:t>i</a:t>
+            </a:r>
+            <a:r>
+              <a:rPr sz="900" i="1">
+                <a:latin typeface="Cambria Math"/>
+              </a:rPr>
+              <a:t>=0.500</a:t>
+            </a:r>
+            <a:r>
+              <a:rPr sz="900"/>
+              <a:t>, mean </a:t>
+            </a:r>
+            <a:r>
+              <a:rPr sz="900" i="1">
+                <a:latin typeface="Cambria Math"/>
+              </a:rPr>
+              <a:t>T</a:t>
+            </a:r>
+            <a:r>
+              <a:rPr sz="800" i="1" baseline="-25000">
+                <a:latin typeface="Cambria Math"/>
+              </a:rPr>
+              <a:t>j^*</a:t>
+            </a:r>
+            <a:r>
+              <a:rPr sz="900" i="1">
+                <a:latin typeface="Cambria Math"/>
+              </a:rPr>
+              <a:t>=0.491</a:t>
+            </a:r>
+            <a:r>
+              <a:rPr sz="900"/>
+              <a:t> (sd 0.223 / 0.290).</a:t>
+            </a:r>
+          </a:p>
+          <a:p>
+            <a:pPr>
+              <a:spcBef>
+                <a:spcPts val="0"/>
+              </a:spcBef>
               <a:spcAft>
                 <a:spcPts val="0"/>
               </a:spcAft>
             </a:pPr>
             <a:r>
-              <a:rPr sz="1000" i="1">
-                <a:latin typeface="Cambria Math"/>
-              </a:rPr>
-              <a:t>S</a:t>
-            </a:r>
-            <a:r>
-              <a:rPr sz="800" i="1" baseline="-25000">
-                <a:latin typeface="Cambria Math"/>
-              </a:rPr>
-              <a:t>i</a:t>
-            </a:r>
-            <a:r>
-              <a:rPr sz="1000" i="1">
-                <a:latin typeface="Cambria Math"/>
-              </a:rPr>
-              <a:t> = A</a:t>
-            </a:r>
-            <a:r>
-              <a:rPr sz="800" i="1" baseline="-25000">
-                <a:latin typeface="Cambria Math"/>
-              </a:rPr>
-              <a:t>i</a:t>
-            </a:r>
-            <a:r>
-              <a:rPr sz="1000" i="1">
-                <a:latin typeface="Cambria Math"/>
-              </a:rPr>
-              <a:t> - 0.55 · L</a:t>
-            </a:r>
-            <a:r>
-              <a:rPr sz="800" i="1" baseline="-25000">
-                <a:latin typeface="Cambria Math"/>
-              </a:rPr>
-              <a:t>C</a:t>
-            </a:r>
-            <a:r>
-              <a:rPr sz="1000"/>
-              <a:t> (crowding in score held constant across arms)</a:t>
-            </a:r>
-          </a:p>
-          <a:p>
-            <a:pPr>
-              <a:spcAft>
-                <a:spcPts val="0"/>
-              </a:spcAft>
-            </a:pPr>
-            <a:r>
-              <a:rPr sz="1000"/>
-              <a:t>top-</a:t>
-            </a:r>
-            <a:r>
-              <a:rPr sz="1000" i="1">
-                <a:latin typeface="Cambria Math"/>
-              </a:rPr>
-              <a:t>K</a:t>
-            </a:r>
-            <a:r>
-              <a:rPr sz="1000"/>
-              <a:t> by </a:t>
-            </a:r>
-            <a:r>
-              <a:rPr sz="1000" i="1">
-                <a:latin typeface="Cambria Math"/>
-              </a:rPr>
-              <a:t>S</a:t>
-            </a:r>
-            <a:r>
-              <a:rPr sz="800" i="1" baseline="-25000">
-                <a:latin typeface="Cambria Math"/>
-              </a:rPr>
-              <a:t>i</a:t>
-            </a:r>
-          </a:p>
-          <a:p>
-            <a:pPr>
-              <a:spcAft>
-                <a:spcPts val="0"/>
-              </a:spcAft>
-            </a:pPr>
-            <a:r>
-              <a:rPr sz="1000"/>
-              <a:t>VISUALIZE = mean </a:t>
-            </a:r>
-            <a:r>
-              <a:rPr sz="1000" i="1">
-                <a:latin typeface="Cambria Math"/>
-              </a:rPr>
-              <a:t>Y</a:t>
-            </a:r>
-            <a:r>
-              <a:rPr sz="800" i="1" baseline="-25000">
-                <a:latin typeface="Cambria Math"/>
-              </a:rPr>
-              <a:t>selected</a:t>
-            </a:r>
-            <a:r>
-              <a:rPr sz="1000"/>
-              <a:t> vs pool mean (</a:t>
-            </a:r>
-            <a:r>
-              <a:rPr sz="1000" i="1">
-                <a:latin typeface="Cambria Math"/>
-              </a:rPr>
-              <a:t>16</a:t>
-            </a:r>
-            <a:r>
-              <a:rPr sz="1000"/>
-              <a:t> bins)</a:t>
+              <a:rPr sz="900"/>
+              <a:t>Not NCAA data — fake league inputs for characterization.</a:t>
             </a:r>
           </a:p>
         </p:txBody>
       </p:sp>
       <p:pic>
         <p:nvPicPr>
-          <p:cNvPr id="4" name="Picture 3" descr="image.png"/>
+          <p:cNvPr id="5" name="Picture 4" descr="image.png"/>
           <p:cNvPicPr>
             <a:picLocks noChangeAspect="1"/>
           </p:cNvPicPr>
@@ -3933,8 +6111,8 @@
         </p:blipFill>
         <p:spPr>
           <a:xfrm>
-            <a:off x="5239467" y="768096"/>
-            <a:ext cx="6074448" cy="3895344"/>
+            <a:off x="3630168" y="1792428"/>
+            <a:ext cx="8177479" cy="3401159"/>
           </a:xfrm>
           <a:prstGeom prst="rect">
             <a:avLst/>
@@ -3943,14 +6121,14 @@
       </p:pic>
       <p:sp>
         <p:nvSpPr>
-          <p:cNvPr id="5" name="TextBox 4"/>
+          <p:cNvPr id="6" name="TextBox 5"/>
           <p:cNvSpPr txBox="1"/>
           <p:nvPr/>
         </p:nvSpPr>
         <p:spPr>
           <a:xfrm>
-            <a:off x="411480" y="4681728"/>
-            <a:ext cx="11368735" cy="1234440"/>
+            <a:off x="384048" y="6053328"/>
+            <a:ext cx="11423599" cy="420624"/>
           </a:xfrm>
           <a:prstGeom prst="rect">
             <a:avLst/>
@@ -3963,213 +6141,44 @@
           </a:bodyPr>
           <a:lstStyle/>
           <a:p>
-            <a:pPr>
-              <a:spcBef>
-                <a:spcPts val="0"/>
-              </a:spcBef>
-              <a:spcAft>
-                <a:spcPts val="0"/>
-              </a:spcAft>
-            </a:pPr>
-            <a:r>
-              <a:rPr sz="900"/>
-              <a:t>OAT: one draw of </a:t>
-            </a:r>
-            <a:r>
-              <a:rPr sz="900" i="1">
-                <a:latin typeface="Cambria Math"/>
-              </a:rPr>
-              <a:t>A</a:t>
-            </a:r>
-            <a:r>
-              <a:rPr sz="800" i="1" baseline="-25000">
-                <a:latin typeface="Cambria Math"/>
-              </a:rPr>
-              <a:t>i</a:t>
-            </a:r>
-            <a:r>
-              <a:rPr sz="900"/>
-              <a:t>, </a:t>
-            </a:r>
-            <a:r>
-              <a:rPr sz="900" i="1">
-                <a:latin typeface="Cambria Math"/>
-              </a:rPr>
-              <a:t>T</a:t>
-            </a:r>
-            <a:r>
-              <a:rPr sz="800" i="1" baseline="-25000">
-                <a:latin typeface="Cambria Math"/>
-              </a:rPr>
-              <a:t>j</a:t>
-            </a:r>
-            <a:r>
-              <a:rPr sz="900"/>
-              <a:t> (seed </a:t>
-            </a:r>
-            <a:r>
-              <a:rPr sz="900" i="1">
-                <a:latin typeface="Cambria Math"/>
-              </a:rPr>
-              <a:t>42</a:t>
-            </a:r>
-            <a:r>
-              <a:rPr sz="900"/>
-              <a:t>); only ASSIGN changes across arms.</a:t>
-            </a:r>
-          </a:p>
-          <a:p>
-            <a:pPr>
-              <a:spcBef>
-                <a:spcPts val="0"/>
-              </a:spcBef>
-              <a:spcAft>
-                <a:spcPts val="0"/>
-              </a:spcAft>
-            </a:pPr>
-            <a:r>
-              <a:rPr sz="900"/>
-              <a:t>Low </a:t>
-            </a:r>
-            <a:r>
-              <a:rPr sz="900" i="1">
-                <a:latin typeface="Cambria Math"/>
-              </a:rPr>
-              <a:t>ρ</a:t>
-            </a:r>
-            <a:r>
-              <a:rPr sz="900"/>
-              <a:t>: players mix across teams — selection vs pool mean stays nearly flat.</a:t>
-            </a:r>
-          </a:p>
-          <a:p>
-            <a:pPr>
-              <a:spcBef>
-                <a:spcPts val="0"/>
-              </a:spcBef>
-              <a:spcAft>
-                <a:spcPts val="0"/>
-              </a:spcAft>
-            </a:pPr>
-            <a:r>
-              <a:rPr sz="900"/>
-              <a:t>High </a:t>
-            </a:r>
-            <a:r>
-              <a:rPr sz="900" i="1">
-                <a:latin typeface="Cambria Math"/>
-              </a:rPr>
-              <a:t>ρ</a:t>
-            </a:r>
-            <a:r>
-              <a:rPr sz="900"/>
-              <a:t>: assortative matching — peer environments concentrate; inverted-</a:t>
-            </a:r>
-            <a:r>
-              <a:rPr sz="900" i="1">
-                <a:latin typeface="Cambria Math"/>
-              </a:rPr>
-              <a:t>U</a:t>
-            </a:r>
-            <a:r>
-              <a:rPr sz="900"/>
-              <a:t> emerges.</a:t>
-            </a:r>
-          </a:p>
-          <a:p>
-            <a:pPr>
-              <a:spcBef>
-                <a:spcPts val="0"/>
-              </a:spcBef>
-              <a:spcAft>
-                <a:spcPts val="0"/>
-              </a:spcAft>
-            </a:pPr>
-            <a:r>
-              <a:rPr sz="900"/>
-              <a:t>Sort-and-chop arm omitted from plot (still in CSV bundle; toggle restores it).</a:t>
-            </a:r>
-          </a:p>
-        </p:txBody>
-      </p:sp>
-      <p:sp>
-        <p:nvSpPr>
-          <p:cNvPr id="6" name="TextBox 5"/>
-          <p:cNvSpPr txBox="1"/>
-          <p:nvPr/>
-        </p:nvSpPr>
-        <p:spPr>
-          <a:xfrm>
-            <a:off x="411480" y="5971032"/>
-            <a:ext cx="11368735" cy="475488"/>
-          </a:xfrm>
-          <a:prstGeom prst="rect">
-            <a:avLst/>
-          </a:prstGeom>
-          <a:noFill/>
-        </p:spPr>
-        <p:txBody>
-          <a:bodyPr wrap="none">
-            <a:spAutoFit/>
-          </a:bodyPr>
-          <a:lstStyle/>
-          <a:p>
             <a:pPr algn="l">
               <a:defRPr b="1"/>
             </a:pPr>
             <a:r>
-              <a:rPr sz="1100"/>
-              <a:t>Claim: at fixed score and top-</a:t>
-            </a:r>
-            <a:r>
-              <a:rPr sz="1100" i="1">
-                <a:latin typeface="Cambria Math"/>
-              </a:rPr>
-              <a:t>K</a:t>
-            </a:r>
-            <a:r>
-              <a:rPr sz="1100"/>
-              <a:t>, </a:t>
-            </a:r>
-            <a:r>
-              <a:rPr sz="1100" i="1">
-                <a:latin typeface="Cambria Math"/>
-              </a:rPr>
-              <a:t>ρ</a:t>
-            </a:r>
-            <a:r>
-              <a:rPr sz="1100"/>
-              <a:t> in assignment matters — low-</a:t>
-            </a:r>
-            <a:r>
-              <a:rPr sz="1100" i="1">
-                <a:latin typeface="Cambria Math"/>
-              </a:rPr>
-              <a:t>ρ</a:t>
-            </a:r>
-            <a:r>
-              <a:rPr sz="1100"/>
-              <a:t> mixing yields a nearly flat curve; high-</a:t>
-            </a:r>
-            <a:r>
-              <a:rPr sz="1100" i="1">
-                <a:latin typeface="Cambria Math"/>
-              </a:rPr>
-              <a:t>ρ</a:t>
-            </a:r>
-            <a:r>
-              <a:rPr sz="1100"/>
-              <a:t> assortativity delivers the peer-pressure inverted-</a:t>
-            </a:r>
-            <a:r>
-              <a:rPr sz="1100" i="1">
-                <a:latin typeface="Cambria Math"/>
-              </a:rPr>
-              <a:t>U</a:t>
-            </a:r>
-            <a:r>
-              <a:rPr sz="1100"/>
-              <a:t> readout.</a:t>
+              <a:rPr sz="1000"/>
+              <a:t>Claim: Phase B fixes one stochastic league draw (seed 42) — </a:t>
+            </a:r>
+            <a:r>
+              <a:rPr sz="1000" i="1">
+                <a:latin typeface="Cambria Math"/>
+              </a:rPr>
+              <a:t>A</a:t>
+            </a:r>
+            <a:r>
+              <a:rPr sz="800" i="1" baseline="-25000">
+                <a:latin typeface="Cambria Math"/>
+              </a:rPr>
+              <a:t>i</a:t>
+            </a:r>
+            <a:r>
+              <a:rPr sz="1000"/>
+              <a:t> and </a:t>
+            </a:r>
+            <a:r>
+              <a:rPr sz="1000" i="1">
+                <a:latin typeface="Cambria Math"/>
+              </a:rPr>
+              <a:t>T</a:t>
+            </a:r>
+            <a:r>
+              <a:rPr sz="800" i="1" baseline="-25000">
+                <a:latin typeface="Cambria Math"/>
+              </a:rPr>
+              <a:t>j^*</a:t>
+            </a:r>
+            <a:r>
+              <a:rPr sz="1000"/>
+              <a:t> are the inputs every OAT arm reuses; only ASSIGN / SCORE knobs change across slides.</a:t>
             </a:r>
           </a:p>
         </p:txBody>
@@ -4225,11 +6234,2457 @@
               <a:rPr sz="2000" i="1">
                 <a:latin typeface="Cambria Math"/>
               </a:rPr>
+              <a:t>ρ</a:t>
+            </a:r>
+            <a:r>
+              <a:rPr sz="2000"/>
+              <a:t> (assignment assortativity) — sort-and-chop shown</a:t>
+            </a:r>
+          </a:p>
+        </p:txBody>
+      </p:sp>
+      <p:sp>
+        <p:nvSpPr>
+          <p:cNvPr id="3" name="TextBox 2"/>
+          <p:cNvSpPr txBox="1"/>
+          <p:nvPr/>
+        </p:nvSpPr>
+        <p:spPr>
+          <a:xfrm>
+            <a:off x="411480" y="768096"/>
+            <a:ext cx="4160520" cy="3511296"/>
+          </a:xfrm>
+          <a:prstGeom prst="rect">
+            <a:avLst/>
+          </a:prstGeom>
+          <a:noFill/>
+        </p:spPr>
+        <p:txBody>
+          <a:bodyPr wrap="square">
+            <a:spAutoFit/>
+          </a:bodyPr>
+          <a:lstStyle/>
+          <a:p>
+            <a:pPr>
+              <a:spcAft>
+                <a:spcPts val="0"/>
+              </a:spcAft>
+              <a:defRPr b="1"/>
+            </a:pPr>
+            <a:r>
+              <a:rPr sz="1100"/>
+              <a:t>Characterize </a:t>
+            </a:r>
+            <a:r>
+              <a:rPr sz="1100" i="1">
+                <a:latin typeface="Cambria Math"/>
+              </a:rPr>
+              <a:t>ρ</a:t>
+            </a:r>
+            <a:r>
+              <a:rPr sz="1100"/>
+              <a:t> — one-at-a-time at 539 baseline (score + top-</a:t>
+            </a:r>
+            <a:r>
+              <a:rPr sz="1100" i="1">
+                <a:latin typeface="Cambria Math"/>
+              </a:rPr>
+              <a:t>K</a:t>
+            </a:r>
+            <a:r>
+              <a:rPr sz="1100"/>
+              <a:t> fixed)</a:t>
+            </a:r>
+          </a:p>
+          <a:p>
+            <a:pPr>
+              <a:spcAft>
+                <a:spcPts val="0"/>
+              </a:spcAft>
+              <a:defRPr sz="1000" b="1"/>
+            </a:pPr>
+            <a:r>
+              <a:t>ASSIGN (knob ρ) — LaTeX:</a:t>
+            </a:r>
+          </a:p>
+          <a:p>
+            <a:pPr>
+              <a:spcAft>
+                <a:spcPts val="0"/>
+              </a:spcAft>
+            </a:pPr>
+            <a:r>
+              <a:rPr sz="1000">
+                <a:latin typeface="Courier New"/>
+              </a:rPr>
+              <a:t>\pi_{ij} \propto \exp\left(-\rho \cdot \frac{(A_i-T_{j^*})^2}{2\sigma^2}\right)</a:t>
+            </a:r>
+          </a:p>
+          <a:p>
+            <a:pPr>
+              <a:spcAft>
+                <a:spcPts val="0"/>
+              </a:spcAft>
+            </a:pPr>
+            <a:r>
+              <a:rPr sz="1000" i="1">
+                <a:latin typeface="Cambria Math"/>
+              </a:rPr>
+              <a:t>σ=0.65</a:t>
+            </a:r>
+            <a:r>
+              <a:rPr sz="1000"/>
+              <a:t> fixed</a:t>
+            </a:r>
+          </a:p>
+          <a:p>
+            <a:pPr>
+              <a:spcAft>
+                <a:spcPts val="0"/>
+              </a:spcAft>
+            </a:pPr>
+            <a:r>
+              <a:rPr sz="1000"/>
+              <a:t>arms: </a:t>
+            </a:r>
+            <a:r>
+              <a:rPr sz="1000" i="1">
+                <a:latin typeface="Cambria Math"/>
+              </a:rPr>
+              <a:t>ρ ∈ {0.1, 1, 8, 32}</a:t>
+            </a:r>
+            <a:r>
+              <a:rPr sz="1000"/>
+              <a:t> + sort-and-chop</a:t>
+            </a:r>
+          </a:p>
+          <a:p>
+            <a:pPr>
+              <a:spcAft>
+                <a:spcPts val="0"/>
+              </a:spcAft>
+            </a:pPr>
+            <a:r>
+              <a:rPr sz="1000" i="1">
+                <a:latin typeface="Cambria Math"/>
+              </a:rPr>
+              <a:t>S</a:t>
+            </a:r>
+            <a:r>
+              <a:rPr sz="800" i="1" baseline="-25000">
+                <a:latin typeface="Cambria Math"/>
+              </a:rPr>
+              <a:t>i</a:t>
+            </a:r>
+            <a:r>
+              <a:rPr sz="1000" i="1">
+                <a:latin typeface="Cambria Math"/>
+              </a:rPr>
+              <a:t> = A</a:t>
+            </a:r>
+            <a:r>
+              <a:rPr sz="800" i="1" baseline="-25000">
+                <a:latin typeface="Cambria Math"/>
+              </a:rPr>
+              <a:t>i</a:t>
+            </a:r>
+            <a:r>
+              <a:rPr sz="1000" i="1">
+                <a:latin typeface="Cambria Math"/>
+              </a:rPr>
+              <a:t> - 0.55 · L</a:t>
+            </a:r>
+            <a:r>
+              <a:rPr sz="800" i="1" baseline="-25000">
+                <a:latin typeface="Cambria Math"/>
+              </a:rPr>
+              <a:t>C</a:t>
+            </a:r>
+            <a:r>
+              <a:rPr sz="1000"/>
+              <a:t> (crowding in score held constant across arms)</a:t>
+            </a:r>
+          </a:p>
+          <a:p>
+            <a:pPr>
+              <a:spcAft>
+                <a:spcPts val="0"/>
+              </a:spcAft>
+            </a:pPr>
+            <a:r>
+              <a:rPr sz="1000"/>
+              <a:t>top-</a:t>
+            </a:r>
+            <a:r>
+              <a:rPr sz="1000" i="1">
+                <a:latin typeface="Cambria Math"/>
+              </a:rPr>
+              <a:t>K</a:t>
+            </a:r>
+            <a:r>
+              <a:rPr sz="1000"/>
+              <a:t> by </a:t>
+            </a:r>
+            <a:r>
+              <a:rPr sz="1000" i="1">
+                <a:latin typeface="Cambria Math"/>
+              </a:rPr>
+              <a:t>S</a:t>
+            </a:r>
+            <a:r>
+              <a:rPr sz="800" i="1" baseline="-25000">
+                <a:latin typeface="Cambria Math"/>
+              </a:rPr>
+              <a:t>i</a:t>
+            </a:r>
+          </a:p>
+          <a:p>
+            <a:pPr>
+              <a:spcAft>
+                <a:spcPts val="0"/>
+              </a:spcAft>
+            </a:pPr>
+            <a:r>
+              <a:rPr sz="1000"/>
+              <a:t>VISUALIZE = mean </a:t>
+            </a:r>
+            <a:r>
+              <a:rPr sz="1000" i="1">
+                <a:latin typeface="Cambria Math"/>
+              </a:rPr>
+              <a:t>Y</a:t>
+            </a:r>
+            <a:r>
+              <a:rPr sz="800" i="1" baseline="-25000">
+                <a:latin typeface="Cambria Math"/>
+              </a:rPr>
+              <a:t>selected</a:t>
+            </a:r>
+            <a:r>
+              <a:rPr sz="1000"/>
+              <a:t> vs pool mean (</a:t>
+            </a:r>
+            <a:r>
+              <a:rPr sz="1000" i="1">
+                <a:latin typeface="Cambria Math"/>
+              </a:rPr>
+              <a:t>16</a:t>
+            </a:r>
+            <a:r>
+              <a:rPr sz="1000"/>
+              <a:t> bins)</a:t>
+            </a:r>
+          </a:p>
+        </p:txBody>
+      </p:sp>
+      <p:pic>
+        <p:nvPicPr>
+          <p:cNvPr id="4" name="Picture 3" descr="image.png"/>
+          <p:cNvPicPr>
+            <a:picLocks noChangeAspect="1"/>
+          </p:cNvPicPr>
+          <p:nvPr/>
+        </p:nvPicPr>
+        <p:blipFill>
+          <a:blip r:embed="rId2"/>
+          <a:stretch>
+            <a:fillRect/>
+          </a:stretch>
+        </p:blipFill>
+        <p:spPr>
+          <a:xfrm>
+            <a:off x="5690246" y="768096"/>
+            <a:ext cx="5172890" cy="3511296"/>
+          </a:xfrm>
+          <a:prstGeom prst="rect">
+            <a:avLst/>
+          </a:prstGeom>
+        </p:spPr>
+      </p:pic>
+      <p:sp>
+        <p:nvSpPr>
+          <p:cNvPr id="5" name="TextBox 4"/>
+          <p:cNvSpPr txBox="1"/>
+          <p:nvPr/>
+        </p:nvSpPr>
+        <p:spPr>
+          <a:xfrm>
+            <a:off x="411480" y="4297680"/>
+            <a:ext cx="11368735" cy="1234440"/>
+          </a:xfrm>
+          <a:prstGeom prst="rect">
+            <a:avLst/>
+          </a:prstGeom>
+          <a:noFill/>
+        </p:spPr>
+        <p:txBody>
+          <a:bodyPr wrap="square">
+            <a:spAutoFit/>
+          </a:bodyPr>
+          <a:lstStyle/>
+          <a:p>
+            <a:pPr>
+              <a:spcBef>
+                <a:spcPts val="0"/>
+              </a:spcBef>
+              <a:spcAft>
+                <a:spcPts val="0"/>
+              </a:spcAft>
+            </a:pPr>
+            <a:r>
+              <a:rPr sz="900"/>
+              <a:t>OAT: one draw of </a:t>
+            </a:r>
+            <a:r>
+              <a:rPr sz="900" i="1">
+                <a:latin typeface="Cambria Math"/>
+              </a:rPr>
+              <a:t>A</a:t>
+            </a:r>
+            <a:r>
+              <a:rPr sz="800" i="1" baseline="-25000">
+                <a:latin typeface="Cambria Math"/>
+              </a:rPr>
+              <a:t>i</a:t>
+            </a:r>
+            <a:r>
+              <a:rPr sz="900"/>
+              <a:t>, </a:t>
+            </a:r>
+            <a:r>
+              <a:rPr sz="900" i="1">
+                <a:latin typeface="Cambria Math"/>
+              </a:rPr>
+              <a:t>T</a:t>
+            </a:r>
+            <a:r>
+              <a:rPr sz="800" i="1" baseline="-25000">
+                <a:latin typeface="Cambria Math"/>
+              </a:rPr>
+              <a:t>j^*</a:t>
+            </a:r>
+            <a:r>
+              <a:rPr sz="900"/>
+              <a:t> (seed </a:t>
+            </a:r>
+            <a:r>
+              <a:rPr sz="900" i="1">
+                <a:latin typeface="Cambria Math"/>
+              </a:rPr>
+              <a:t>42</a:t>
+            </a:r>
+            <a:r>
+              <a:rPr sz="900"/>
+              <a:t>); only ASSIGN changes across arms.</a:t>
+            </a:r>
+          </a:p>
+          <a:p>
+            <a:pPr>
+              <a:spcBef>
+                <a:spcPts val="0"/>
+              </a:spcBef>
+              <a:spcAft>
+                <a:spcPts val="0"/>
+              </a:spcAft>
+            </a:pPr>
+            <a:r>
+              <a:rPr sz="900"/>
+              <a:t>Low </a:t>
+            </a:r>
+            <a:r>
+              <a:rPr sz="900" i="1">
+                <a:latin typeface="Cambria Math"/>
+              </a:rPr>
+              <a:t>ρ</a:t>
+            </a:r>
+            <a:r>
+              <a:rPr sz="900"/>
+              <a:t>: players mix across teams — selection vs pool mean stays nearly flat.</a:t>
+            </a:r>
+          </a:p>
+          <a:p>
+            <a:pPr>
+              <a:spcBef>
+                <a:spcPts val="0"/>
+              </a:spcBef>
+              <a:spcAft>
+                <a:spcPts val="0"/>
+              </a:spcAft>
+            </a:pPr>
+            <a:r>
+              <a:rPr sz="900"/>
+              <a:t>High </a:t>
+            </a:r>
+            <a:r>
+              <a:rPr sz="900" i="1">
+                <a:latin typeface="Cambria Math"/>
+              </a:rPr>
+              <a:t>ρ</a:t>
+            </a:r>
+            <a:r>
+              <a:rPr sz="900"/>
+              <a:t>: assortative matching — peer environments concentrate; inverted-</a:t>
+            </a:r>
+            <a:r>
+              <a:rPr sz="900" i="1">
+                <a:latin typeface="Cambria Math"/>
+              </a:rPr>
+              <a:t>U</a:t>
+            </a:r>
+            <a:r>
+              <a:rPr sz="900"/>
+              <a:t> emerges.</a:t>
+            </a:r>
+          </a:p>
+          <a:p>
+            <a:pPr>
+              <a:spcBef>
+                <a:spcPts val="0"/>
+              </a:spcBef>
+              <a:spcAft>
+                <a:spcPts val="0"/>
+              </a:spcAft>
+            </a:pPr>
+            <a:r>
+              <a:rPr sz="900"/>
+              <a:t>Sort-and-chop benchmark: hard rank match (same score rule as soft arms).</a:t>
+            </a:r>
+          </a:p>
+        </p:txBody>
+      </p:sp>
+      <p:sp>
+        <p:nvSpPr>
+          <p:cNvPr id="6" name="TextBox 5"/>
+          <p:cNvSpPr txBox="1"/>
+          <p:nvPr/>
+        </p:nvSpPr>
+        <p:spPr>
+          <a:xfrm>
+            <a:off x="411480" y="5586984"/>
+            <a:ext cx="11368735" cy="347472"/>
+          </a:xfrm>
+          <a:prstGeom prst="rect">
+            <a:avLst/>
+          </a:prstGeom>
+          <a:noFill/>
+        </p:spPr>
+        <p:txBody>
+          <a:bodyPr wrap="none">
+            <a:spAutoFit/>
+          </a:bodyPr>
+          <a:lstStyle/>
+          <a:p>
+            <a:pPr algn="l"/>
+            <a:r>
+              <a:rPr sz="1000"/>
+              <a:t>Why </a:t>
+            </a:r>
+            <a:r>
+              <a:rPr sz="1000" i="1">
+                <a:latin typeface="Cambria Math"/>
+              </a:rPr>
+              <a:t>ρ</a:t>
+            </a:r>
+            <a:r>
+              <a:rPr sz="1000"/>
+              <a:t> matters here: assignment assortativity sets how spread out team </a:t>
+            </a:r>
+            <a:r>
+              <a:rPr sz="1000" i="1">
+                <a:latin typeface="Cambria Math"/>
+              </a:rPr>
+              <a:t>L</a:t>
+            </a:r>
+            <a:r>
+              <a:rPr sz="800" i="1" baseline="-25000">
+                <a:latin typeface="Cambria Math"/>
+              </a:rPr>
+              <a:t>C</a:t>
+            </a:r>
+            <a:r>
+              <a:rPr sz="1000"/>
+              <a:t> is across the league — at </a:t>
+            </a:r>
+            <a:r>
+              <a:rPr sz="1000" i="1">
+                <a:latin typeface="Cambria Math"/>
+              </a:rPr>
+              <a:t>ρ ≈ 0</a:t>
+            </a:r>
+            <a:r>
+              <a:rPr sz="1000"/>
+              <a:t> (arm </a:t>
+            </a:r>
+            <a:r>
+              <a:rPr sz="1000" i="1">
+                <a:latin typeface="Cambria Math"/>
+              </a:rPr>
+              <a:t>0.001</a:t>
+            </a:r>
+            <a:r>
+              <a:rPr sz="1000"/>
+              <a:t>) rosters mix and peer pressure looks the same everywhere; at high </a:t>
+            </a:r>
+            <a:r>
+              <a:rPr sz="1000" i="1">
+                <a:latin typeface="Cambria Math"/>
+              </a:rPr>
+              <a:t>ρ</a:t>
+            </a:r>
+            <a:r>
+              <a:rPr sz="1000"/>
+              <a:t> weak teams pile up near </a:t>
+            </a:r>
+            <a:r>
+              <a:rPr sz="1000" i="1">
+                <a:latin typeface="Cambria Math"/>
+              </a:rPr>
+              <a:t>L</a:t>
+            </a:r>
+            <a:r>
+              <a:rPr sz="800" i="1" baseline="-25000">
+                <a:latin typeface="Cambria Math"/>
+              </a:rPr>
+              <a:t>C</a:t>
+            </a:r>
+            <a:r>
+              <a:rPr sz="1000" i="1">
+                <a:latin typeface="Cambria Math"/>
+              </a:rPr>
+              <a:t> ≈ 0</a:t>
+            </a:r>
+            <a:r>
+              <a:rPr sz="1000"/>
+              <a:t> while elite rosters face real congestion.</a:t>
+            </a:r>
+          </a:p>
+        </p:txBody>
+      </p:sp>
+      <p:sp>
+        <p:nvSpPr>
+          <p:cNvPr id="7" name="TextBox 6"/>
+          <p:cNvSpPr txBox="1"/>
+          <p:nvPr/>
+        </p:nvSpPr>
+        <p:spPr>
+          <a:xfrm>
+            <a:off x="411480" y="5971032"/>
+            <a:ext cx="11368735" cy="475488"/>
+          </a:xfrm>
+          <a:prstGeom prst="rect">
+            <a:avLst/>
+          </a:prstGeom>
+          <a:noFill/>
+        </p:spPr>
+        <p:txBody>
+          <a:bodyPr wrap="none">
+            <a:spAutoFit/>
+          </a:bodyPr>
+          <a:lstStyle/>
+          <a:p>
+            <a:pPr algn="l">
+              <a:defRPr b="1"/>
+            </a:pPr>
+            <a:r>
+              <a:rPr sz="1100"/>
+              <a:t>Claim: at fixed score and top-</a:t>
+            </a:r>
+            <a:r>
+              <a:rPr sz="1100" i="1">
+                <a:latin typeface="Cambria Math"/>
+              </a:rPr>
+              <a:t>K</a:t>
+            </a:r>
+            <a:r>
+              <a:rPr sz="1100"/>
+              <a:t>, </a:t>
+            </a:r>
+            <a:r>
+              <a:rPr sz="1100" i="1">
+                <a:latin typeface="Cambria Math"/>
+              </a:rPr>
+              <a:t>ρ</a:t>
+            </a:r>
+            <a:r>
+              <a:rPr sz="1100"/>
+              <a:t> in assignment matters — low-</a:t>
+            </a:r>
+            <a:r>
+              <a:rPr sz="1100" i="1">
+                <a:latin typeface="Cambria Math"/>
+              </a:rPr>
+              <a:t>ρ</a:t>
+            </a:r>
+            <a:r>
+              <a:rPr sz="1100"/>
+              <a:t> mixing yields a nearly flat curve; high-</a:t>
+            </a:r>
+            <a:r>
+              <a:rPr sz="1100" i="1">
+                <a:latin typeface="Cambria Math"/>
+              </a:rPr>
+              <a:t>ρ</a:t>
+            </a:r>
+            <a:r>
+              <a:rPr sz="1100"/>
+              <a:t> assortativity delivers the peer-pressure inverted-</a:t>
+            </a:r>
+            <a:r>
+              <a:rPr sz="1100" i="1">
+                <a:latin typeface="Cambria Math"/>
+              </a:rPr>
+              <a:t>U</a:t>
+            </a:r>
+            <a:r>
+              <a:rPr sz="1100"/>
+              <a:t> readout.</a:t>
+            </a:r>
+          </a:p>
+        </p:txBody>
+      </p:sp>
+    </p:spTree>
+  </p:cSld>
+  <p:clrMapOvr>
+    <a:masterClrMapping/>
+  </p:clrMapOvr>
+</p:sld>
+</file>
+
+<file path=ppt/slides/slide4.xml><?xml version="1.0" encoding="utf-8"?>
+<p:sld xmlns:a="http://schemas.openxmlformats.org/drawingml/2006/main" xmlns:p="http://schemas.openxmlformats.org/presentationml/2006/main" xmlns:r="http://schemas.openxmlformats.org/officeDocument/2006/relationships">
+  <p:cSld>
+    <p:spTree>
+      <p:nvGrpSpPr>
+        <p:cNvPr id="1" name=""/>
+        <p:cNvGrpSpPr/>
+        <p:nvPr/>
+      </p:nvGrpSpPr>
+      <p:grpSpPr/>
+      <p:sp>
+        <p:nvSpPr>
+          <p:cNvPr id="2" name="TextBox 1"/>
+          <p:cNvSpPr txBox="1"/>
+          <p:nvPr/>
+        </p:nvSpPr>
+        <p:spPr>
+          <a:xfrm>
+            <a:off x="411480" y="256032"/>
+            <a:ext cx="11368735" cy="420624"/>
+          </a:xfrm>
+          <a:prstGeom prst="rect">
+            <a:avLst/>
+          </a:prstGeom>
+          <a:noFill/>
+        </p:spPr>
+        <p:txBody>
+          <a:bodyPr wrap="none">
+            <a:spAutoFit/>
+          </a:bodyPr>
+          <a:lstStyle/>
+          <a:p>
+            <a:pPr>
+              <a:defRPr b="1"/>
+            </a:pPr>
+            <a:r>
+              <a:rPr sz="2000"/>
+              <a:t>Phase B — Characterize </a:t>
+            </a:r>
+            <a:r>
+              <a:rPr sz="2000" i="1">
+                <a:latin typeface="Cambria Math"/>
+              </a:rPr>
+              <a:t>ρ</a:t>
+            </a:r>
+            <a:r>
+              <a:rPr sz="2000"/>
+              <a:t> (assignment assortativity) — sort-and-chop suppressed</a:t>
+            </a:r>
+          </a:p>
+        </p:txBody>
+      </p:sp>
+      <p:sp>
+        <p:nvSpPr>
+          <p:cNvPr id="3" name="TextBox 2"/>
+          <p:cNvSpPr txBox="1"/>
+          <p:nvPr/>
+        </p:nvSpPr>
+        <p:spPr>
+          <a:xfrm>
+            <a:off x="411480" y="768096"/>
+            <a:ext cx="4160520" cy="3511296"/>
+          </a:xfrm>
+          <a:prstGeom prst="rect">
+            <a:avLst/>
+          </a:prstGeom>
+          <a:noFill/>
+        </p:spPr>
+        <p:txBody>
+          <a:bodyPr wrap="square">
+            <a:spAutoFit/>
+          </a:bodyPr>
+          <a:lstStyle/>
+          <a:p>
+            <a:pPr>
+              <a:spcAft>
+                <a:spcPts val="0"/>
+              </a:spcAft>
+              <a:defRPr b="1"/>
+            </a:pPr>
+            <a:r>
+              <a:rPr sz="1100"/>
+              <a:t>Characterize </a:t>
+            </a:r>
+            <a:r>
+              <a:rPr sz="1100" i="1">
+                <a:latin typeface="Cambria Math"/>
+              </a:rPr>
+              <a:t>ρ</a:t>
+            </a:r>
+            <a:r>
+              <a:rPr sz="1100"/>
+              <a:t> — one-at-a-time at 539 baseline (score + top-</a:t>
+            </a:r>
+            <a:r>
+              <a:rPr sz="1100" i="1">
+                <a:latin typeface="Cambria Math"/>
+              </a:rPr>
+              <a:t>K</a:t>
+            </a:r>
+            <a:r>
+              <a:rPr sz="1100"/>
+              <a:t> fixed)</a:t>
+            </a:r>
+          </a:p>
+          <a:p>
+            <a:pPr>
+              <a:spcAft>
+                <a:spcPts val="0"/>
+              </a:spcAft>
+              <a:defRPr sz="1000" b="1"/>
+            </a:pPr>
+            <a:r>
+              <a:t>ASSIGN (knob ρ) — LaTeX:</a:t>
+            </a:r>
+          </a:p>
+          <a:p>
+            <a:pPr>
+              <a:spcAft>
+                <a:spcPts val="0"/>
+              </a:spcAft>
+            </a:pPr>
+            <a:r>
+              <a:rPr sz="1000">
+                <a:latin typeface="Courier New"/>
+              </a:rPr>
+              <a:t>\pi_{ij} \propto \exp\left(-\rho \cdot \frac{(A_i-T_{j^*})^2}{2\sigma^2}\right)</a:t>
+            </a:r>
+          </a:p>
+          <a:p>
+            <a:pPr>
+              <a:spcAft>
+                <a:spcPts val="0"/>
+              </a:spcAft>
+            </a:pPr>
+            <a:r>
+              <a:rPr sz="1000" i="1">
+                <a:latin typeface="Cambria Math"/>
+              </a:rPr>
+              <a:t>σ=0.65</a:t>
+            </a:r>
+            <a:r>
+              <a:rPr sz="1000"/>
+              <a:t> fixed</a:t>
+            </a:r>
+          </a:p>
+          <a:p>
+            <a:pPr>
+              <a:spcAft>
+                <a:spcPts val="0"/>
+              </a:spcAft>
+            </a:pPr>
+            <a:r>
+              <a:rPr sz="1000"/>
+              <a:t>arms: </a:t>
+            </a:r>
+            <a:r>
+              <a:rPr sz="1000" i="1">
+                <a:latin typeface="Cambria Math"/>
+              </a:rPr>
+              <a:t>ρ ∈ {0.1, 1, 8, 32}</a:t>
+            </a:r>
+          </a:p>
+          <a:p>
+            <a:pPr>
+              <a:spcAft>
+                <a:spcPts val="0"/>
+              </a:spcAft>
+            </a:pPr>
+            <a:r>
+              <a:rPr sz="1000" i="1">
+                <a:latin typeface="Cambria Math"/>
+              </a:rPr>
+              <a:t>S</a:t>
+            </a:r>
+            <a:r>
+              <a:rPr sz="800" i="1" baseline="-25000">
+                <a:latin typeface="Cambria Math"/>
+              </a:rPr>
+              <a:t>i</a:t>
+            </a:r>
+            <a:r>
+              <a:rPr sz="1000" i="1">
+                <a:latin typeface="Cambria Math"/>
+              </a:rPr>
+              <a:t> = A</a:t>
+            </a:r>
+            <a:r>
+              <a:rPr sz="800" i="1" baseline="-25000">
+                <a:latin typeface="Cambria Math"/>
+              </a:rPr>
+              <a:t>i</a:t>
+            </a:r>
+            <a:r>
+              <a:rPr sz="1000" i="1">
+                <a:latin typeface="Cambria Math"/>
+              </a:rPr>
+              <a:t> - 0.55 · L</a:t>
+            </a:r>
+            <a:r>
+              <a:rPr sz="800" i="1" baseline="-25000">
+                <a:latin typeface="Cambria Math"/>
+              </a:rPr>
+              <a:t>C</a:t>
+            </a:r>
+            <a:r>
+              <a:rPr sz="1000"/>
+              <a:t> (crowding in score held constant across arms)</a:t>
+            </a:r>
+          </a:p>
+          <a:p>
+            <a:pPr>
+              <a:spcAft>
+                <a:spcPts val="0"/>
+              </a:spcAft>
+            </a:pPr>
+            <a:r>
+              <a:rPr sz="1000"/>
+              <a:t>top-</a:t>
+            </a:r>
+            <a:r>
+              <a:rPr sz="1000" i="1">
+                <a:latin typeface="Cambria Math"/>
+              </a:rPr>
+              <a:t>K</a:t>
+            </a:r>
+            <a:r>
+              <a:rPr sz="1000"/>
+              <a:t> by </a:t>
+            </a:r>
+            <a:r>
+              <a:rPr sz="1000" i="1">
+                <a:latin typeface="Cambria Math"/>
+              </a:rPr>
+              <a:t>S</a:t>
+            </a:r>
+            <a:r>
+              <a:rPr sz="800" i="1" baseline="-25000">
+                <a:latin typeface="Cambria Math"/>
+              </a:rPr>
+              <a:t>i</a:t>
+            </a:r>
+          </a:p>
+          <a:p>
+            <a:pPr>
+              <a:spcAft>
+                <a:spcPts val="0"/>
+              </a:spcAft>
+            </a:pPr>
+            <a:r>
+              <a:rPr sz="1000"/>
+              <a:t>VISUALIZE = mean </a:t>
+            </a:r>
+            <a:r>
+              <a:rPr sz="1000" i="1">
+                <a:latin typeface="Cambria Math"/>
+              </a:rPr>
+              <a:t>Y</a:t>
+            </a:r>
+            <a:r>
+              <a:rPr sz="800" i="1" baseline="-25000">
+                <a:latin typeface="Cambria Math"/>
+              </a:rPr>
+              <a:t>selected</a:t>
+            </a:r>
+            <a:r>
+              <a:rPr sz="1000"/>
+              <a:t> vs pool mean (</a:t>
+            </a:r>
+            <a:r>
+              <a:rPr sz="1000" i="1">
+                <a:latin typeface="Cambria Math"/>
+              </a:rPr>
+              <a:t>16</a:t>
+            </a:r>
+            <a:r>
+              <a:rPr sz="1000"/>
+              <a:t> bins)</a:t>
+            </a:r>
+          </a:p>
+        </p:txBody>
+      </p:sp>
+      <p:pic>
+        <p:nvPicPr>
+          <p:cNvPr id="4" name="Picture 3" descr="image.png"/>
+          <p:cNvPicPr>
+            <a:picLocks noChangeAspect="1"/>
+          </p:cNvPicPr>
+          <p:nvPr/>
+        </p:nvPicPr>
+        <p:blipFill>
+          <a:blip r:embed="rId2"/>
+          <a:stretch>
+            <a:fillRect/>
+          </a:stretch>
+        </p:blipFill>
+        <p:spPr>
+          <a:xfrm>
+            <a:off x="5658895" y="768096"/>
+            <a:ext cx="5235593" cy="3511296"/>
+          </a:xfrm>
+          <a:prstGeom prst="rect">
+            <a:avLst/>
+          </a:prstGeom>
+        </p:spPr>
+      </p:pic>
+      <p:sp>
+        <p:nvSpPr>
+          <p:cNvPr id="5" name="TextBox 4"/>
+          <p:cNvSpPr txBox="1"/>
+          <p:nvPr/>
+        </p:nvSpPr>
+        <p:spPr>
+          <a:xfrm>
+            <a:off x="411480" y="4297680"/>
+            <a:ext cx="11368735" cy="1234440"/>
+          </a:xfrm>
+          <a:prstGeom prst="rect">
+            <a:avLst/>
+          </a:prstGeom>
+          <a:noFill/>
+        </p:spPr>
+        <p:txBody>
+          <a:bodyPr wrap="square">
+            <a:spAutoFit/>
+          </a:bodyPr>
+          <a:lstStyle/>
+          <a:p>
+            <a:pPr>
+              <a:spcBef>
+                <a:spcPts val="0"/>
+              </a:spcBef>
+              <a:spcAft>
+                <a:spcPts val="0"/>
+              </a:spcAft>
+            </a:pPr>
+            <a:r>
+              <a:rPr sz="900"/>
+              <a:t>OAT: one draw of </a:t>
+            </a:r>
+            <a:r>
+              <a:rPr sz="900" i="1">
+                <a:latin typeface="Cambria Math"/>
+              </a:rPr>
+              <a:t>A</a:t>
+            </a:r>
+            <a:r>
+              <a:rPr sz="800" i="1" baseline="-25000">
+                <a:latin typeface="Cambria Math"/>
+              </a:rPr>
+              <a:t>i</a:t>
+            </a:r>
+            <a:r>
+              <a:rPr sz="900"/>
+              <a:t>, </a:t>
+            </a:r>
+            <a:r>
+              <a:rPr sz="900" i="1">
+                <a:latin typeface="Cambria Math"/>
+              </a:rPr>
+              <a:t>T</a:t>
+            </a:r>
+            <a:r>
+              <a:rPr sz="800" i="1" baseline="-25000">
+                <a:latin typeface="Cambria Math"/>
+              </a:rPr>
+              <a:t>j^*</a:t>
+            </a:r>
+            <a:r>
+              <a:rPr sz="900"/>
+              <a:t> (seed </a:t>
+            </a:r>
+            <a:r>
+              <a:rPr sz="900" i="1">
+                <a:latin typeface="Cambria Math"/>
+              </a:rPr>
+              <a:t>42</a:t>
+            </a:r>
+            <a:r>
+              <a:rPr sz="900"/>
+              <a:t>); only ASSIGN changes across arms.</a:t>
+            </a:r>
+          </a:p>
+          <a:p>
+            <a:pPr>
+              <a:spcBef>
+                <a:spcPts val="0"/>
+              </a:spcBef>
+              <a:spcAft>
+                <a:spcPts val="0"/>
+              </a:spcAft>
+            </a:pPr>
+            <a:r>
+              <a:rPr sz="900"/>
+              <a:t>Low </a:t>
+            </a:r>
+            <a:r>
+              <a:rPr sz="900" i="1">
+                <a:latin typeface="Cambria Math"/>
+              </a:rPr>
+              <a:t>ρ</a:t>
+            </a:r>
+            <a:r>
+              <a:rPr sz="900"/>
+              <a:t>: players mix across teams — selection vs pool mean stays nearly flat.</a:t>
+            </a:r>
+          </a:p>
+          <a:p>
+            <a:pPr>
+              <a:spcBef>
+                <a:spcPts val="0"/>
+              </a:spcBef>
+              <a:spcAft>
+                <a:spcPts val="0"/>
+              </a:spcAft>
+            </a:pPr>
+            <a:r>
+              <a:rPr sz="900"/>
+              <a:t>High </a:t>
+            </a:r>
+            <a:r>
+              <a:rPr sz="900" i="1">
+                <a:latin typeface="Cambria Math"/>
+              </a:rPr>
+              <a:t>ρ</a:t>
+            </a:r>
+            <a:r>
+              <a:rPr sz="900"/>
+              <a:t>: assortative matching — peer environments concentrate; inverted-</a:t>
+            </a:r>
+            <a:r>
+              <a:rPr sz="900" i="1">
+                <a:latin typeface="Cambria Math"/>
+              </a:rPr>
+              <a:t>U</a:t>
+            </a:r>
+            <a:r>
+              <a:rPr sz="900"/>
+              <a:t> emerges.</a:t>
+            </a:r>
+          </a:p>
+          <a:p>
+            <a:pPr>
+              <a:spcBef>
+                <a:spcPts val="0"/>
+              </a:spcBef>
+              <a:spcAft>
+                <a:spcPts val="0"/>
+              </a:spcAft>
+            </a:pPr>
+            <a:r>
+              <a:rPr sz="900"/>
+              <a:t>Sort-and-chop arm omitted from plot (still in CSV bundle; toggle restores it).</a:t>
+            </a:r>
+          </a:p>
+        </p:txBody>
+      </p:sp>
+      <p:sp>
+        <p:nvSpPr>
+          <p:cNvPr id="6" name="TextBox 5"/>
+          <p:cNvSpPr txBox="1"/>
+          <p:nvPr/>
+        </p:nvSpPr>
+        <p:spPr>
+          <a:xfrm>
+            <a:off x="411480" y="5586984"/>
+            <a:ext cx="11368735" cy="347472"/>
+          </a:xfrm>
+          <a:prstGeom prst="rect">
+            <a:avLst/>
+          </a:prstGeom>
+          <a:noFill/>
+        </p:spPr>
+        <p:txBody>
+          <a:bodyPr wrap="none">
+            <a:spAutoFit/>
+          </a:bodyPr>
+          <a:lstStyle/>
+          <a:p>
+            <a:pPr algn="l"/>
+            <a:r>
+              <a:rPr sz="1000"/>
+              <a:t>Why </a:t>
+            </a:r>
+            <a:r>
+              <a:rPr sz="1000" i="1">
+                <a:latin typeface="Cambria Math"/>
+              </a:rPr>
+              <a:t>ρ</a:t>
+            </a:r>
+            <a:r>
+              <a:rPr sz="1000"/>
+              <a:t> matters here: assignment assortativity sets how spread out team </a:t>
+            </a:r>
+            <a:r>
+              <a:rPr sz="1000" i="1">
+                <a:latin typeface="Cambria Math"/>
+              </a:rPr>
+              <a:t>L</a:t>
+            </a:r>
+            <a:r>
+              <a:rPr sz="800" i="1" baseline="-25000">
+                <a:latin typeface="Cambria Math"/>
+              </a:rPr>
+              <a:t>C</a:t>
+            </a:r>
+            <a:r>
+              <a:rPr sz="1000"/>
+              <a:t> is across the league — at </a:t>
+            </a:r>
+            <a:r>
+              <a:rPr sz="1000" i="1">
+                <a:latin typeface="Cambria Math"/>
+              </a:rPr>
+              <a:t>ρ ≈ 0</a:t>
+            </a:r>
+            <a:r>
+              <a:rPr sz="1000"/>
+              <a:t> (arm </a:t>
+            </a:r>
+            <a:r>
+              <a:rPr sz="1000" i="1">
+                <a:latin typeface="Cambria Math"/>
+              </a:rPr>
+              <a:t>0.001</a:t>
+            </a:r>
+            <a:r>
+              <a:rPr sz="1000"/>
+              <a:t>) rosters mix and peer pressure looks the same everywhere; at high </a:t>
+            </a:r>
+            <a:r>
+              <a:rPr sz="1000" i="1">
+                <a:latin typeface="Cambria Math"/>
+              </a:rPr>
+              <a:t>ρ</a:t>
+            </a:r>
+            <a:r>
+              <a:rPr sz="1000"/>
+              <a:t> weak teams pile up near </a:t>
+            </a:r>
+            <a:r>
+              <a:rPr sz="1000" i="1">
+                <a:latin typeface="Cambria Math"/>
+              </a:rPr>
+              <a:t>L</a:t>
+            </a:r>
+            <a:r>
+              <a:rPr sz="800" i="1" baseline="-25000">
+                <a:latin typeface="Cambria Math"/>
+              </a:rPr>
+              <a:t>C</a:t>
+            </a:r>
+            <a:r>
+              <a:rPr sz="1000" i="1">
+                <a:latin typeface="Cambria Math"/>
+              </a:rPr>
+              <a:t> ≈ 0</a:t>
+            </a:r>
+            <a:r>
+              <a:rPr sz="1000"/>
+              <a:t> while elite rosters face real congestion.</a:t>
+            </a:r>
+          </a:p>
+        </p:txBody>
+      </p:sp>
+      <p:sp>
+        <p:nvSpPr>
+          <p:cNvPr id="7" name="TextBox 6"/>
+          <p:cNvSpPr txBox="1"/>
+          <p:nvPr/>
+        </p:nvSpPr>
+        <p:spPr>
+          <a:xfrm>
+            <a:off x="411480" y="5971032"/>
+            <a:ext cx="11368735" cy="475488"/>
+          </a:xfrm>
+          <a:prstGeom prst="rect">
+            <a:avLst/>
+          </a:prstGeom>
+          <a:noFill/>
+        </p:spPr>
+        <p:txBody>
+          <a:bodyPr wrap="none">
+            <a:spAutoFit/>
+          </a:bodyPr>
+          <a:lstStyle/>
+          <a:p>
+            <a:pPr algn="l">
+              <a:defRPr b="1"/>
+            </a:pPr>
+            <a:r>
+              <a:rPr sz="1100"/>
+              <a:t>Claim: at fixed score and top-</a:t>
+            </a:r>
+            <a:r>
+              <a:rPr sz="1100" i="1">
+                <a:latin typeface="Cambria Math"/>
+              </a:rPr>
+              <a:t>K</a:t>
+            </a:r>
+            <a:r>
+              <a:rPr sz="1100"/>
+              <a:t>, </a:t>
+            </a:r>
+            <a:r>
+              <a:rPr sz="1100" i="1">
+                <a:latin typeface="Cambria Math"/>
+              </a:rPr>
+              <a:t>ρ</a:t>
+            </a:r>
+            <a:r>
+              <a:rPr sz="1100"/>
+              <a:t> in assignment matters — low-</a:t>
+            </a:r>
+            <a:r>
+              <a:rPr sz="1100" i="1">
+                <a:latin typeface="Cambria Math"/>
+              </a:rPr>
+              <a:t>ρ</a:t>
+            </a:r>
+            <a:r>
+              <a:rPr sz="1100"/>
+              <a:t> mixing yields a nearly flat curve; high-</a:t>
+            </a:r>
+            <a:r>
+              <a:rPr sz="1100" i="1">
+                <a:latin typeface="Cambria Math"/>
+              </a:rPr>
+              <a:t>ρ</a:t>
+            </a:r>
+            <a:r>
+              <a:rPr sz="1100"/>
+              <a:t> assortativity delivers the peer-pressure inverted-</a:t>
+            </a:r>
+            <a:r>
+              <a:rPr sz="1100" i="1">
+                <a:latin typeface="Cambria Math"/>
+              </a:rPr>
+              <a:t>U</a:t>
+            </a:r>
+            <a:r>
+              <a:rPr sz="1100"/>
+              <a:t> readout.</a:t>
+            </a:r>
+          </a:p>
+        </p:txBody>
+      </p:sp>
+    </p:spTree>
+  </p:cSld>
+  <p:clrMapOvr>
+    <a:masterClrMapping/>
+  </p:clrMapOvr>
+</p:sld>
+</file>
+
+<file path=ppt/slides/slide5.xml><?xml version="1.0" encoding="utf-8"?>
+<p:sld xmlns:a="http://schemas.openxmlformats.org/drawingml/2006/main" xmlns:p="http://schemas.openxmlformats.org/presentationml/2006/main" xmlns:r="http://schemas.openxmlformats.org/officeDocument/2006/relationships">
+  <p:cSld>
+    <p:spTree>
+      <p:nvGrpSpPr>
+        <p:cNvPr id="1" name=""/>
+        <p:cNvGrpSpPr/>
+        <p:nvPr/>
+      </p:nvGrpSpPr>
+      <p:grpSpPr/>
+      <p:sp>
+        <p:nvSpPr>
+          <p:cNvPr id="2" name="TextBox 1"/>
+          <p:cNvSpPr txBox="1"/>
+          <p:nvPr/>
+        </p:nvSpPr>
+        <p:spPr>
+          <a:xfrm>
+            <a:off x="320040" y="146304"/>
+            <a:ext cx="11551615" cy="475488"/>
+          </a:xfrm>
+          <a:prstGeom prst="rect">
+            <a:avLst/>
+          </a:prstGeom>
+          <a:noFill/>
+        </p:spPr>
+        <p:txBody>
+          <a:bodyPr wrap="square">
+            <a:spAutoFit/>
+          </a:bodyPr>
+          <a:lstStyle/>
+          <a:p>
+            <a:pPr>
+              <a:defRPr b="1"/>
+            </a:pPr>
+            <a:r>
+              <a:rPr sz="1600"/>
+              <a:t>Phase B — Team </a:t>
+            </a:r>
+            <a:r>
+              <a:rPr sz="1600" i="1">
+                <a:latin typeface="Cambria Math"/>
+              </a:rPr>
+              <a:t>L</a:t>
+            </a:r>
+            <a:r>
+              <a:rPr sz="1400" i="1" baseline="-25000">
+                <a:latin typeface="Cambria Math"/>
+              </a:rPr>
+              <a:t>C</a:t>
+            </a:r>
+            <a:r>
+              <a:rPr sz="1600"/>
+              <a:t> vs </a:t>
+            </a:r>
+            <a:r>
+              <a:rPr sz="1600" i="1">
+                <a:latin typeface="Cambria Math"/>
+              </a:rPr>
+              <a:t>ρ</a:t>
+            </a:r>
+            <a:r>
+              <a:rPr sz="1600"/>
+              <a:t> (PD16 Sketch A) -- How Congestion alone (</a:t>
+            </a:r>
+            <a:r>
+              <a:rPr sz="1600" i="1">
+                <a:latin typeface="Cambria Math"/>
+              </a:rPr>
+              <a:t>L</a:t>
+            </a:r>
+            <a:r>
+              <a:rPr sz="1400" i="1" baseline="-25000">
+                <a:latin typeface="Cambria Math"/>
+              </a:rPr>
+              <a:t>C</a:t>
+            </a:r>
+            <a:r>
+              <a:rPr sz="1600"/>
+              <a:t>) varies with change in </a:t>
+            </a:r>
+            <a:r>
+              <a:rPr sz="1600" i="1">
+                <a:latin typeface="Cambria Math"/>
+              </a:rPr>
+              <a:t>ρ</a:t>
+            </a:r>
+          </a:p>
+        </p:txBody>
+      </p:sp>
+      <p:sp>
+        <p:nvSpPr>
+          <p:cNvPr id="3" name="TextBox 2"/>
+          <p:cNvSpPr txBox="1"/>
+          <p:nvPr/>
+        </p:nvSpPr>
+        <p:spPr>
+          <a:xfrm>
+            <a:off x="320040" y="640080"/>
+            <a:ext cx="11551615" cy="237744"/>
+          </a:xfrm>
+          <a:prstGeom prst="rect">
+            <a:avLst/>
+          </a:prstGeom>
+          <a:noFill/>
+        </p:spPr>
+        <p:txBody>
+          <a:bodyPr wrap="none">
+            <a:spAutoFit/>
+          </a:bodyPr>
+          <a:lstStyle/>
+          <a:p>
+            <a:r>
+              <a:rPr sz="900"/>
+              <a:t>PD16: team </a:t>
+            </a:r>
+            <a:r>
+              <a:rPr sz="900" i="1">
+                <a:latin typeface="Cambria Math"/>
+              </a:rPr>
+              <a:t>L</a:t>
+            </a:r>
+            <a:r>
+              <a:rPr sz="800" i="1" baseline="-25000">
+                <a:latin typeface="Cambria Math"/>
+              </a:rPr>
+              <a:t>C</a:t>
+            </a:r>
+            <a:r>
+              <a:rPr sz="900"/>
+              <a:t>; </a:t>
+            </a:r>
+            <a:r>
+              <a:rPr sz="900" i="1">
+                <a:latin typeface="Cambria Math"/>
+              </a:rPr>
+              <a:t>\theta</a:t>
+            </a:r>
+            <a:r>
+              <a:rPr sz="900"/>
+              <a:t> = 0.804 (naive draft); suffix=_pd16 · 48 bins · 350 teams · seed 42</a:t>
+            </a:r>
+          </a:p>
+        </p:txBody>
+      </p:sp>
+      <p:pic>
+        <p:nvPicPr>
+          <p:cNvPr id="4" name="Picture 3" descr="image.png"/>
+          <p:cNvPicPr>
+            <a:picLocks noChangeAspect="1"/>
+          </p:cNvPicPr>
+          <p:nvPr/>
+        </p:nvPicPr>
+        <p:blipFill>
+          <a:blip r:embed="rId2"/>
+          <a:stretch>
+            <a:fillRect/>
+          </a:stretch>
+        </p:blipFill>
+        <p:spPr>
+          <a:xfrm>
+            <a:off x="320040" y="2709049376445"/>
+            <a:ext cx="11551615" cy="6539909"/>
+          </a:xfrm>
+          <a:prstGeom prst="rect">
+            <a:avLst/>
+          </a:prstGeom>
+        </p:spPr>
+      </p:pic>
+      <p:sp>
+        <p:nvSpPr>
+          <p:cNvPr id="5" name="TextBox 4"/>
+          <p:cNvSpPr txBox="1"/>
+          <p:nvPr/>
+        </p:nvSpPr>
+        <p:spPr>
+          <a:xfrm>
+            <a:off x="320040" y="4648868121600"/>
+            <a:ext cx="3728618" cy="658368"/>
+          </a:xfrm>
+          <a:prstGeom prst="rect">
+            <a:avLst/>
+          </a:prstGeom>
+          <a:noFill/>
+        </p:spPr>
+        <p:txBody>
+          <a:bodyPr wrap="square">
+            <a:spAutoFit/>
+          </a:bodyPr>
+          <a:lstStyle/>
+          <a:p>
+            <a:r>
+              <a:rPr sz="900"/>
+              <a:t>low </a:t>
+            </a:r>
+            <a:r>
+              <a:rPr sz="900" i="1">
+                <a:latin typeface="Cambria Math"/>
+              </a:rPr>
+              <a:t>ρ</a:t>
+            </a:r>
+            <a:r>
+              <a:rPr sz="900"/>
+              <a:t> = one narrow spike near </a:t>
+            </a:r>
+            <a:r>
+              <a:rPr sz="900" i="1">
+                <a:latin typeface="Cambria Math"/>
+              </a:rPr>
+              <a:t>L</a:t>
+            </a:r>
+            <a:r>
+              <a:rPr sz="800" i="1" baseline="-25000">
+                <a:latin typeface="Cambria Math"/>
+              </a:rPr>
+              <a:t>C</a:t>
+            </a:r>
+            <a:r>
+              <a:rPr sz="900" i="1">
+                <a:latin typeface="Cambria Math"/>
+              </a:rPr>
+              <a:t>≈ 0.15</a:t>
+            </a:r>
+            <a:r>
+              <a:rPr sz="900"/>
+              <a:t>. First 3 panels</a:t>
+            </a:r>
+          </a:p>
+        </p:txBody>
+      </p:sp>
+      <p:sp>
+        <p:nvSpPr>
+          <p:cNvPr id="6" name="TextBox 5"/>
+          <p:cNvSpPr txBox="1"/>
+          <p:nvPr/>
+        </p:nvSpPr>
+        <p:spPr>
+          <a:xfrm>
+            <a:off x="4231538" y="4648868121600"/>
+            <a:ext cx="3728618" cy="658368"/>
+          </a:xfrm>
+          <a:prstGeom prst="rect">
+            <a:avLst/>
+          </a:prstGeom>
+          <a:noFill/>
+        </p:spPr>
+        <p:txBody>
+          <a:bodyPr wrap="square">
+            <a:spAutoFit/>
+          </a:bodyPr>
+          <a:lstStyle/>
+          <a:p>
+            <a:r>
+              <a:rPr sz="900"/>
+              <a:t>High </a:t>
+            </a:r>
+            <a:r>
+              <a:rPr sz="900" i="1">
+                <a:latin typeface="Cambria Math"/>
+              </a:rPr>
+              <a:t>ρ</a:t>
+            </a:r>
+            <a:r>
+              <a:rPr sz="900"/>
+              <a:t> = mass at </a:t>
+            </a:r>
+            <a:r>
+              <a:rPr sz="900" i="1">
+                <a:latin typeface="Cambria Math"/>
+              </a:rPr>
+              <a:t>L</a:t>
+            </a:r>
+            <a:r>
+              <a:rPr sz="800" i="1" baseline="-25000">
+                <a:latin typeface="Cambria Math"/>
+              </a:rPr>
+              <a:t>C</a:t>
+            </a:r>
+            <a:r>
+              <a:rPr sz="900" i="1">
+                <a:latin typeface="Cambria Math"/>
+              </a:rPr>
+              <a:t>≈ 0</a:t>
+            </a:r>
+            <a:r>
+              <a:rPr sz="900"/>
+              <a:t> (weak rosters) + second hump at elite </a:t>
+            </a:r>
+            <a:r>
+              <a:rPr sz="900" i="1">
+                <a:latin typeface="Cambria Math"/>
+              </a:rPr>
+              <a:t>L</a:t>
+            </a:r>
+            <a:r>
+              <a:rPr sz="800" i="1" baseline="-25000">
+                <a:latin typeface="Cambria Math"/>
+              </a:rPr>
+              <a:t>C</a:t>
+            </a:r>
+          </a:p>
+        </p:txBody>
+      </p:sp>
+      <p:sp>
+        <p:nvSpPr>
+          <p:cNvPr id="7" name="TextBox 6"/>
+          <p:cNvSpPr txBox="1"/>
+          <p:nvPr/>
+        </p:nvSpPr>
+        <p:spPr>
+          <a:xfrm>
+            <a:off x="8143036" y="4648868121600"/>
+            <a:ext cx="3728618" cy="658368"/>
+          </a:xfrm>
+          <a:prstGeom prst="rect">
+            <a:avLst/>
+          </a:prstGeom>
+          <a:noFill/>
+        </p:spPr>
+        <p:txBody>
+          <a:bodyPr wrap="square">
+            <a:spAutoFit/>
+          </a:bodyPr>
+          <a:lstStyle/>
+          <a:p>
+            <a:r>
+              <a:rPr sz="900"/>
+              <a:t>At </a:t>
+            </a:r>
+            <a:r>
+              <a:rPr sz="900" i="1">
+                <a:latin typeface="Cambria Math"/>
+              </a:rPr>
+              <a:t>ρ=32</a:t>
+            </a:r>
+            <a:r>
+              <a:rPr sz="900"/>
+              <a:t>: </a:t>
+            </a:r>
+            <a:r>
+              <a:rPr sz="900" i="1">
+                <a:latin typeface="Cambria Math"/>
+              </a:rPr>
+              <a:t>48\%</a:t>
+            </a:r>
+            <a:r>
+              <a:rPr sz="900"/>
+              <a:t> of teams below </a:t>
+            </a:r>
+            <a:r>
+              <a:rPr sz="900" i="1">
+                <a:latin typeface="Cambria Math"/>
+              </a:rPr>
+              <a:t>L</a:t>
+            </a:r>
+            <a:r>
+              <a:rPr sz="800" i="1" baseline="-25000">
+                <a:latin typeface="Cambria Math"/>
+              </a:rPr>
+              <a:t>C</a:t>
+            </a:r>
+            <a:r>
+              <a:rPr sz="900" i="1">
+                <a:latin typeface="Cambria Math"/>
+              </a:rPr>
+              <a:t>=0.05</a:t>
+            </a:r>
+            <a:r>
+              <a:rPr sz="900"/>
+              <a:t> - weak rosters - almost no peer pressure.</a:t>
+            </a:r>
+          </a:p>
+        </p:txBody>
+      </p:sp>
+      <p:sp>
+        <p:nvSpPr>
+          <p:cNvPr id="8" name="TextBox 7"/>
+          <p:cNvSpPr txBox="1"/>
+          <p:nvPr/>
+        </p:nvSpPr>
+        <p:spPr>
+          <a:xfrm>
+            <a:off x="320040" y="5292686188800"/>
+            <a:ext cx="6353388" cy="256032"/>
+          </a:xfrm>
+          <a:prstGeom prst="rect">
+            <a:avLst/>
+          </a:prstGeom>
+          <a:noFill/>
+        </p:spPr>
+        <p:txBody>
+          <a:bodyPr wrap="none">
+            <a:spAutoFit/>
+          </a:bodyPr>
+          <a:lstStyle/>
+          <a:p>
+            <a:pPr>
+              <a:defRPr b="1"/>
+            </a:pPr>
+            <a:r>
+              <a:rPr sz="900"/>
+              <a:t>Of Note: The mean </a:t>
+            </a:r>
+            <a:r>
+              <a:rPr sz="900" i="1">
+                <a:latin typeface="Cambria Math"/>
+              </a:rPr>
+              <a:t>L</a:t>
+            </a:r>
+            <a:r>
+              <a:rPr sz="800" i="1" baseline="-25000">
+                <a:latin typeface="Cambria Math"/>
+              </a:rPr>
+              <a:t>C</a:t>
+            </a:r>
+            <a:r>
+              <a:rPr sz="900"/>
+              <a:t> is almost identical for all plots, hovering </a:t>
+            </a:r>
+            <a:r>
+              <a:rPr sz="900" i="1">
+                <a:latin typeface="Cambria Math"/>
+              </a:rPr>
+              <a:t>≈ .15</a:t>
+            </a:r>
+          </a:p>
+        </p:txBody>
+      </p:sp>
+      <p:sp>
+        <p:nvSpPr>
+          <p:cNvPr id="9" name="TextBox 8"/>
+          <p:cNvSpPr txBox="1"/>
+          <p:nvPr/>
+        </p:nvSpPr>
+        <p:spPr>
+          <a:xfrm>
+            <a:off x="320040" y="6080760"/>
+            <a:ext cx="11551615" cy="457200"/>
+          </a:xfrm>
+          <a:prstGeom prst="rect">
+            <a:avLst/>
+          </a:prstGeom>
+          <a:noFill/>
+        </p:spPr>
+        <p:txBody>
+          <a:bodyPr wrap="none">
+            <a:spAutoFit/>
+          </a:bodyPr>
+          <a:lstStyle/>
+          <a:p>
+            <a:pPr algn="l">
+              <a:defRPr b="1"/>
+            </a:pPr>
+            <a:r>
+              <a:rPr sz="1000"/>
+              <a:t>Claim: </a:t>
+            </a:r>
+            <a:r>
+              <a:rPr sz="1000" i="1">
+                <a:latin typeface="Cambria Math"/>
+              </a:rPr>
+              <a:t>ρ</a:t>
+            </a:r>
+            <a:r>
+              <a:rPr sz="1000"/>
+              <a:t> stratifies team congestion across the league — low-</a:t>
+            </a:r>
+            <a:r>
+              <a:rPr sz="1000" i="1">
+                <a:latin typeface="Cambria Math"/>
+              </a:rPr>
+              <a:t>ρ</a:t>
+            </a:r>
+            <a:r>
+              <a:rPr sz="1000"/>
+              <a:t> mixing yields one narrow </a:t>
+            </a:r>
+            <a:r>
+              <a:rPr sz="1000" i="1">
+                <a:latin typeface="Cambria Math"/>
+              </a:rPr>
+              <a:t>L</a:t>
+            </a:r>
+            <a:r>
+              <a:rPr sz="800" i="1" baseline="-25000">
+                <a:latin typeface="Cambria Math"/>
+              </a:rPr>
+              <a:t>C</a:t>
+            </a:r>
+            <a:r>
+              <a:rPr sz="1000"/>
+              <a:t> hump; high-</a:t>
+            </a:r>
+            <a:r>
+              <a:rPr sz="1000" i="1">
+                <a:latin typeface="Cambria Math"/>
+              </a:rPr>
+              <a:t>ρ</a:t>
+            </a:r>
+            <a:r>
+              <a:rPr sz="1000"/>
+              <a:t> assortativity piles weak teams at </a:t>
+            </a:r>
+            <a:r>
+              <a:rPr sz="1000" i="1">
+                <a:latin typeface="Cambria Math"/>
+              </a:rPr>
+              <a:t>L</a:t>
+            </a:r>
+            <a:r>
+              <a:rPr sz="800" i="1" baseline="-25000">
+                <a:latin typeface="Cambria Math"/>
+              </a:rPr>
+              <a:t>C</a:t>
+            </a:r>
+            <a:r>
+              <a:rPr sz="1000" i="1">
+                <a:latin typeface="Cambria Math"/>
+              </a:rPr>
+              <a:t>≈ 0</a:t>
+            </a:r>
+            <a:r>
+              <a:rPr sz="1000"/>
+              <a:t> and elite rosters at higher </a:t>
+            </a:r>
+            <a:r>
+              <a:rPr sz="1000" i="1">
+                <a:latin typeface="Cambria Math"/>
+              </a:rPr>
+              <a:t>L</a:t>
+            </a:r>
+            <a:r>
+              <a:rPr sz="800" i="1" baseline="-25000">
+                <a:latin typeface="Cambria Math"/>
+              </a:rPr>
+              <a:t>C</a:t>
+            </a:r>
+            <a:r>
+              <a:rPr sz="1000"/>
+              <a:t>.</a:t>
+            </a:r>
+          </a:p>
+        </p:txBody>
+      </p:sp>
+    </p:spTree>
+  </p:cSld>
+  <p:clrMapOvr>
+    <a:masterClrMapping/>
+  </p:clrMapOvr>
+</p:sld>
+</file>
+
+<file path=ppt/slides/slide6.xml><?xml version="1.0" encoding="utf-8"?>
+<p:sld xmlns:a="http://schemas.openxmlformats.org/drawingml/2006/main" xmlns:p="http://schemas.openxmlformats.org/presentationml/2006/main" xmlns:r="http://schemas.openxmlformats.org/officeDocument/2006/relationships">
+  <p:cSld>
+    <p:spTree>
+      <p:nvGrpSpPr>
+        <p:cNvPr id="1" name=""/>
+        <p:cNvGrpSpPr/>
+        <p:nvPr/>
+      </p:nvGrpSpPr>
+      <p:grpSpPr/>
+      <p:sp>
+        <p:nvSpPr>
+          <p:cNvPr id="2" name="TextBox 1"/>
+          <p:cNvSpPr txBox="1"/>
+          <p:nvPr/>
+        </p:nvSpPr>
+        <p:spPr>
+          <a:xfrm>
+            <a:off x="320040" y="146304"/>
+            <a:ext cx="11551615" cy="475488"/>
+          </a:xfrm>
+          <a:prstGeom prst="rect">
+            <a:avLst/>
+          </a:prstGeom>
+          <a:noFill/>
+        </p:spPr>
+        <p:txBody>
+          <a:bodyPr wrap="square">
+            <a:spAutoFit/>
+          </a:bodyPr>
+          <a:lstStyle/>
+          <a:p>
+            <a:pPr>
+              <a:defRPr b="1"/>
+            </a:pPr>
+            <a:r>
+              <a:rPr sz="1600"/>
+              <a:t>Phase B — Realized </a:t>
+            </a:r>
+            <a:r>
+              <a:rPr sz="1600" i="1">
+                <a:latin typeface="Cambria Math"/>
+              </a:rPr>
+              <a:t>T</a:t>
+            </a:r>
+            <a:r>
+              <a:rPr sz="1400" i="1" baseline="-25000">
+                <a:latin typeface="Cambria Math"/>
+              </a:rPr>
+              <a:t>j</a:t>
+            </a:r>
+            <a:r>
+              <a:rPr sz="1600"/>
+              <a:t> vs </a:t>
+            </a:r>
+            <a:r>
+              <a:rPr sz="1600" i="1">
+                <a:latin typeface="Cambria Math"/>
+              </a:rPr>
+              <a:t>L</a:t>
+            </a:r>
+            <a:r>
+              <a:rPr sz="1400" i="1" baseline="-25000">
+                <a:latin typeface="Cambria Math"/>
+              </a:rPr>
+              <a:t>C</a:t>
+            </a:r>
+            <a:r>
+              <a:rPr sz="1600"/>
+              <a:t> (PD16 Sketch A — co-movement) -- Team talent </a:t>
+            </a:r>
+            <a:r>
+              <a:rPr sz="1600" i="1">
+                <a:latin typeface="Cambria Math"/>
+              </a:rPr>
+              <a:t>T</a:t>
+            </a:r>
+            <a:r>
+              <a:rPr sz="1400" i="1" baseline="-25000">
+                <a:latin typeface="Cambria Math"/>
+              </a:rPr>
+              <a:t>j</a:t>
+            </a:r>
+            <a:r>
+              <a:rPr sz="1600"/>
+              <a:t> vs congestion (</a:t>
+            </a:r>
+            <a:r>
+              <a:rPr sz="1600" i="1">
+                <a:latin typeface="Cambria Math"/>
+              </a:rPr>
+              <a:t>L</a:t>
+            </a:r>
+            <a:r>
+              <a:rPr sz="1400" i="1" baseline="-25000">
+                <a:latin typeface="Cambria Math"/>
+              </a:rPr>
+              <a:t>C</a:t>
+            </a:r>
+            <a:r>
+              <a:rPr sz="1600"/>
+              <a:t>) as </a:t>
+            </a:r>
+            <a:r>
+              <a:rPr sz="1600" i="1">
+                <a:latin typeface="Cambria Math"/>
+              </a:rPr>
+              <a:t>ρ</a:t>
+            </a:r>
+            <a:r>
+              <a:rPr sz="1600"/>
+              <a:t> varies.</a:t>
+            </a:r>
+          </a:p>
+        </p:txBody>
+      </p:sp>
+      <p:sp>
+        <p:nvSpPr>
+          <p:cNvPr id="3" name="TextBox 2"/>
+          <p:cNvSpPr txBox="1"/>
+          <p:nvPr/>
+        </p:nvSpPr>
+        <p:spPr>
+          <a:xfrm>
+            <a:off x="320040" y="640080"/>
+            <a:ext cx="11551615" cy="237744"/>
+          </a:xfrm>
+          <a:prstGeom prst="rect">
+            <a:avLst/>
+          </a:prstGeom>
+          <a:noFill/>
+        </p:spPr>
+        <p:txBody>
+          <a:bodyPr wrap="none">
+            <a:spAutoFit/>
+          </a:bodyPr>
+          <a:lstStyle/>
+          <a:p>
+            <a:r>
+              <a:rPr sz="900"/>
+              <a:t>PD16: team </a:t>
+            </a:r>
+            <a:r>
+              <a:rPr sz="900" i="1">
+                <a:latin typeface="Cambria Math"/>
+              </a:rPr>
+              <a:t>L</a:t>
+            </a:r>
+            <a:r>
+              <a:rPr sz="800" i="1" baseline="-25000">
+                <a:latin typeface="Cambria Math"/>
+              </a:rPr>
+              <a:t>C</a:t>
+            </a:r>
+            <a:r>
+              <a:rPr sz="900"/>
+              <a:t>; </a:t>
+            </a:r>
+            <a:r>
+              <a:rPr sz="900" i="1">
+                <a:latin typeface="Cambria Math"/>
+              </a:rPr>
+              <a:t>\theta</a:t>
+            </a:r>
+            <a:r>
+              <a:rPr sz="900"/>
+              <a:t> = 0.804 (naive draft); suffix=_pd16 · 48 bins · 350 teams · seed 42</a:t>
+            </a:r>
+          </a:p>
+        </p:txBody>
+      </p:sp>
+      <p:sp>
+        <p:nvSpPr>
+          <p:cNvPr id="4" name="TextBox 3"/>
+          <p:cNvSpPr txBox="1"/>
+          <p:nvPr/>
+        </p:nvSpPr>
+        <p:spPr>
+          <a:xfrm>
+            <a:off x="320040" y="819404812800"/>
+            <a:ext cx="2880360" cy="4673951942400"/>
+          </a:xfrm>
+          <a:prstGeom prst="rect">
+            <a:avLst/>
+          </a:prstGeom>
+          <a:noFill/>
+        </p:spPr>
+        <p:txBody>
+          <a:bodyPr wrap="square">
+            <a:spAutoFit/>
+          </a:bodyPr>
+          <a:lstStyle/>
+          <a:p>
+            <a:pPr>
+              <a:spcBef>
+                <a:spcPts val="0"/>
+              </a:spcBef>
+              <a:spcAft>
+                <a:spcPts val="0"/>
+              </a:spcAft>
+            </a:pPr>
+            <a:r>
+              <a:rPr sz="900"/>
+              <a:t>Each cell: # teams at (realized </a:t>
+            </a:r>
+            <a:r>
+              <a:rPr sz="900" i="1">
+                <a:latin typeface="Cambria Math"/>
+              </a:rPr>
+              <a:t>T</a:t>
+            </a:r>
+            <a:r>
+              <a:rPr sz="800" i="1" baseline="-25000">
+                <a:latin typeface="Cambria Math"/>
+              </a:rPr>
+              <a:t>j</a:t>
+            </a:r>
+            <a:r>
+              <a:rPr sz="900"/>
+              <a:t>, team </a:t>
+            </a:r>
+            <a:r>
+              <a:rPr sz="900" i="1">
+                <a:latin typeface="Cambria Math"/>
+              </a:rPr>
+              <a:t>L</a:t>
+            </a:r>
+            <a:r>
+              <a:rPr sz="800" i="1" baseline="-25000">
+                <a:latin typeface="Cambria Math"/>
+              </a:rPr>
+              <a:t>C</a:t>
+            </a:r>
+            <a:r>
+              <a:rPr sz="900"/>
+              <a:t>).</a:t>
+            </a:r>
+          </a:p>
+          <a:p>
+            <a:pPr>
+              <a:spcBef>
+                <a:spcPts val="0"/>
+              </a:spcBef>
+              <a:spcAft>
+                <a:spcPts val="0"/>
+              </a:spcAft>
+            </a:pPr>
+            <a:r>
+              <a:rPr sz="900"/>
+              <a:t>Color = count.</a:t>
+            </a:r>
+          </a:p>
+          <a:p>
+            <a:pPr>
+              <a:spcBef>
+                <a:spcPts val="0"/>
+              </a:spcBef>
+              <a:spcAft>
+                <a:spcPts val="0"/>
+              </a:spcAft>
+            </a:pPr>
+            <a:r>
+              <a:rPr sz="900"/>
+              <a:t>Low </a:t>
+            </a:r>
+            <a:r>
+              <a:rPr sz="900" i="1">
+                <a:latin typeface="Cambria Math"/>
+              </a:rPr>
+              <a:t>ρ</a:t>
+            </a:r>
+            <a:r>
+              <a:rPr sz="900"/>
+              <a:t>: compact blob — </a:t>
+            </a:r>
+            <a:r>
+              <a:rPr sz="900" i="1">
+                <a:latin typeface="Cambria Math"/>
+              </a:rPr>
+              <a:t>T</a:t>
+            </a:r>
+            <a:r>
+              <a:rPr sz="800" i="1" baseline="-25000">
+                <a:latin typeface="Cambria Math"/>
+              </a:rPr>
+              <a:t>j</a:t>
+            </a:r>
+            <a:r>
+              <a:rPr sz="900"/>
+              <a:t> and congestion barely co-vary.</a:t>
+            </a:r>
+          </a:p>
+          <a:p>
+            <a:pPr>
+              <a:spcBef>
+                <a:spcPts val="0"/>
+              </a:spcBef>
+              <a:spcAft>
+                <a:spcPts val="0"/>
+              </a:spcAft>
+            </a:pPr>
+            <a:r>
+              <a:rPr sz="900"/>
+              <a:t>High </a:t>
+            </a:r>
+            <a:r>
+              <a:rPr sz="900" i="1">
+                <a:latin typeface="Cambria Math"/>
+              </a:rPr>
+              <a:t>ρ</a:t>
+            </a:r>
+            <a:r>
+              <a:rPr sz="900"/>
+              <a:t>: upward tail — as </a:t>
+            </a:r>
+            <a:r>
+              <a:rPr sz="900" i="1">
+                <a:latin typeface="Cambria Math"/>
+              </a:rPr>
+              <a:t>T</a:t>
+            </a:r>
+            <a:r>
+              <a:rPr sz="800" i="1" baseline="-25000">
+                <a:latin typeface="Cambria Math"/>
+              </a:rPr>
+              <a:t>j</a:t>
+            </a:r>
+            <a:r>
+              <a:rPr sz="900"/>
+              <a:t> rises, </a:t>
+            </a:r>
+            <a:r>
+              <a:rPr sz="900" i="1">
+                <a:latin typeface="Cambria Math"/>
+              </a:rPr>
+              <a:t>L</a:t>
+            </a:r>
+            <a:r>
+              <a:rPr sz="800" i="1" baseline="-25000">
+                <a:latin typeface="Cambria Math"/>
+              </a:rPr>
+              <a:t>C</a:t>
+            </a:r>
+            <a:r>
+              <a:rPr sz="900"/>
+              <a:t> rises.</a:t>
+            </a:r>
+          </a:p>
+          <a:p>
+            <a:pPr>
+              <a:spcBef>
+                <a:spcPts val="0"/>
+              </a:spcBef>
+              <a:spcAft>
+                <a:spcPts val="0"/>
+              </a:spcAft>
+            </a:pPr>
+            <a:r>
+              <a:rPr sz="900"/>
+              <a:t>Weak rosters at high </a:t>
+            </a:r>
+            <a:r>
+              <a:rPr sz="900" i="1">
+                <a:latin typeface="Cambria Math"/>
+              </a:rPr>
+              <a:t>ρ</a:t>
+            </a:r>
+            <a:r>
+              <a:rPr sz="900"/>
+              <a:t>: low </a:t>
+            </a:r>
+            <a:r>
+              <a:rPr sz="900" i="1">
+                <a:latin typeface="Cambria Math"/>
+              </a:rPr>
+              <a:t>T</a:t>
+            </a:r>
+            <a:r>
+              <a:rPr sz="800" i="1" baseline="-25000">
+                <a:latin typeface="Cambria Math"/>
+              </a:rPr>
+              <a:t>j</a:t>
+            </a:r>
+            <a:r>
+              <a:rPr sz="900"/>
+              <a:t> + low </a:t>
+            </a:r>
+            <a:r>
+              <a:rPr sz="900" i="1">
+                <a:latin typeface="Cambria Math"/>
+              </a:rPr>
+              <a:t>L</a:t>
+            </a:r>
+            <a:r>
+              <a:rPr sz="800" i="1" baseline="-25000">
+                <a:latin typeface="Cambria Math"/>
+              </a:rPr>
+              <a:t>C</a:t>
+            </a:r>
+          </a:p>
+          <a:p>
+            <a:pPr>
+              <a:spcBef>
+                <a:spcPts val="0"/>
+              </a:spcBef>
+              <a:spcAft>
+                <a:spcPts val="0"/>
+              </a:spcAft>
+            </a:pPr>
+            <a:r>
+              <a:rPr sz="900"/>
+              <a:t>Elite rosters: high </a:t>
+            </a:r>
+            <a:r>
+              <a:rPr sz="900" i="1">
+                <a:latin typeface="Cambria Math"/>
+              </a:rPr>
+              <a:t>T</a:t>
+            </a:r>
+            <a:r>
+              <a:rPr sz="800" i="1" baseline="-25000">
+                <a:latin typeface="Cambria Math"/>
+              </a:rPr>
+              <a:t>j</a:t>
+            </a:r>
+            <a:r>
+              <a:rPr sz="900"/>
+              <a:t> + high </a:t>
+            </a:r>
+            <a:r>
+              <a:rPr sz="900" i="1">
+                <a:latin typeface="Cambria Math"/>
+              </a:rPr>
+              <a:t>L</a:t>
+            </a:r>
+            <a:r>
+              <a:rPr sz="800" i="1" baseline="-25000">
+                <a:latin typeface="Cambria Math"/>
+              </a:rPr>
+              <a:t>C</a:t>
+            </a:r>
+            <a:r>
+              <a:rPr sz="900"/>
+              <a:t>.</a:t>
+            </a:r>
+          </a:p>
+        </p:txBody>
+      </p:sp>
+      <p:pic>
+        <p:nvPicPr>
+          <p:cNvPr id="5" name="Picture 4" descr="image.png"/>
+          <p:cNvPicPr>
+            <a:picLocks noChangeAspect="1"/>
+          </p:cNvPicPr>
+          <p:nvPr/>
+        </p:nvPicPr>
+        <p:blipFill>
+          <a:blip r:embed="rId2"/>
+          <a:stretch>
+            <a:fillRect/>
+          </a:stretch>
+        </p:blipFill>
+        <p:spPr>
+          <a:xfrm>
+            <a:off x="3383280" y="3156378269873"/>
+            <a:ext cx="8488375" cy="5028254"/>
+          </a:xfrm>
+          <a:prstGeom prst="rect">
+            <a:avLst/>
+          </a:prstGeom>
+        </p:spPr>
+      </p:pic>
+      <p:sp>
+        <p:nvSpPr>
+          <p:cNvPr id="6" name="TextBox 5"/>
+          <p:cNvSpPr txBox="1"/>
+          <p:nvPr/>
+        </p:nvSpPr>
+        <p:spPr>
+          <a:xfrm>
+            <a:off x="320040" y="6080760"/>
+            <a:ext cx="11551615" cy="457200"/>
+          </a:xfrm>
+          <a:prstGeom prst="rect">
+            <a:avLst/>
+          </a:prstGeom>
+          <a:noFill/>
+        </p:spPr>
+        <p:txBody>
+          <a:bodyPr wrap="none">
+            <a:spAutoFit/>
+          </a:bodyPr>
+          <a:lstStyle/>
+          <a:p>
+            <a:pPr algn="l">
+              <a:defRPr b="1"/>
+            </a:pPr>
+            <a:r>
+              <a:rPr sz="1000"/>
+              <a:t>Claim: at high </a:t>
+            </a:r>
+            <a:r>
+              <a:rPr sz="1000" i="1">
+                <a:latin typeface="Cambria Math"/>
+              </a:rPr>
+              <a:t>ρ</a:t>
+            </a:r>
+            <a:r>
+              <a:rPr sz="1000"/>
+              <a:t>, better teams systematically face more peer pressure — the upward cloud in realized </a:t>
+            </a:r>
+            <a:r>
+              <a:rPr sz="1000" i="1">
+                <a:latin typeface="Cambria Math"/>
+              </a:rPr>
+              <a:t>T</a:t>
+            </a:r>
+            <a:r>
+              <a:rPr sz="800" i="1" baseline="-25000">
+                <a:latin typeface="Cambria Math"/>
+              </a:rPr>
+              <a:t>j</a:t>
+            </a:r>
+            <a:r>
+              <a:rPr sz="1000"/>
+              <a:t> vs </a:t>
+            </a:r>
+            <a:r>
+              <a:rPr sz="1000" i="1">
+                <a:latin typeface="Cambria Math"/>
+              </a:rPr>
+              <a:t>L</a:t>
+            </a:r>
+            <a:r>
+              <a:rPr sz="800" i="1" baseline="-25000">
+                <a:latin typeface="Cambria Math"/>
+              </a:rPr>
+              <a:t>C</a:t>
+            </a:r>
+            <a:r>
+              <a:rPr sz="1000"/>
+              <a:t>. That gives </a:t>
+            </a:r>
+            <a:r>
+              <a:rPr sz="1000" i="1">
+                <a:latin typeface="Cambria Math"/>
+              </a:rPr>
+              <a:t>ρ</a:t>
+            </a:r>
+            <a:r>
+              <a:rPr sz="1000"/>
+              <a:t> a model-internal read beyond “the Pass C selection plot moved.”</a:t>
+            </a:r>
+          </a:p>
+        </p:txBody>
+      </p:sp>
+    </p:spTree>
+  </p:cSld>
+  <p:clrMapOvr>
+    <a:masterClrMapping/>
+  </p:clrMapOvr>
+</p:sld>
+</file>
+
+<file path=ppt/slides/slide7.xml><?xml version="1.0" encoding="utf-8"?>
+<p:sld xmlns:a="http://schemas.openxmlformats.org/drawingml/2006/main" xmlns:p="http://schemas.openxmlformats.org/presentationml/2006/main" xmlns:r="http://schemas.openxmlformats.org/officeDocument/2006/relationships">
+  <p:cSld>
+    <p:spTree>
+      <p:nvGrpSpPr>
+        <p:cNvPr id="1" name=""/>
+        <p:cNvGrpSpPr/>
+        <p:nvPr/>
+      </p:nvGrpSpPr>
+      <p:grpSpPr/>
+      <p:sp>
+        <p:nvSpPr>
+          <p:cNvPr id="2" name="TextBox 1"/>
+          <p:cNvSpPr txBox="1"/>
+          <p:nvPr/>
+        </p:nvSpPr>
+        <p:spPr>
+          <a:xfrm>
+            <a:off x="411480" y="256032"/>
+            <a:ext cx="11368735" cy="420624"/>
+          </a:xfrm>
+          <a:prstGeom prst="rect">
+            <a:avLst/>
+          </a:prstGeom>
+          <a:noFill/>
+        </p:spPr>
+        <p:txBody>
+          <a:bodyPr wrap="none">
+            <a:spAutoFit/>
+          </a:bodyPr>
+          <a:lstStyle/>
+          <a:p>
+            <a:pPr>
+              <a:defRPr b="1"/>
+            </a:pPr>
+            <a:r>
+              <a:rPr sz="2000"/>
+              <a:t>Phase B — Characterize </a:t>
+            </a:r>
+            <a:r>
+              <a:rPr sz="2000" i="1">
+                <a:latin typeface="Cambria Math"/>
+              </a:rPr>
               <a:t>λ</a:t>
             </a:r>
             <a:r>
               <a:rPr sz="2000"/>
-              <a:t> (congestion in score)</a:t>
+              <a:t> (weight on </a:t>
+            </a:r>
+            <a:r>
+              <a:rPr sz="2000" i="1">
+                <a:latin typeface="Cambria Math"/>
+              </a:rPr>
+              <a:t>L</a:t>
+            </a:r>
+            <a:r>
+              <a:rPr sz="1800" i="1" baseline="-25000">
+                <a:latin typeface="Cambria Math"/>
+              </a:rPr>
+              <a:t>C</a:t>
+            </a:r>
+            <a:r>
+              <a:rPr sz="2000"/>
+              <a:t> in score)</a:t>
             </a:r>
           </a:p>
         </p:txBody>
@@ -4537,7 +8992,7 @@
               <a:rPr sz="800" i="1" baseline="-25000">
                 <a:latin typeface="Cambria Math"/>
               </a:rPr>
-              <a:t>j</a:t>
+              <a:t>j^*</a:t>
             </a:r>
             <a:r>
               <a:rPr sz="900"/>
@@ -4758,7 +9213,7 @@
 </p:sld>
 </file>
 
-<file path=ppt/slides/slide4.xml><?xml version="1.0" encoding="utf-8"?>
+<file path=ppt/slides/slide8.xml><?xml version="1.0" encoding="utf-8"?>
 <p:sld xmlns:a="http://schemas.openxmlformats.org/drawingml/2006/main" xmlns:p="http://schemas.openxmlformats.org/presentationml/2006/main" xmlns:r="http://schemas.openxmlformats.org/officeDocument/2006/relationships">
   <p:cSld>
     <p:spTree>
@@ -5007,6 +9462,29 @@
             <a:r>
               <a:rPr sz="1000"/>
               <a:t>)</a:t>
+            </a:r>
+          </a:p>
+          <a:p>
+            <a:pPr>
+              <a:spcAft>
+                <a:spcPts val="0"/>
+              </a:spcAft>
+            </a:pPr>
+            <a:r>
+              <a:rPr sz="1000" i="1">
+                <a:latin typeface="Cambria Math"/>
+              </a:rPr>
+              <a:t>L</a:t>
+            </a:r>
+            <a:r>
+              <a:rPr sz="800" i="1" baseline="-25000">
+                <a:latin typeface="Cambria Math"/>
+              </a:rPr>
+              <a:t>C</a:t>
+            </a:r>
+            <a:r>
+              <a:rPr sz="1000"/>
+              <a:t> mode: \texttt{crowding\_smooth} (hard \texttt{crowding} also in code)</a:t>
             </a:r>
           </a:p>
           <a:p>
@@ -5180,7 +9658,7 @@
               <a:rPr sz="900" i="1">
                 <a:latin typeface="Cambria Math"/>
               </a:rPr>
-              <a:t>\approx 13</a:t>
+              <a:t>≈ 13</a:t>
             </a:r>
             <a:r>
               <a:rPr sz="900"/>
@@ -5329,7 +9807,7 @@
 </p:sld>
 </file>
 
-<file path=ppt/slides/slide5.xml><?xml version="1.0" encoding="utf-8"?>
+<file path=ppt/slides/slide9.xml><?xml version="1.0" encoding="utf-8"?>
 <p:sld xmlns:a="http://schemas.openxmlformats.org/drawingml/2006/main" xmlns:p="http://schemas.openxmlformats.org/presentationml/2006/main" xmlns:r="http://schemas.openxmlformats.org/officeDocument/2006/relationships">
   <p:cSld>
     <p:spTree>
@@ -5928,1278 +10406,6 @@
             <a:r>
               <a:rPr sz="1100"/>
               <a:t>.</a:t>
-            </a:r>
-          </a:p>
-        </p:txBody>
-      </p:sp>
-    </p:spTree>
-  </p:cSld>
-  <p:clrMapOvr>
-    <a:masterClrMapping/>
-  </p:clrMapOvr>
-</p:sld>
-</file>
-
-<file path=ppt/slides/slide6.xml><?xml version="1.0" encoding="utf-8"?>
-<p:sld xmlns:a="http://schemas.openxmlformats.org/drawingml/2006/main" xmlns:p="http://schemas.openxmlformats.org/presentationml/2006/main" xmlns:r="http://schemas.openxmlformats.org/officeDocument/2006/relationships">
-  <p:cSld>
-    <p:spTree>
-      <p:nvGrpSpPr>
-        <p:cNvPr id="1" name=""/>
-        <p:cNvGrpSpPr/>
-        <p:nvPr/>
-      </p:nvGrpSpPr>
-      <p:grpSpPr/>
-      <p:sp>
-        <p:nvSpPr>
-          <p:cNvPr id="2" name="TextBox 1"/>
-          <p:cNvSpPr txBox="1"/>
-          <p:nvPr/>
-        </p:nvSpPr>
-        <p:spPr>
-          <a:xfrm>
-            <a:off x="411480" y="256032"/>
-            <a:ext cx="11368735" cy="420624"/>
-          </a:xfrm>
-          <a:prstGeom prst="rect">
-            <a:avLst/>
-          </a:prstGeom>
-          <a:noFill/>
-        </p:spPr>
-        <p:txBody>
-          <a:bodyPr wrap="none">
-            <a:spAutoFit/>
-          </a:bodyPr>
-          <a:lstStyle/>
-          <a:p>
-            <a:pPr>
-              <a:defRPr b="1"/>
-            </a:pPr>
-            <a:r>
-              <a:rPr sz="2000"/>
-              <a:t>Phase B — Characterize </a:t>
-            </a:r>
-            <a:r>
-              <a:rPr sz="2000" i="1">
-                <a:latin typeface="Cambria Math"/>
-              </a:rPr>
-              <a:t>\gamma</a:t>
-            </a:r>
-            <a:r>
-              <a:rPr sz="2000"/>
-              <a:t> (viability sharpness) — selection curves</a:t>
-            </a:r>
-          </a:p>
-        </p:txBody>
-      </p:sp>
-      <p:sp>
-        <p:nvSpPr>
-          <p:cNvPr id="3" name="TextBox 2"/>
-          <p:cNvSpPr txBox="1"/>
-          <p:nvPr/>
-        </p:nvSpPr>
-        <p:spPr>
-          <a:xfrm>
-            <a:off x="411480" y="768096"/>
-            <a:ext cx="4160520" cy="3895344"/>
-          </a:xfrm>
-          <a:prstGeom prst="rect">
-            <a:avLst/>
-          </a:prstGeom>
-          <a:noFill/>
-        </p:spPr>
-        <p:txBody>
-          <a:bodyPr wrap="square">
-            <a:spAutoFit/>
-          </a:bodyPr>
-          <a:lstStyle/>
-          <a:p>
-            <a:pPr>
-              <a:spcAft>
-                <a:spcPts val="0"/>
-              </a:spcAft>
-              <a:defRPr b="1"/>
-            </a:pPr>
-            <a:r>
-              <a:rPr sz="1100"/>
-              <a:t>Characterize </a:t>
-            </a:r>
-            <a:r>
-              <a:rPr sz="1100" i="1">
-                <a:latin typeface="Cambria Math"/>
-              </a:rPr>
-              <a:t>\gamma</a:t>
-            </a:r>
-            <a:r>
-              <a:rPr sz="1100"/>
-              <a:t> — one-at-a-time (539 sort-and-chop benchmark)</a:t>
-            </a:r>
-          </a:p>
-          <a:p>
-            <a:pPr>
-              <a:spcAft>
-                <a:spcPts val="0"/>
-              </a:spcAft>
-            </a:pPr>
-            <a:r>
-              <a:rPr sz="1100" i="1">
-                <a:latin typeface="Cambria Math"/>
-              </a:rPr>
-              <a:t>σ(x) = 1/(1+e</a:t>
-            </a:r>
-            <a:r>
-              <a:rPr sz="900" baseline="30000">
-                <a:latin typeface="Cambria Math"/>
-              </a:rPr>
-              <a:t>-x</a:t>
-            </a:r>
-            <a:r>
-              <a:rPr sz="1100" i="1">
-                <a:latin typeface="Cambria Math"/>
-              </a:rPr>
-              <a:t>)</a:t>
-            </a:r>
-            <a:r>
-              <a:rPr sz="1100"/>
-              <a:t>, </a:t>
-            </a:r>
-            <a:r>
-              <a:rPr sz="1100" i="1">
-                <a:latin typeface="Cambria Math"/>
-              </a:rPr>
-              <a:t>x = \gamma(A-\theta)</a:t>
-            </a:r>
-          </a:p>
-          <a:p>
-            <a:pPr>
-              <a:spcAft>
-                <a:spcPts val="0"/>
-              </a:spcAft>
-            </a:pPr>
-            <a:r>
-              <a:rPr sz="1000" i="1">
-                <a:latin typeface="Cambria Math"/>
-              </a:rPr>
-              <a:t>\theta=0.72</a:t>
-            </a:r>
-            <a:r>
-              <a:rPr sz="1000"/>
-              <a:t> fixed; sort-and-chop assign</a:t>
-            </a:r>
-          </a:p>
-          <a:p>
-            <a:pPr>
-              <a:spcAft>
-                <a:spcPts val="0"/>
-              </a:spcAft>
-            </a:pPr>
-            <a:r>
-              <a:rPr sz="1000"/>
-              <a:t>arms: </a:t>
-            </a:r>
-            <a:r>
-              <a:rPr sz="1000" i="1">
-                <a:latin typeface="Cambria Math"/>
-              </a:rPr>
-              <a:t>\gamma ∈ {5, 10, 20}</a:t>
-            </a:r>
-          </a:p>
-          <a:p>
-            <a:pPr>
-              <a:spcAft>
-                <a:spcPts val="0"/>
-              </a:spcAft>
-            </a:pPr>
-            <a:r>
-              <a:rPr sz="1000"/>
-              <a:t>within each </a:t>
-            </a:r>
-            <a:r>
-              <a:rPr sz="1000" i="1">
-                <a:latin typeface="Cambria Math"/>
-              </a:rPr>
-              <a:t>\gamma</a:t>
-            </a:r>
-            <a:r>
-              <a:rPr sz="1000"/>
-              <a:t>: </a:t>
-            </a:r>
-            <a:r>
-              <a:rPr sz="1000" i="1">
-                <a:latin typeface="Cambria Math"/>
-              </a:rPr>
-              <a:t>λ ∈ {0, 0.25, 0.55, 0.75, 1.0}</a:t>
-            </a:r>
-          </a:p>
-          <a:p>
-            <a:pPr>
-              <a:spcAft>
-                <a:spcPts val="0"/>
-              </a:spcAft>
-            </a:pPr>
-            <a:r>
-              <a:rPr sz="1000"/>
-              <a:t>VISUALIZE = mean </a:t>
-            </a:r>
-            <a:r>
-              <a:rPr sz="1000" i="1">
-                <a:latin typeface="Cambria Math"/>
-              </a:rPr>
-              <a:t>Y</a:t>
-            </a:r>
-            <a:r>
-              <a:rPr sz="800" i="1" baseline="-25000">
-                <a:latin typeface="Cambria Math"/>
-              </a:rPr>
-              <a:t>selected</a:t>
-            </a:r>
-            <a:r>
-              <a:rPr sz="1000"/>
-              <a:t> vs pool mean (</a:t>
-            </a:r>
-            <a:r>
-              <a:rPr sz="1000" i="1">
-                <a:latin typeface="Cambria Math"/>
-              </a:rPr>
-              <a:t>16</a:t>
-            </a:r>
-            <a:r>
-              <a:rPr sz="1000"/>
-              <a:t> bins)</a:t>
-            </a:r>
-          </a:p>
-        </p:txBody>
-      </p:sp>
-      <p:pic>
-        <p:nvPicPr>
-          <p:cNvPr id="4" name="Picture 3" descr="image.png"/>
-          <p:cNvPicPr>
-            <a:picLocks noChangeAspect="1"/>
-          </p:cNvPicPr>
-          <p:nvPr/>
-        </p:nvPicPr>
-        <p:blipFill>
-          <a:blip r:embed="rId2"/>
-          <a:stretch>
-            <a:fillRect/>
-          </a:stretch>
-        </p:blipFill>
-        <p:spPr>
-          <a:xfrm>
-            <a:off x="4773168" y="768096"/>
-            <a:ext cx="7007047" cy="2393962"/>
-          </a:xfrm>
-          <a:prstGeom prst="rect">
-            <a:avLst/>
-          </a:prstGeom>
-        </p:spPr>
-      </p:pic>
-      <p:sp>
-        <p:nvSpPr>
-          <p:cNvPr id="5" name="TextBox 4"/>
-          <p:cNvSpPr txBox="1"/>
-          <p:nvPr/>
-        </p:nvSpPr>
-        <p:spPr>
-          <a:xfrm>
-            <a:off x="411480" y="4681728"/>
-            <a:ext cx="11368735" cy="1234440"/>
-          </a:xfrm>
-          <a:prstGeom prst="rect">
-            <a:avLst/>
-          </a:prstGeom>
-          <a:noFill/>
-        </p:spPr>
-        <p:txBody>
-          <a:bodyPr wrap="square">
-            <a:spAutoFit/>
-          </a:bodyPr>
-          <a:lstStyle/>
-          <a:p>
-            <a:pPr>
-              <a:spcBef>
-                <a:spcPts val="0"/>
-              </a:spcBef>
-              <a:spcAft>
-                <a:spcPts val="0"/>
-              </a:spcAft>
-            </a:pPr>
-            <a:r>
-              <a:rPr sz="900"/>
-              <a:t>Sort-and-chop benchmark: same rosters per </a:t>
-            </a:r>
-            <a:r>
-              <a:rPr sz="900" i="1">
-                <a:latin typeface="Cambria Math"/>
-              </a:rPr>
-              <a:t>\gamma</a:t>
-            </a:r>
-            <a:r>
-              <a:rPr sz="900"/>
-              <a:t>; only </a:t>
-            </a:r>
-            <a:r>
-              <a:rPr sz="900" i="1">
-                <a:latin typeface="Cambria Math"/>
-              </a:rPr>
-              <a:t>\gamma</a:t>
-            </a:r>
-            <a:r>
-              <a:rPr sz="900"/>
-              <a:t> and </a:t>
-            </a:r>
-            <a:r>
-              <a:rPr sz="900" i="1">
-                <a:latin typeface="Cambria Math"/>
-              </a:rPr>
-              <a:t>λ</a:t>
-            </a:r>
-            <a:r>
-              <a:rPr sz="900"/>
-              <a:t> in score change.</a:t>
-            </a:r>
-          </a:p>
-          <a:p>
-            <a:pPr>
-              <a:spcBef>
-                <a:spcPts val="0"/>
-              </a:spcBef>
-              <a:spcAft>
-                <a:spcPts val="0"/>
-              </a:spcAft>
-            </a:pPr>
-            <a:r>
-              <a:rPr sz="900" i="1">
-                <a:latin typeface="Cambria Math"/>
-              </a:rPr>
-              <a:t>\gamma=5</a:t>
-            </a:r>
-            <a:r>
-              <a:rPr sz="900"/>
-              <a:t>: </a:t>
-            </a:r>
-            <a:r>
-              <a:rPr sz="900" i="1">
-                <a:latin typeface="Cambria Math"/>
-              </a:rPr>
-              <a:t>λ</a:t>
-            </a:r>
-            <a:r>
-              <a:rPr sz="800" i="1" baseline="-25000">
-                <a:latin typeface="Cambria Math"/>
-              </a:rPr>
-              <a:t>crit</a:t>
-            </a:r>
-            <a:r>
-              <a:rPr sz="900" i="1">
-                <a:latin typeface="Cambria Math"/>
-              </a:rPr>
-              <a:t>\approx 0.8</a:t>
-            </a:r>
-            <a:r>
-              <a:rPr sz="900"/>
-              <a:t> — hump needs larger </a:t>
-            </a:r>
-            <a:r>
-              <a:rPr sz="900" i="1">
-                <a:latin typeface="Cambria Math"/>
-              </a:rPr>
-              <a:t>λ</a:t>
-            </a:r>
-            <a:r>
-              <a:rPr sz="900"/>
-              <a:t>.</a:t>
-            </a:r>
-          </a:p>
-          <a:p>
-            <a:pPr>
-              <a:spcBef>
-                <a:spcPts val="0"/>
-              </a:spcBef>
-              <a:spcAft>
-                <a:spcPts val="0"/>
-              </a:spcAft>
-            </a:pPr>
-            <a:r>
-              <a:rPr sz="900" i="1">
-                <a:latin typeface="Cambria Math"/>
-              </a:rPr>
-              <a:t>\gamma=10</a:t>
-            </a:r>
-            <a:r>
-              <a:rPr sz="900"/>
-              <a:t> (539): </a:t>
-            </a:r>
-            <a:r>
-              <a:rPr sz="900" i="1">
-                <a:latin typeface="Cambria Math"/>
-              </a:rPr>
-              <a:t>λ</a:t>
-            </a:r>
-            <a:r>
-              <a:rPr sz="800" i="1" baseline="-25000">
-                <a:latin typeface="Cambria Math"/>
-              </a:rPr>
-              <a:t>crit</a:t>
-            </a:r>
-            <a:r>
-              <a:rPr sz="900" i="1">
-                <a:latin typeface="Cambria Math"/>
-              </a:rPr>
-              <a:t>\approx 0.4</a:t>
-            </a:r>
-            <a:r>
-              <a:rPr sz="900"/>
-              <a:t> — curve morph near </a:t>
-            </a:r>
-            <a:r>
-              <a:rPr sz="900" i="1">
-                <a:latin typeface="Cambria Math"/>
-              </a:rPr>
-              <a:t>λ \gtrsim 0.4</a:t>
-            </a:r>
-            <a:r>
-              <a:rPr sz="900"/>
-              <a:t>.</a:t>
-            </a:r>
-          </a:p>
-          <a:p>
-            <a:pPr>
-              <a:spcBef>
-                <a:spcPts val="0"/>
-              </a:spcBef>
-              <a:spcAft>
-                <a:spcPts val="0"/>
-              </a:spcAft>
-            </a:pPr>
-            <a:r>
-              <a:rPr sz="900" i="1">
-                <a:latin typeface="Cambria Math"/>
-              </a:rPr>
-              <a:t>\gamma=20</a:t>
-            </a:r>
-            <a:r>
-              <a:rPr sz="900"/>
-              <a:t>: </a:t>
-            </a:r>
-            <a:r>
-              <a:rPr sz="900" i="1">
-                <a:latin typeface="Cambria Math"/>
-              </a:rPr>
-              <a:t>λ</a:t>
-            </a:r>
-            <a:r>
-              <a:rPr sz="800" i="1" baseline="-25000">
-                <a:latin typeface="Cambria Math"/>
-              </a:rPr>
-              <a:t>crit</a:t>
-            </a:r>
-            <a:r>
-              <a:rPr sz="900" i="1">
-                <a:latin typeface="Cambria Math"/>
-              </a:rPr>
-              <a:t>\approx 0.2</a:t>
-            </a:r>
-            <a:r>
-              <a:rPr sz="900"/>
-              <a:t> — congestion reorders at modest </a:t>
-            </a:r>
-            <a:r>
-              <a:rPr sz="900" i="1">
-                <a:latin typeface="Cambria Math"/>
-              </a:rPr>
-              <a:t>λ</a:t>
-            </a:r>
-            <a:r>
-              <a:rPr sz="900"/>
-              <a:t>.</a:t>
-            </a:r>
-          </a:p>
-          <a:p>
-            <a:pPr>
-              <a:spcBef>
-                <a:spcPts val="0"/>
-              </a:spcBef>
-              <a:spcAft>
-                <a:spcPts val="0"/>
-              </a:spcAft>
-            </a:pPr>
-            <a:r>
-              <a:rPr sz="900"/>
-              <a:t>Below crit: monotone elite-edge shape; above crit: inverted-</a:t>
-            </a:r>
-            <a:r>
-              <a:rPr sz="900" i="1">
-                <a:latin typeface="Cambria Math"/>
-              </a:rPr>
-              <a:t>U</a:t>
-            </a:r>
-            <a:r>
-              <a:rPr sz="900"/>
-              <a:t> / hump.</a:t>
-            </a:r>
-          </a:p>
-        </p:txBody>
-      </p:sp>
-      <p:sp>
-        <p:nvSpPr>
-          <p:cNvPr id="6" name="TextBox 5"/>
-          <p:cNvSpPr txBox="1"/>
-          <p:nvPr/>
-        </p:nvSpPr>
-        <p:spPr>
-          <a:xfrm>
-            <a:off x="411480" y="5971032"/>
-            <a:ext cx="11368735" cy="475488"/>
-          </a:xfrm>
-          <a:prstGeom prst="rect">
-            <a:avLst/>
-          </a:prstGeom>
-          <a:noFill/>
-        </p:spPr>
-        <p:txBody>
-          <a:bodyPr wrap="none">
-            <a:spAutoFit/>
-          </a:bodyPr>
-          <a:lstStyle/>
-          <a:p>
-            <a:pPr algn="l">
-              <a:defRPr b="1"/>
-            </a:pPr>
-            <a:r>
-              <a:rPr sz="1100"/>
-              <a:t>Claim: </a:t>
-            </a:r>
-            <a:r>
-              <a:rPr sz="1100" i="1">
-                <a:latin typeface="Cambria Math"/>
-              </a:rPr>
-              <a:t>\gamma</a:t>
-            </a:r>
-            <a:r>
-              <a:rPr sz="1100"/>
-              <a:t> (sigmoid slope in </a:t>
-            </a:r>
-            <a:r>
-              <a:rPr sz="1100" i="1">
-                <a:latin typeface="Cambria Math"/>
-              </a:rPr>
-              <a:t>L</a:t>
-            </a:r>
-            <a:r>
-              <a:rPr sz="900" i="1" baseline="-25000">
-                <a:latin typeface="Cambria Math"/>
-              </a:rPr>
-              <a:t>C</a:t>
-            </a:r>
-            <a:r>
-              <a:rPr sz="1100"/>
-              <a:t>) shifts when congestion bites — higher </a:t>
-            </a:r>
-            <a:r>
-              <a:rPr sz="1100" i="1">
-                <a:latin typeface="Cambria Math"/>
-              </a:rPr>
-              <a:t>\gamma</a:t>
-            </a:r>
-            <a:r>
-              <a:rPr sz="1100"/>
-              <a:t> lowers </a:t>
-            </a:r>
-            <a:r>
-              <a:rPr sz="1100" i="1">
-                <a:latin typeface="Cambria Math"/>
-              </a:rPr>
-              <a:t>λ</a:t>
-            </a:r>
-            <a:r>
-              <a:rPr sz="900" i="1" baseline="-25000">
-                <a:latin typeface="Cambria Math"/>
-              </a:rPr>
-              <a:t>crit</a:t>
-            </a:r>
-            <a:r>
-              <a:rPr sz="1100" i="1">
-                <a:latin typeface="Cambria Math"/>
-              </a:rPr>
-              <a:t> \approx 4/\gamma</a:t>
-            </a:r>
-            <a:r>
-              <a:rPr sz="1100"/>
-              <a:t> on sort-and-chop; below crit, </a:t>
-            </a:r>
-            <a:r>
-              <a:rPr sz="1100" i="1">
-                <a:latin typeface="Cambria Math"/>
-              </a:rPr>
-              <a:t>λ</a:t>
-            </a:r>
-            <a:r>
-              <a:rPr sz="1100"/>
-              <a:t> arms can look identical.</a:t>
-            </a:r>
-          </a:p>
-        </p:txBody>
-      </p:sp>
-    </p:spTree>
-  </p:cSld>
-  <p:clrMapOvr>
-    <a:masterClrMapping/>
-  </p:clrMapOvr>
-</p:sld>
-</file>
-
-<file path=ppt/slides/slide7.xml><?xml version="1.0" encoding="utf-8"?>
-<p:sld xmlns:a="http://schemas.openxmlformats.org/drawingml/2006/main" xmlns:p="http://schemas.openxmlformats.org/presentationml/2006/main" xmlns:r="http://schemas.openxmlformats.org/officeDocument/2006/relationships">
-  <p:cSld>
-    <p:spTree>
-      <p:nvGrpSpPr>
-        <p:cNvPr id="1" name=""/>
-        <p:cNvGrpSpPr/>
-        <p:nvPr/>
-      </p:nvGrpSpPr>
-      <p:grpSpPr/>
-      <p:sp>
-        <p:nvSpPr>
-          <p:cNvPr id="2" name="TextBox 1"/>
-          <p:cNvSpPr txBox="1"/>
-          <p:nvPr/>
-        </p:nvSpPr>
-        <p:spPr>
-          <a:xfrm>
-            <a:off x="411480" y="256032"/>
-            <a:ext cx="11368735" cy="420624"/>
-          </a:xfrm>
-          <a:prstGeom prst="rect">
-            <a:avLst/>
-          </a:prstGeom>
-          <a:noFill/>
-        </p:spPr>
-        <p:txBody>
-          <a:bodyPr wrap="none">
-            <a:spAutoFit/>
-          </a:bodyPr>
-          <a:lstStyle/>
-          <a:p>
-            <a:pPr>
-              <a:defRPr b="1"/>
-            </a:pPr>
-            <a:r>
-              <a:rPr sz="2000"/>
-              <a:t>Phase B — </a:t>
-            </a:r>
-            <a:r>
-              <a:rPr sz="2000" i="1">
-                <a:latin typeface="Cambria Math"/>
-              </a:rPr>
-              <a:t>λ</a:t>
-            </a:r>
-            <a:r>
-              <a:rPr sz="1800" i="1" baseline="-25000">
-                <a:latin typeface="Cambria Math"/>
-              </a:rPr>
-              <a:t>crit</a:t>
-            </a:r>
-            <a:r>
-              <a:rPr sz="2000" i="1">
-                <a:latin typeface="Cambria Math"/>
-              </a:rPr>
-              <a:t> \approx 4/\gamma</a:t>
-            </a:r>
-            <a:r>
-              <a:rPr sz="2000"/>
-              <a:t> (sort-and-chop algebra)</a:t>
-            </a:r>
-          </a:p>
-        </p:txBody>
-      </p:sp>
-      <p:sp>
-        <p:nvSpPr>
-          <p:cNvPr id="3" name="TextBox 2"/>
-          <p:cNvSpPr txBox="1"/>
-          <p:nvPr/>
-        </p:nvSpPr>
-        <p:spPr>
-          <a:xfrm>
-            <a:off x="411480" y="768096"/>
-            <a:ext cx="4160520" cy="3895344"/>
-          </a:xfrm>
-          <a:prstGeom prst="rect">
-            <a:avLst/>
-          </a:prstGeom>
-          <a:noFill/>
-        </p:spPr>
-        <p:txBody>
-          <a:bodyPr wrap="square">
-            <a:spAutoFit/>
-          </a:bodyPr>
-          <a:lstStyle/>
-          <a:p>
-            <a:pPr>
-              <a:spcAft>
-                <a:spcPts val="0"/>
-              </a:spcAft>
-              <a:defRPr b="1"/>
-            </a:pPr>
-            <a:r>
-              <a:rPr sz="1100"/>
-              <a:t>Characterize </a:t>
-            </a:r>
-            <a:r>
-              <a:rPr sz="1100" i="1">
-                <a:latin typeface="Cambria Math"/>
-              </a:rPr>
-              <a:t>\gamma</a:t>
-            </a:r>
-            <a:r>
-              <a:rPr sz="1100"/>
-              <a:t> — one-at-a-time (539 sort-and-chop benchmark)</a:t>
-            </a:r>
-          </a:p>
-          <a:p>
-            <a:pPr>
-              <a:spcAft>
-                <a:spcPts val="0"/>
-              </a:spcAft>
-            </a:pPr>
-            <a:r>
-              <a:rPr sz="1100" i="1">
-                <a:latin typeface="Cambria Math"/>
-              </a:rPr>
-              <a:t>σ(x) = 1/(1+e</a:t>
-            </a:r>
-            <a:r>
-              <a:rPr sz="900" baseline="30000">
-                <a:latin typeface="Cambria Math"/>
-              </a:rPr>
-              <a:t>-x</a:t>
-            </a:r>
-            <a:r>
-              <a:rPr sz="1100" i="1">
-                <a:latin typeface="Cambria Math"/>
-              </a:rPr>
-              <a:t>)</a:t>
-            </a:r>
-            <a:r>
-              <a:rPr sz="1100"/>
-              <a:t>, </a:t>
-            </a:r>
-            <a:r>
-              <a:rPr sz="1100" i="1">
-                <a:latin typeface="Cambria Math"/>
-              </a:rPr>
-              <a:t>x = \gamma(A-\theta)</a:t>
-            </a:r>
-          </a:p>
-          <a:p>
-            <a:pPr>
-              <a:spcAft>
-                <a:spcPts val="0"/>
-              </a:spcAft>
-            </a:pPr>
-            <a:r>
-              <a:rPr sz="1000"/>
-              <a:t>Educational: how </a:t>
-            </a:r>
-            <a:r>
-              <a:rPr sz="1000" i="1">
-                <a:latin typeface="Cambria Math"/>
-              </a:rPr>
-              <a:t>\gamma</a:t>
-            </a:r>
-            <a:r>
-              <a:rPr sz="1000"/>
-              <a:t> shapes </a:t>
-            </a:r>
-            <a:r>
-              <a:rPr sz="1000" i="1">
-                <a:latin typeface="Cambria Math"/>
-              </a:rPr>
-              <a:t>L</a:t>
-            </a:r>
-            <a:r>
-              <a:rPr sz="800" i="1" baseline="-25000">
-                <a:latin typeface="Cambria Math"/>
-              </a:rPr>
-              <a:t>C</a:t>
-            </a:r>
-            <a:r>
-              <a:rPr sz="1000"/>
-              <a:t> along ability axis</a:t>
-            </a:r>
-          </a:p>
-          <a:p>
-            <a:pPr>
-              <a:spcAft>
-                <a:spcPts val="0"/>
-              </a:spcAft>
-            </a:pPr>
-            <a:r>
-              <a:rPr sz="1000"/>
-              <a:t>vertical lines: </a:t>
-            </a:r>
-            <a:r>
-              <a:rPr sz="1000" i="1">
-                <a:latin typeface="Cambria Math"/>
-              </a:rPr>
-              <a:t>λ</a:t>
-            </a:r>
-            <a:r>
-              <a:rPr sz="800" i="1" baseline="-25000">
-                <a:latin typeface="Cambria Math"/>
-              </a:rPr>
-              <a:t>crit</a:t>
-            </a:r>
-            <a:r>
-              <a:rPr sz="1000" i="1">
-                <a:latin typeface="Cambria Math"/>
-              </a:rPr>
-              <a:t> = 4/\gamma</a:t>
-            </a:r>
-            <a:r>
-              <a:rPr sz="1000"/>
-              <a:t> for each </a:t>
-            </a:r>
-            <a:r>
-              <a:rPr sz="1000" i="1">
-                <a:latin typeface="Cambria Math"/>
-              </a:rPr>
-              <a:t>\gamma</a:t>
-            </a:r>
-          </a:p>
-          <a:p>
-            <a:pPr>
-              <a:spcAft>
-                <a:spcPts val="0"/>
-              </a:spcAft>
-            </a:pPr>
-            <a:r>
-              <a:rPr sz="1000"/>
-              <a:t>539 defaults: </a:t>
-            </a:r>
-            <a:r>
-              <a:rPr sz="1000" i="1">
-                <a:latin typeface="Cambria Math"/>
-              </a:rPr>
-              <a:t>\theta=0.72</a:t>
-            </a:r>
-            <a:r>
-              <a:rPr sz="1000"/>
-              <a:t>, </a:t>
-            </a:r>
-            <a:r>
-              <a:rPr sz="1000" i="1">
-                <a:latin typeface="Cambria Math"/>
-              </a:rPr>
-              <a:t>\gamma=10</a:t>
-            </a:r>
-            <a:r>
-              <a:rPr sz="1000"/>
-              <a:t> → crit </a:t>
-            </a:r>
-            <a:r>
-              <a:rPr sz="1000" i="1">
-                <a:latin typeface="Cambria Math"/>
-              </a:rPr>
-              <a:t>= 0.4</a:t>
-            </a:r>
-          </a:p>
-          <a:p>
-            <a:pPr>
-              <a:spcAft>
-                <a:spcPts val="0"/>
-              </a:spcAft>
-            </a:pPr>
-            <a:r>
-              <a:rPr sz="1000"/>
-              <a:t>Pairs with sort-and-chop </a:t>
-            </a:r>
-            <a:r>
-              <a:rPr sz="1000" i="1">
-                <a:latin typeface="Cambria Math"/>
-              </a:rPr>
-              <a:t>λ</a:t>
-            </a:r>
-            <a:r>
-              <a:rPr sz="1000"/>
-              <a:t> threshold memo (doc 06)</a:t>
-            </a:r>
-          </a:p>
-        </p:txBody>
-      </p:sp>
-      <p:pic>
-        <p:nvPicPr>
-          <p:cNvPr id="4" name="Picture 3" descr="image.png"/>
-          <p:cNvPicPr>
-            <a:picLocks noChangeAspect="1"/>
-          </p:cNvPicPr>
-          <p:nvPr/>
-        </p:nvPicPr>
-        <p:blipFill>
-          <a:blip r:embed="rId2"/>
-          <a:stretch>
-            <a:fillRect/>
-          </a:stretch>
-        </p:blipFill>
-        <p:spPr>
-          <a:xfrm>
-            <a:off x="4773168" y="768096"/>
-            <a:ext cx="7007047" cy="3186656"/>
-          </a:xfrm>
-          <a:prstGeom prst="rect">
-            <a:avLst/>
-          </a:prstGeom>
-        </p:spPr>
-      </p:pic>
-      <p:sp>
-        <p:nvSpPr>
-          <p:cNvPr id="5" name="TextBox 4"/>
-          <p:cNvSpPr txBox="1"/>
-          <p:nvPr/>
-        </p:nvSpPr>
-        <p:spPr>
-          <a:xfrm>
-            <a:off x="411480" y="4681728"/>
-            <a:ext cx="11368735" cy="1234440"/>
-          </a:xfrm>
-          <a:prstGeom prst="rect">
-            <a:avLst/>
-          </a:prstGeom>
-          <a:noFill/>
-        </p:spPr>
-        <p:txBody>
-          <a:bodyPr wrap="square">
-            <a:spAutoFit/>
-          </a:bodyPr>
-          <a:lstStyle/>
-          <a:p>
-            <a:pPr>
-              <a:spcBef>
-                <a:spcPts val="0"/>
-              </a:spcBef>
-              <a:spcAft>
-                <a:spcPts val="0"/>
-              </a:spcAft>
-            </a:pPr>
-            <a:r>
-              <a:rPr sz="900"/>
-              <a:t>Soft viability: </a:t>
-            </a:r>
-            <a:r>
-              <a:rPr sz="900" i="1">
-                <a:latin typeface="Cambria Math"/>
-              </a:rPr>
-              <a:t>σ(\gamma(A-\theta))</a:t>
-            </a:r>
-            <a:r>
-              <a:rPr sz="900"/>
-              <a:t> — not a hard step; </a:t>
-            </a:r>
-            <a:r>
-              <a:rPr sz="900" i="1">
-                <a:latin typeface="Cambria Math"/>
-              </a:rPr>
-              <a:t>\gamma</a:t>
-            </a:r>
-            <a:r>
-              <a:rPr sz="900"/>
-              <a:t> sets knee steepness.</a:t>
-            </a:r>
-          </a:p>
-          <a:p>
-            <a:pPr>
-              <a:spcBef>
-                <a:spcPts val="0"/>
-              </a:spcBef>
-              <a:spcAft>
-                <a:spcPts val="0"/>
-              </a:spcAft>
-            </a:pPr>
-            <a:r>
-              <a:rPr sz="900"/>
-              <a:t>On sort-and-chop, </a:t>
-            </a:r>
-            <a:r>
-              <a:rPr sz="900" i="1">
-                <a:latin typeface="Cambria Math"/>
-              </a:rPr>
-              <a:t>A</a:t>
-            </a:r>
-            <a:r>
-              <a:rPr sz="800" i="1" baseline="-25000">
-                <a:latin typeface="Cambria Math"/>
-              </a:rPr>
-              <a:t>i</a:t>
-            </a:r>
-            <a:r>
-              <a:rPr sz="900" i="1">
-                <a:latin typeface="Cambria Math"/>
-              </a:rPr>
-              <a:t> \parallel L</a:t>
-            </a:r>
-            <a:r>
-              <a:rPr sz="800" i="1" baseline="-25000">
-                <a:latin typeface="Cambria Math"/>
-              </a:rPr>
-              <a:t>C</a:t>
-            </a:r>
-            <a:r>
-              <a:rPr sz="900"/>
-              <a:t> within teams → small </a:t>
-            </a:r>
-            <a:r>
-              <a:rPr sz="900" i="1">
-                <a:latin typeface="Cambria Math"/>
-              </a:rPr>
-              <a:t>λ</a:t>
-            </a:r>
-            <a:r>
-              <a:rPr sz="900"/>
-              <a:t> may not reorder top-</a:t>
-            </a:r>
-            <a:r>
-              <a:rPr sz="900" i="1">
-                <a:latin typeface="Cambria Math"/>
-              </a:rPr>
-              <a:t>K</a:t>
-            </a:r>
-            <a:r>
-              <a:rPr sz="900"/>
-              <a:t>.</a:t>
-            </a:r>
-          </a:p>
-          <a:p>
-            <a:pPr>
-              <a:spcBef>
-                <a:spcPts val="0"/>
-              </a:spcBef>
-              <a:spcAft>
-                <a:spcPts val="0"/>
-              </a:spcAft>
-            </a:pPr>
-            <a:r>
-              <a:rPr sz="900" i="1">
-                <a:latin typeface="Cambria Math"/>
-              </a:rPr>
-              <a:t>λ</a:t>
-            </a:r>
-            <a:r>
-              <a:rPr sz="800" i="1" baseline="-25000">
-                <a:latin typeface="Cambria Math"/>
-              </a:rPr>
-              <a:t>crit</a:t>
-            </a:r>
-            <a:r>
-              <a:rPr sz="900"/>
-              <a:t>: first </a:t>
-            </a:r>
-            <a:r>
-              <a:rPr sz="900" i="1">
-                <a:latin typeface="Cambria Math"/>
-              </a:rPr>
-              <a:t>λ</a:t>
-            </a:r>
-            <a:r>
-              <a:rPr sz="900"/>
-              <a:t> where </a:t>
-            </a:r>
-            <a:r>
-              <a:rPr sz="900" i="1">
-                <a:latin typeface="Cambria Math"/>
-              </a:rPr>
-              <a:t>S</a:t>
-            </a:r>
-            <a:r>
-              <a:rPr sz="800" i="1" baseline="-25000">
-                <a:latin typeface="Cambria Math"/>
-              </a:rPr>
-              <a:t>i</a:t>
-            </a:r>
-            <a:r>
-              <a:rPr sz="900" i="1">
-                <a:latin typeface="Cambria Math"/>
-              </a:rPr>
-              <a:t> = A</a:t>
-            </a:r>
-            <a:r>
-              <a:rPr sz="800" i="1" baseline="-25000">
-                <a:latin typeface="Cambria Math"/>
-              </a:rPr>
-              <a:t>i</a:t>
-            </a:r>
-            <a:r>
-              <a:rPr sz="900" i="1">
-                <a:latin typeface="Cambria Math"/>
-              </a:rPr>
-              <a:t> - λ L</a:t>
-            </a:r>
-            <a:r>
-              <a:rPr sz="800" i="1" baseline="-25000">
-                <a:latin typeface="Cambria Math"/>
-              </a:rPr>
-              <a:t>C</a:t>
-            </a:r>
-            <a:r>
-              <a:rPr sz="900"/>
-              <a:t> changes who gets selected.</a:t>
-            </a:r>
-          </a:p>
-          <a:p>
-            <a:pPr>
-              <a:spcBef>
-                <a:spcPts val="0"/>
-              </a:spcBef>
-              <a:spcAft>
-                <a:spcPts val="0"/>
-              </a:spcAft>
-            </a:pPr>
-            <a:r>
-              <a:rPr sz="900"/>
-              <a:t>Visual curve departure in </a:t>
-            </a:r>
-            <a:r>
-              <a:rPr sz="900" i="1">
-                <a:latin typeface="Cambria Math"/>
-              </a:rPr>
-              <a:t>16</a:t>
-            </a:r>
-            <a:r>
-              <a:rPr sz="900"/>
-              <a:t> bins can lag </a:t>
-            </a:r>
-            <a:r>
-              <a:rPr sz="900" i="1">
-                <a:latin typeface="Cambria Math"/>
-              </a:rPr>
-              <a:t>λ</a:t>
-            </a:r>
-            <a:r>
-              <a:rPr sz="800" i="1" baseline="-25000">
-                <a:latin typeface="Cambria Math"/>
-              </a:rPr>
-              <a:t>crit</a:t>
-            </a:r>
-            <a:r>
-              <a:rPr sz="900"/>
-              <a:t> — use finer bins or check reorder.</a:t>
-            </a:r>
-          </a:p>
-          <a:p>
-            <a:pPr>
-              <a:spcBef>
-                <a:spcPts val="0"/>
-              </a:spcBef>
-              <a:spcAft>
-                <a:spcPts val="0"/>
-              </a:spcAft>
-            </a:pPr>
-            <a:r>
-              <a:rPr sz="900"/>
-              <a:t>Ties to Alex Q: why </a:t>
-            </a:r>
-            <a:r>
-              <a:rPr sz="900" i="1">
-                <a:latin typeface="Cambria Math"/>
-              </a:rPr>
-              <a:t>λ=0</a:t>
-            </a:r>
-            <a:r>
-              <a:rPr sz="900"/>
-              <a:t> and </a:t>
-            </a:r>
-            <a:r>
-              <a:rPr sz="900" i="1">
-                <a:latin typeface="Cambria Math"/>
-              </a:rPr>
-              <a:t>λ=0.25</a:t>
-            </a:r>
-            <a:r>
-              <a:rPr sz="900"/>
-              <a:t> match until </a:t>
-            </a:r>
-            <a:r>
-              <a:rPr sz="900" i="1">
-                <a:latin typeface="Cambria Math"/>
-              </a:rPr>
-              <a:t>λ \gtrsim 4/\gamma</a:t>
-            </a:r>
-            <a:r>
-              <a:rPr sz="900"/>
-              <a:t>.</a:t>
-            </a:r>
-          </a:p>
-        </p:txBody>
-      </p:sp>
-      <p:sp>
-        <p:nvSpPr>
-          <p:cNvPr id="6" name="TextBox 5"/>
-          <p:cNvSpPr txBox="1"/>
-          <p:nvPr/>
-        </p:nvSpPr>
-        <p:spPr>
-          <a:xfrm>
-            <a:off x="411480" y="5971032"/>
-            <a:ext cx="11368735" cy="475488"/>
-          </a:xfrm>
-          <a:prstGeom prst="rect">
-            <a:avLst/>
-          </a:prstGeom>
-          <a:noFill/>
-        </p:spPr>
-        <p:txBody>
-          <a:bodyPr wrap="none">
-            <a:spAutoFit/>
-          </a:bodyPr>
-          <a:lstStyle/>
-          <a:p>
-            <a:pPr algn="l">
-              <a:defRPr b="1"/>
-            </a:pPr>
-            <a:r>
-              <a:rPr sz="1100"/>
-              <a:t>Claim: </a:t>
-            </a:r>
-            <a:r>
-              <a:rPr sz="1100" i="1">
-                <a:latin typeface="Cambria Math"/>
-              </a:rPr>
-              <a:t>λ</a:t>
-            </a:r>
-            <a:r>
-              <a:rPr sz="900" i="1" baseline="-25000">
-                <a:latin typeface="Cambria Math"/>
-              </a:rPr>
-              <a:t>crit</a:t>
-            </a:r>
-            <a:r>
-              <a:rPr sz="1100" i="1">
-                <a:latin typeface="Cambria Math"/>
-              </a:rPr>
-              <a:t> \approx 4/\gamma</a:t>
-            </a:r>
-            <a:r>
-              <a:rPr sz="1100"/>
-              <a:t> is the first </a:t>
-            </a:r>
-            <a:r>
-              <a:rPr sz="1100" i="1">
-                <a:latin typeface="Cambria Math"/>
-              </a:rPr>
-              <a:t>λ</a:t>
-            </a:r>
-            <a:r>
-              <a:rPr sz="1100"/>
-              <a:t> where score reorder beats talent-only on sort-and-chop — not when the curve visually departs from </a:t>
-            </a:r>
-            <a:r>
-              <a:rPr sz="1100" i="1">
-                <a:latin typeface="Cambria Math"/>
-              </a:rPr>
-              <a:t>λ=0</a:t>
-            </a:r>
-            <a:r>
-              <a:rPr sz="1100"/>
-              <a:t> in coarse bins.</a:t>
             </a:r>
           </a:p>
         </p:txBody>

--- a/3-Master_Plan/re_entry/HEROs_and_PASSes/slides/auto/CHAR_Phase_B_characterization_AUTO.pptx
+++ b/3-Master_Plan/re_entry/HEROs_and_PASSes/slides/auto/CHAR_Phase_B_characterization_AUTO.pptx
@@ -3120,11 +3120,10 @@
           </a:bodyPr>
           <a:lstStyle/>
           <a:p>
-            <a:pPr>
-              <a:defRPr b="1"/>
-            </a:pPr>
-            <a:r>
-              <a:rPr sz="2000"/>
+            <a:r>
+              <a:rPr sz="2000" b="1" i="0" baseline="0">
+                <a:latin typeface="Calibri"/>
+              </a:rPr>
               <a:t>Phase B — Fake-league characterization (not curve fitting)</a:t>
             </a:r>
           </a:p>
@@ -3152,11 +3151,10 @@
           </a:bodyPr>
           <a:lstStyle/>
           <a:p>
-            <a:pPr>
-              <a:defRPr b="1"/>
-            </a:pPr>
-            <a:r>
-              <a:rPr sz="1200"/>
+            <a:r>
+              <a:rPr sz="1200" b="1" i="0" baseline="0">
+                <a:latin typeface="Calibri"/>
+              </a:rPr>
               <a:t>Knobs (mini glossary)</a:t>
             </a:r>
           </a:p>
@@ -3172,7 +3170,7 @@
         </p:nvGraphicFramePr>
         <p:xfrm>
           <a:off x="384048" y="1024128"/>
-          <a:ext cx="5806439" cy="5102352"/>
+          <a:ext cx="5806439" cy="5065776"/>
         </p:xfrm>
         <a:graphic>
           <a:graphicData uri="http://schemas.openxmlformats.org/drawingml/2006/table">
@@ -3185,18 +3183,16 @@
                 <a:gridCol w="1625803"/>
                 <a:gridCol w="3367735"/>
               </a:tblGrid>
-              <a:tr h="510235">
+              <a:tr h="506577">
                 <a:tc>
                   <a:txBody>
                     <a:bodyPr wrap="square" lIns="50800" rIns="50800" tIns="25400" bIns="25400"/>
                     <a:lstStyle/>
                     <a:p>
-                      <a:pPr>
-                        <a:defRPr sz="900" b="1">
+                      <a:r>
+                        <a:rPr sz="900" b="1" i="0" baseline="0">
                           <a:latin typeface="Calibri"/>
-                        </a:defRPr>
-                      </a:pPr>
-                      <a:r>
+                        </a:rPr>
                         <a:t>Symbol</a:t>
                       </a:r>
                     </a:p>
@@ -3212,12 +3208,10 @@
                     <a:bodyPr wrap="square" lIns="50800" rIns="50800" tIns="25400" bIns="25400"/>
                     <a:lstStyle/>
                     <a:p>
-                      <a:pPr>
-                        <a:defRPr sz="900" b="1">
+                      <a:r>
+                        <a:rPr sz="900" b="1" i="0" baseline="0">
                           <a:latin typeface="Calibri"/>
-                        </a:defRPr>
-                      </a:pPr>
-                      <a:r>
+                        </a:rPr>
                         <a:t>Plain name</a:t>
                       </a:r>
                     </a:p>
@@ -3233,12 +3227,10 @@
                     <a:bodyPr wrap="square" lIns="50800" rIns="50800" tIns="25400" bIns="25400"/>
                     <a:lstStyle/>
                     <a:p>
-                      <a:pPr>
-                        <a:defRPr sz="900" b="1">
+                      <a:r>
+                        <a:rPr sz="900" b="1" i="0" baseline="0">
                           <a:latin typeface="Calibri"/>
-                        </a:defRPr>
-                      </a:pPr>
-                      <a:r>
+                        </a:rPr>
                         <a:t>What it controls</a:t>
                       </a:r>
                     </a:p>
@@ -3250,23 +3242,17 @@
                   </a:tcPr>
                 </a:tc>
               </a:tr>
-              <a:tr h="510235">
+              <a:tr h="506577">
                 <a:tc>
                   <a:txBody>
                     <a:bodyPr wrap="square" lIns="50800" rIns="50800" tIns="25400" bIns="25400"/>
                     <a:lstStyle/>
                     <a:p>
                       <a:r>
-                        <a:rPr sz="900" i="1">
-                          <a:latin typeface="Cambria Math"/>
+                        <a:rPr sz="900" b="0" i="0" baseline="0">
+                          <a:latin typeface="Calibri"/>
                         </a:rPr>
-                        <a:t>A</a:t>
-                      </a:r>
-                      <a:r>
-                        <a:rPr sz="800" i="1" baseline="-25000">
-                          <a:latin typeface="Cambria Math"/>
-                        </a:rPr>
-                        <a:t>i</a:t>
+                        <a:t>A_{i}</a:t>
                       </a:r>
                     </a:p>
                   </a:txBody>
@@ -3277,12 +3263,10 @@
                     <a:bodyPr wrap="square" lIns="50800" rIns="50800" tIns="25400" bIns="25400"/>
                     <a:lstStyle/>
                     <a:p>
-                      <a:pPr>
-                        <a:defRPr sz="900">
+                      <a:r>
+                        <a:rPr sz="900" b="0" i="0" baseline="0">
                           <a:latin typeface="Calibri"/>
-                        </a:defRPr>
-                      </a:pPr>
-                      <a:r>
+                        </a:rPr>
                         <a:t>Player ability</a:t>
                       </a:r>
                     </a:p>
@@ -3294,12 +3278,10 @@
                     <a:bodyPr wrap="square" lIns="50800" rIns="50800" tIns="25400" bIns="25400"/>
                     <a:lstStyle/>
                     <a:p>
-                      <a:pPr>
-                        <a:defRPr sz="800">
+                      <a:r>
+                        <a:rPr sz="800" b="0" i="0" baseline="0">
                           <a:latin typeface="Calibri"/>
-                        </a:defRPr>
-                      </a:pPr>
-                      <a:r>
+                        </a:rPr>
                         <a:t>Innate talent draw — Beta(2,2) on [0,1] (539 preset)</a:t>
                       </a:r>
                     </a:p>
@@ -3307,23 +3289,17 @@
                   <a:tcPr anchor="ctr"/>
                 </a:tc>
               </a:tr>
-              <a:tr h="510235">
+              <a:tr h="506577">
                 <a:tc>
                   <a:txBody>
                     <a:bodyPr wrap="square" lIns="50800" rIns="50800" tIns="25400" bIns="25400"/>
                     <a:lstStyle/>
                     <a:p>
                       <a:r>
-                        <a:rPr sz="900" i="1">
-                          <a:latin typeface="Cambria Math"/>
+                        <a:rPr sz="900" b="0" i="0" baseline="0">
+                          <a:latin typeface="Calibri"/>
                         </a:rPr>
-                        <a:t>T</a:t>
-                      </a:r>
-                      <a:r>
-                        <a:rPr sz="800" i="1" baseline="-25000">
-                          <a:latin typeface="Cambria Math"/>
-                        </a:rPr>
-                        <a:t>j^*</a:t>
+                        <a:t>T_{j^*}</a:t>
                       </a:r>
                     </a:p>
                   </a:txBody>
@@ -3334,12 +3310,10 @@
                     <a:bodyPr wrap="square" lIns="50800" rIns="50800" tIns="25400" bIns="25400"/>
                     <a:lstStyle/>
                     <a:p>
-                      <a:pPr>
-                        <a:defRPr sz="900">
+                      <a:r>
+                        <a:rPr sz="900" b="0" i="0" baseline="0">
                           <a:latin typeface="Calibri"/>
-                        </a:defRPr>
-                      </a:pPr>
-                      <a:r>
+                        </a:rPr>
                         <a:t>Sim assignment target</a:t>
                       </a:r>
                     </a:p>
@@ -3351,36 +3325,28 @@
                     <a:bodyPr wrap="square" lIns="50800" rIns="50800" tIns="25400" bIns="25400"/>
                     <a:lstStyle/>
                     <a:p>
-                      <a:pPr>
-                        <a:defRPr sz="800">
+                      <a:r>
+                        <a:rPr sz="800" b="0" i="0" baseline="0">
                           <a:latin typeface="Calibri"/>
-                        </a:defRPr>
-                      </a:pPr>
-                      <a:r>
-                        <a:t>Synthetic iid Uniform[0,1] per team (`draw_target_means`); soft-assign attractor — not realized roster talent</a:t>
+                        </a:rPr>
+                        <a:t>Synthetic iid Uniform[0,1] per team; soft-assign attractor — not realized roster talent</a:t>
                       </a:r>
                     </a:p>
                   </a:txBody>
                   <a:tcPr anchor="ctr"/>
                 </a:tc>
               </a:tr>
-              <a:tr h="510235">
+              <a:tr h="506577">
                 <a:tc>
                   <a:txBody>
                     <a:bodyPr wrap="square" lIns="50800" rIns="50800" tIns="25400" bIns="25400"/>
                     <a:lstStyle/>
                     <a:p>
                       <a:r>
-                        <a:rPr sz="900" i="1">
-                          <a:latin typeface="Cambria Math"/>
+                        <a:rPr sz="900" b="0" i="0" baseline="0">
+                          <a:latin typeface="Calibri"/>
                         </a:rPr>
-                        <a:t>T</a:t>
-                      </a:r>
-                      <a:r>
-                        <a:rPr sz="800" i="1" baseline="-25000">
-                          <a:latin typeface="Cambria Math"/>
-                        </a:rPr>
-                        <a:t>j</a:t>
+                        <a:t>T_{j}</a:t>
                       </a:r>
                     </a:p>
                   </a:txBody>
@@ -3391,12 +3357,10 @@
                     <a:bodyPr wrap="square" lIns="50800" rIns="50800" tIns="25400" bIns="25400"/>
                     <a:lstStyle/>
                     <a:p>
-                      <a:pPr>
-                        <a:defRPr sz="900">
+                      <a:r>
+                        <a:rPr sz="900" b="0" i="0" baseline="0">
                           <a:latin typeface="Calibri"/>
-                        </a:defRPr>
-                      </a:pPr>
-                      <a:r>
+                        </a:rPr>
                         <a:t>Realized team talent</a:t>
                       </a:r>
                     </a:p>
@@ -3409,79 +3373,27 @@
                     <a:lstStyle/>
                     <a:p>
                       <a:r>
-                        <a:rPr sz="800"/>
-                        <a:t>Mean </a:t>
-                      </a:r>
-                      <a:r>
-                        <a:rPr sz="800" i="1">
-                          <a:latin typeface="Cambria Math"/>
+                        <a:rPr sz="800" b="0" i="0" baseline="0">
+                          <a:latin typeface="Calibri"/>
                         </a:rPr>
-                        <a:t>A</a:t>
-                      </a:r>
-                      <a:r>
-                        <a:rPr sz="800" i="1" baseline="-25000">
-                          <a:latin typeface="Cambria Math"/>
-                        </a:rPr>
-                        <a:t>i</a:t>
-                      </a:r>
-                      <a:r>
-                        <a:rPr sz="800"/>
-                        <a:t> on team </a:t>
-                      </a:r>
-                      <a:r>
-                        <a:rPr sz="800" i="1">
-                          <a:latin typeface="Cambria Math"/>
-                        </a:rPr>
-                        <a:t>j</a:t>
-                      </a:r>
-                      <a:r>
-                        <a:rPr sz="800"/>
-                        <a:t>'s roster after ASSIGN; empirical </a:t>
-                      </a:r>
-                      <a:r>
-                        <a:rPr sz="800" i="1">
-                          <a:latin typeface="Cambria Math"/>
-                        </a:rPr>
-                        <a:t>T</a:t>
-                      </a:r>
-                      <a:r>
-                        <a:rPr sz="800" i="1" baseline="-25000">
-                          <a:latin typeface="Cambria Math"/>
-                        </a:rPr>
-                        <a:t>jt</a:t>
-                      </a:r>
-                      <a:r>
-                        <a:rPr sz="800"/>
-                        <a:t> from </a:t>
-                      </a:r>
-                      <a:r>
-                        <a:rPr sz="800" i="1">
-                          <a:latin typeface="Cambria Math"/>
-                        </a:rPr>
-                        <a:t>\hat{A}</a:t>
-                      </a:r>
-                      <a:r>
-                        <a:rPr sz="800" i="1" baseline="-25000">
-                          <a:latin typeface="Cambria Math"/>
-                        </a:rPr>
-                        <a:t>i</a:t>
+                        <a:t>Mean A_{i} on team j roster after ASSIGN (not T_{j^*})</a:t>
                       </a:r>
                     </a:p>
                   </a:txBody>
                   <a:tcPr anchor="ctr"/>
                 </a:tc>
               </a:tr>
-              <a:tr h="510235">
+              <a:tr h="506577">
                 <a:tc>
                   <a:txBody>
                     <a:bodyPr wrap="square" lIns="50800" rIns="50800" tIns="25400" bIns="25400"/>
                     <a:lstStyle/>
                     <a:p>
                       <a:r>
-                        <a:rPr sz="900" i="1">
-                          <a:latin typeface="Cambria Math"/>
+                        <a:rPr sz="900" b="0" i="0" baseline="0">
+                          <a:latin typeface="Calibri"/>
                         </a:rPr>
-                        <a:t>ρ</a:t>
+                        <a:t>\rho</a:t>
                       </a:r>
                     </a:p>
                   </a:txBody>
@@ -3492,12 +3404,10 @@
                     <a:bodyPr wrap="square" lIns="50800" rIns="50800" tIns="25400" bIns="25400"/>
                     <a:lstStyle/>
                     <a:p>
-                      <a:pPr>
-                        <a:defRPr sz="900">
+                      <a:r>
+                        <a:rPr sz="900" b="0" i="0" baseline="0">
                           <a:latin typeface="Calibri"/>
-                        </a:defRPr>
-                      </a:pPr>
-                      <a:r>
+                        </a:rPr>
                         <a:t>Assignment assortativity</a:t>
                       </a:r>
                     </a:p>
@@ -3510,82 +3420,27 @@
                     <a:lstStyle/>
                     <a:p>
                       <a:r>
-                        <a:rPr sz="800"/>
-                        <a:t>Soft match strength: players </a:t>
-                      </a:r>
-                      <a:r>
-                        <a:rPr sz="800" i="1">
-                          <a:latin typeface="Cambria Math"/>
+                        <a:rPr sz="800" b="0" i="0" baseline="0">
+                          <a:latin typeface="Calibri"/>
                         </a:rPr>
-                        <a:t>\to</a:t>
-                      </a:r>
-                      <a:r>
-                        <a:rPr sz="800"/>
-                        <a:t> teams with </a:t>
-                      </a:r>
-                      <a:r>
-                        <a:rPr sz="800" i="1">
-                          <a:latin typeface="Cambria Math"/>
-                        </a:rPr>
-                        <a:t>T</a:t>
-                      </a:r>
-                      <a:r>
-                        <a:rPr sz="800" i="1" baseline="-25000">
-                          <a:latin typeface="Cambria Math"/>
-                        </a:rPr>
-                        <a:t>j^*</a:t>
-                      </a:r>
-                      <a:r>
-                        <a:rPr sz="800" i="1">
-                          <a:latin typeface="Cambria Math"/>
-                        </a:rPr>
-                        <a:t> ≈ A</a:t>
-                      </a:r>
-                      <a:r>
-                        <a:rPr sz="800" i="1" baseline="-25000">
-                          <a:latin typeface="Cambria Math"/>
-                        </a:rPr>
-                        <a:t>i</a:t>
+                        <a:t>Soft match strength: players \rightarrow teams with T_{j^*} \approx A_{i}</a:t>
                       </a:r>
                     </a:p>
                   </a:txBody>
                   <a:tcPr anchor="ctr"/>
                 </a:tc>
               </a:tr>
-              <a:tr h="510235">
+              <a:tr h="506577">
                 <a:tc>
                   <a:txBody>
                     <a:bodyPr wrap="square" lIns="50800" rIns="50800" tIns="25400" bIns="25400"/>
                     <a:lstStyle/>
                     <a:p>
                       <a:r>
-                        <a:rPr sz="900" i="1">
-                          <a:latin typeface="Cambria Math"/>
+                        <a:rPr sz="900" b="0" i="0" baseline="0">
+                          <a:latin typeface="Calibri"/>
                         </a:rPr>
-                        <a:t>L</a:t>
-                      </a:r>
-                      <a:r>
-                        <a:rPr sz="800" i="1" baseline="-25000">
-                          <a:latin typeface="Cambria Math"/>
-                        </a:rPr>
-                        <a:t>C</a:t>
-                      </a:r>
-                    </a:p>
-                  </a:txBody>
-                  <a:tcPr anchor="ctr"/>
-                </a:tc>
-                <a:tc>
-                  <a:txBody>
-                    <a:bodyPr wrap="square" lIns="50800" rIns="50800" tIns="25400" bIns="25400"/>
-                    <a:lstStyle/>
-                    <a:p>
-                      <a:pPr>
-                        <a:defRPr sz="900">
-                          <a:latin typeface="Calibri"/>
-                        </a:defRPr>
-                      </a:pPr>
-                      <a:r>
-                        <a:t>Congestion measure</a:t>
+                        <a:t>L_C</a:t>
                       </a:r>
                     </a:p>
                   </a:txBody>
@@ -3597,57 +3452,10 @@
                     <a:lstStyle/>
                     <a:p>
                       <a:r>
-                        <a:rPr sz="800"/>
-                        <a:t>LOO peer viability — deck uses smooth </a:t>
-                      </a:r>
-                      <a:r>
-                        <a:rPr sz="800" i="1">
-                          <a:latin typeface="Cambria Math"/>
+                        <a:rPr sz="900" b="0" i="0" baseline="0">
+                          <a:latin typeface="Calibri"/>
                         </a:rPr>
-                        <a:t>σ</a:t>
-                      </a:r>
-                      <a:r>
-                        <a:rPr sz="800"/>
-                        <a:t>; code also has hard share (</a:t>
-                      </a:r>
-                      <a:r>
-                        <a:rPr sz="800" i="1">
-                          <a:latin typeface="Cambria Math"/>
-                        </a:rPr>
-                        <a:t>A</a:t>
-                      </a:r>
-                      <a:r>
-                        <a:rPr sz="800" i="1" baseline="-25000">
-                          <a:latin typeface="Cambria Math"/>
-                        </a:rPr>
-                        <a:t>j</a:t>
-                      </a:r>
-                      <a:r>
-                        <a:rPr sz="800" i="1">
-                          <a:latin typeface="Cambria Math"/>
-                        </a:rPr>
-                        <a:t>&gt;\theta</a:t>
-                      </a:r>
-                      <a:r>
-                        <a:rPr sz="800"/>
-                        <a:t>)</a:t>
-                      </a:r>
-                    </a:p>
-                  </a:txBody>
-                  <a:tcPr anchor="ctr"/>
-                </a:tc>
-              </a:tr>
-              <a:tr h="510235">
-                <a:tc>
-                  <a:txBody>
-                    <a:bodyPr wrap="square" lIns="50800" rIns="50800" tIns="25400" bIns="25400"/>
-                    <a:lstStyle/>
-                    <a:p>
-                      <a:r>
-                        <a:rPr sz="900" i="1">
-                          <a:latin typeface="Cambria Math"/>
-                        </a:rPr>
-                        <a:t>λ</a:t>
+                        <a:t>Team congestion</a:t>
                       </a:r>
                     </a:p>
                   </a:txBody>
@@ -3658,12 +3466,42 @@
                     <a:bodyPr wrap="square" lIns="50800" rIns="50800" tIns="25400" bIns="25400"/>
                     <a:lstStyle/>
                     <a:p>
-                      <a:pPr>
-                        <a:defRPr sz="900">
+                      <a:r>
+                        <a:rPr sz="800" b="0" i="0" baseline="0">
                           <a:latin typeface="Calibri"/>
-                        </a:defRPr>
-                      </a:pPr>
+                        </a:rPr>
+                        <a:t>Team-level mean \sigma(\gamma(A_{j}-\theta)) on roster — same L_C for all players on team j</a:t>
+                      </a:r>
+                    </a:p>
+                  </a:txBody>
+                  <a:tcPr anchor="ctr"/>
+                </a:tc>
+              </a:tr>
+              <a:tr h="506577">
+                <a:tc>
+                  <a:txBody>
+                    <a:bodyPr wrap="square" lIns="50800" rIns="50800" tIns="25400" bIns="25400"/>
+                    <a:lstStyle/>
+                    <a:p>
                       <a:r>
+                        <a:rPr sz="900" b="0" i="0" baseline="0">
+                          <a:latin typeface="Calibri"/>
+                        </a:rPr>
+                        <a:t>\lambda</a:t>
+                      </a:r>
+                    </a:p>
+                  </a:txBody>
+                  <a:tcPr anchor="ctr"/>
+                </a:tc>
+                <a:tc>
+                  <a:txBody>
+                    <a:bodyPr wrap="square" lIns="50800" rIns="50800" tIns="25400" bIns="25400"/>
+                    <a:lstStyle/>
+                    <a:p>
+                      <a:r>
+                        <a:rPr sz="900" b="0" i="0" baseline="0">
+                          <a:latin typeface="Calibri"/>
+                        </a:rPr>
                         <a:t>Congestion weight in score</a:t>
                       </a:r>
                     </a:p>
@@ -3676,39 +3514,25 @@
                     <a:lstStyle/>
                     <a:p>
                       <a:r>
-                        <a:rPr sz="800"/>
-                        <a:t>How hard </a:t>
-                      </a:r>
-                      <a:r>
-                        <a:rPr sz="800" i="1">
-                          <a:latin typeface="Cambria Math"/>
+                        <a:rPr sz="800" b="0" i="0" baseline="0">
+                          <a:latin typeface="Calibri"/>
                         </a:rPr>
-                        <a:t>L</a:t>
-                      </a:r>
-                      <a:r>
-                        <a:rPr sz="800" i="1" baseline="-25000">
-                          <a:latin typeface="Cambria Math"/>
-                        </a:rPr>
-                        <a:t>C</a:t>
-                      </a:r>
-                      <a:r>
-                        <a:rPr sz="800"/>
-                        <a:t> penalizes ranking — not congestion itself</a:t>
+                        <a:t>How hard L_C penalizes ranking — not congestion itself</a:t>
                       </a:r>
                     </a:p>
                   </a:txBody>
                   <a:tcPr anchor="ctr"/>
                 </a:tc>
               </a:tr>
-              <a:tr h="510235">
+              <a:tr h="506577">
                 <a:tc>
                   <a:txBody>
                     <a:bodyPr wrap="square" lIns="50800" rIns="50800" tIns="25400" bIns="25400"/>
                     <a:lstStyle/>
                     <a:p>
                       <a:r>
-                        <a:rPr sz="900" i="1">
-                          <a:latin typeface="Cambria Math"/>
+                        <a:rPr sz="900" b="0" i="0" baseline="0">
+                          <a:latin typeface="Calibri"/>
                         </a:rPr>
                         <a:t>\theta</a:t>
                       </a:r>
@@ -3721,12 +3545,10 @@
                     <a:bodyPr wrap="square" lIns="50800" rIns="50800" tIns="25400" bIns="25400"/>
                     <a:lstStyle/>
                     <a:p>
-                      <a:pPr>
-                        <a:defRPr sz="900">
+                      <a:r>
+                        <a:rPr sz="900" b="0" i="0" baseline="0">
                           <a:latin typeface="Calibri"/>
-                        </a:defRPr>
-                      </a:pPr>
-                      <a:r>
+                        </a:rPr>
                         <a:t>Viability cutline</a:t>
                       </a:r>
                     </a:p>
@@ -3738,28 +3560,26 @@
                     <a:bodyPr wrap="square" lIns="50800" rIns="50800" tIns="25400" bIns="25400"/>
                     <a:lstStyle/>
                     <a:p>
-                      <a:pPr>
-                        <a:defRPr sz="800">
+                      <a:r>
+                        <a:rPr sz="800" b="0" i="0" baseline="0">
                           <a:latin typeface="Calibri"/>
-                        </a:defRPr>
-                      </a:pPr>
-                      <a:r>
-                        <a:t>Center of the sigmoid</a:t>
+                        </a:rPr>
+                        <a:t>Center of the sigmoid (F_A^{-1}(1-K/N) in k_over_n mode)</a:t>
                       </a:r>
                     </a:p>
                   </a:txBody>
                   <a:tcPr anchor="ctr"/>
                 </a:tc>
               </a:tr>
-              <a:tr h="510235">
+              <a:tr h="506577">
                 <a:tc>
                   <a:txBody>
                     <a:bodyPr wrap="square" lIns="50800" rIns="50800" tIns="25400" bIns="25400"/>
                     <a:lstStyle/>
                     <a:p>
                       <a:r>
-                        <a:rPr sz="900" i="1">
-                          <a:latin typeface="Cambria Math"/>
+                        <a:rPr sz="900" b="0" i="0" baseline="0">
+                          <a:latin typeface="Calibri"/>
                         </a:rPr>
                         <a:t>\gamma</a:t>
                       </a:r>
@@ -3772,12 +3592,10 @@
                     <a:bodyPr wrap="square" lIns="50800" rIns="50800" tIns="25400" bIns="25400"/>
                     <a:lstStyle/>
                     <a:p>
-                      <a:pPr>
-                        <a:defRPr sz="900">
+                      <a:r>
+                        <a:rPr sz="900" b="0" i="0" baseline="0">
                           <a:latin typeface="Calibri"/>
-                        </a:defRPr>
-                      </a:pPr>
-                      <a:r>
+                        </a:rPr>
                         <a:t>Sigmoid sharpness</a:t>
                       </a:r>
                     </a:p>
@@ -3790,29 +3608,25 @@
                     <a:lstStyle/>
                     <a:p>
                       <a:r>
-                        <a:rPr sz="800"/>
-                        <a:t>Steepness of viability step around </a:t>
-                      </a:r>
-                      <a:r>
-                        <a:rPr sz="800" i="1">
-                          <a:latin typeface="Cambria Math"/>
+                        <a:rPr sz="800" b="0" i="0" baseline="0">
+                          <a:latin typeface="Calibri"/>
                         </a:rPr>
-                        <a:t>\theta</a:t>
+                        <a:t>Steepness of viability step around \theta</a:t>
                       </a:r>
                     </a:p>
                   </a:txBody>
                   <a:tcPr anchor="ctr"/>
                 </a:tc>
               </a:tr>
-              <a:tr h="510237">
+              <a:tr h="506583">
                 <a:tc>
                   <a:txBody>
                     <a:bodyPr wrap="square" lIns="50800" rIns="50800" tIns="25400" bIns="25400"/>
                     <a:lstStyle/>
                     <a:p>
                       <a:r>
-                        <a:rPr sz="900" i="1">
-                          <a:latin typeface="Cambria Math"/>
+                        <a:rPr sz="900" b="0" i="0" baseline="0">
+                          <a:latin typeface="Calibri"/>
                         </a:rPr>
                         <a:t>K/N</a:t>
                       </a:r>
@@ -3825,12 +3639,10 @@
                     <a:bodyPr wrap="square" lIns="50800" rIns="50800" tIns="25400" bIns="25400"/>
                     <a:lstStyle/>
                     <a:p>
-                      <a:pPr>
-                        <a:defRPr sz="900">
+                      <a:r>
+                        <a:rPr sz="900" b="0" i="0" baseline="0">
                           <a:latin typeface="Calibri"/>
-                        </a:defRPr>
-                      </a:pPr>
-                      <a:r>
+                        </a:rPr>
                         <a:t>Selectivity</a:t>
                       </a:r>
                     </a:p>
@@ -3843,18 +3655,10 @@
                     <a:lstStyle/>
                     <a:p>
                       <a:r>
-                        <a:rPr sz="800"/>
-                        <a:t>Fraction of league selected (</a:t>
-                      </a:r>
-                      <a:r>
-                        <a:rPr sz="800" i="1">
-                          <a:latin typeface="Cambria Math"/>
+                        <a:rPr sz="800" b="0" i="0" baseline="0">
+                          <a:latin typeface="Calibri"/>
                         </a:rPr>
-                        <a:t>K \div N</a:t>
-                      </a:r>
-                      <a:r>
-                        <a:rPr sz="800"/>
-                        <a:t>)</a:t>
+                        <a:t>Fraction of league selected (K \div N)</a:t>
                       </a:r>
                     </a:p>
                   </a:txBody>
@@ -3874,7 +3678,7 @@
         <p:spPr>
           <a:xfrm>
             <a:off x="6446520" y="749808"/>
-            <a:ext cx="5361127" cy="1874519"/>
+            <a:ext cx="5361127" cy="256032"/>
           </a:xfrm>
           <a:prstGeom prst="rect">
             <a:avLst/>
@@ -3882,315 +3686,16 @@
           <a:noFill/>
         </p:spPr>
         <p:txBody>
-          <a:bodyPr wrap="square">
+          <a:bodyPr wrap="none">
             <a:spAutoFit/>
           </a:bodyPr>
           <a:lstStyle/>
           <a:p>
-            <a:pPr>
-              <a:spcBef>
-                <a:spcPts val="0"/>
-              </a:spcBef>
-              <a:spcAft>
-                <a:spcPts val="0"/>
-              </a:spcAft>
-              <a:defRPr b="1"/>
-            </a:pPr>
-            <a:r>
-              <a:rPr sz="900"/>
-              <a:t>Not curve fitting: which rules \emph{bend} synthetic selection curves — not NCAA fit yet.</a:t>
-            </a:r>
-          </a:p>
-          <a:p>
-            <a:pPr>
-              <a:spcBef>
-                <a:spcPts val="0"/>
-              </a:spcBef>
-              <a:spcAft>
-                <a:spcPts val="0"/>
-              </a:spcAft>
-            </a:pPr>
-            <a:r>
-              <a:rPr sz="900"/>
-              <a:t>Three steps: ASSIGN (</a:t>
-            </a:r>
-            <a:r>
-              <a:rPr sz="900" i="1">
-                <a:latin typeface="Cambria Math"/>
-              </a:rPr>
-              <a:t>ρ</a:t>
-            </a:r>
-            <a:r>
-              <a:rPr sz="900"/>
-              <a:t>) </a:t>
-            </a:r>
-            <a:r>
-              <a:rPr sz="900" i="1">
-                <a:latin typeface="Cambria Math"/>
-              </a:rPr>
-              <a:t>\to</a:t>
-            </a:r>
-            <a:r>
-              <a:rPr sz="900"/>
-              <a:t> SCORE (</a:t>
-            </a:r>
-            <a:r>
-              <a:rPr sz="900" i="1">
-                <a:latin typeface="Cambria Math"/>
-              </a:rPr>
-              <a:t>S</a:t>
-            </a:r>
-            <a:r>
-              <a:rPr sz="800" i="1" baseline="-25000">
-                <a:latin typeface="Cambria Math"/>
-              </a:rPr>
-              <a:t>i</a:t>
-            </a:r>
-            <a:r>
-              <a:rPr sz="900" i="1">
-                <a:latin typeface="Cambria Math"/>
-              </a:rPr>
-              <a:t> = A</a:t>
-            </a:r>
-            <a:r>
-              <a:rPr sz="800" i="1" baseline="-25000">
-                <a:latin typeface="Cambria Math"/>
-              </a:rPr>
-              <a:t>i</a:t>
-            </a:r>
-            <a:r>
-              <a:rPr sz="900" i="1">
-                <a:latin typeface="Cambria Math"/>
-              </a:rPr>
-              <a:t> - λ L</a:t>
-            </a:r>
-            <a:r>
-              <a:rPr sz="800" i="1" baseline="-25000">
-                <a:latin typeface="Cambria Math"/>
-              </a:rPr>
-              <a:t>C</a:t>
-            </a:r>
-            <a:r>
-              <a:rPr sz="900"/>
-              <a:t>) </a:t>
-            </a:r>
-            <a:r>
-              <a:rPr sz="900" i="1">
-                <a:latin typeface="Cambria Math"/>
-              </a:rPr>
-              <a:t>\to</a:t>
-            </a:r>
-            <a:r>
-              <a:rPr sz="900"/>
-              <a:t> SELECT (top-</a:t>
-            </a:r>
-            <a:r>
-              <a:rPr sz="900" i="1">
-                <a:latin typeface="Cambria Math"/>
-              </a:rPr>
-              <a:t>K</a:t>
-            </a:r>
-            <a:r>
-              <a:rPr sz="900"/>
-              <a:t>); then VISUALIZE by pool-mean bin.</a:t>
-            </a:r>
-          </a:p>
-          <a:p>
-            <a:pPr>
-              <a:spcBef>
-                <a:spcPts val="0"/>
-              </a:spcBef>
-              <a:spcAft>
-                <a:spcPts val="0"/>
-              </a:spcAft>
-            </a:pPr>
-            <a:r>
-              <a:rPr sz="900" i="1">
-                <a:latin typeface="Cambria Math"/>
-              </a:rPr>
-              <a:t>L</a:t>
-            </a:r>
-            <a:r>
-              <a:rPr sz="800" i="1" baseline="-25000">
-                <a:latin typeface="Cambria Math"/>
-              </a:rPr>
-              <a:t>C</a:t>
-            </a:r>
-            <a:r>
-              <a:rPr sz="900"/>
-              <a:t> in this deck: \texttt{crowding\_smooth} (mean </a:t>
-            </a:r>
-            <a:r>
-              <a:rPr sz="900" i="1">
-                <a:latin typeface="Cambria Math"/>
-              </a:rPr>
-              <a:t>σ</a:t>
-            </a:r>
-            <a:r>
-              <a:rPr sz="900"/>
-              <a:t>). Code also builds hard </a:t>
-            </a:r>
-            <a:r>
-              <a:rPr sz="900" i="1">
-                <a:latin typeface="Cambria Math"/>
-              </a:rPr>
-              <a:t>L</a:t>
-            </a:r>
-            <a:r>
-              <a:rPr sz="800" i="1" baseline="-25000">
-                <a:latin typeface="Cambria Math"/>
-              </a:rPr>
-              <a:t>C</a:t>
-            </a:r>
-            <a:r>
-              <a:rPr sz="900"/>
-              <a:t> = LOO share with </a:t>
-            </a:r>
-            <a:r>
-              <a:rPr sz="900" i="1">
-                <a:latin typeface="Cambria Math"/>
-              </a:rPr>
-              <a:t>A</a:t>
-            </a:r>
-            <a:r>
-              <a:rPr sz="800" i="1" baseline="-25000">
-                <a:latin typeface="Cambria Math"/>
-              </a:rPr>
-              <a:t>j</a:t>
-            </a:r>
-            <a:r>
-              <a:rPr sz="900" i="1">
-                <a:latin typeface="Cambria Math"/>
-              </a:rPr>
-              <a:t> &gt; \theta</a:t>
-            </a:r>
-            <a:r>
-              <a:rPr sz="900"/>
-              <a:t> — not shown here.</a:t>
-            </a:r>
-          </a:p>
-          <a:p>
-            <a:pPr>
-              <a:spcBef>
-                <a:spcPts val="0"/>
-              </a:spcBef>
-              <a:spcAft>
-                <a:spcPts val="0"/>
-              </a:spcAft>
-            </a:pPr>
-            <a:r>
-              <a:rPr sz="900"/>
-              <a:t>One-at-a-time (OAT): each slide moves one knob; other settings stay at benchmark values.</a:t>
-            </a:r>
-          </a:p>
-          <a:p>
-            <a:pPr>
-              <a:spcBef>
-                <a:spcPts val="0"/>
-              </a:spcBef>
-              <a:spcAft>
-                <a:spcPts val="0"/>
-              </a:spcAft>
-            </a:pPr>
-            <a:r>
-              <a:rPr sz="900"/>
-              <a:t>Seed 42 on stochastic steps: draw </a:t>
-            </a:r>
-            <a:r>
-              <a:rPr sz="900" i="1">
-                <a:latin typeface="Cambria Math"/>
-              </a:rPr>
-              <a:t>A</a:t>
-            </a:r>
-            <a:r>
-              <a:rPr sz="800" i="1" baseline="-25000">
-                <a:latin typeface="Cambria Math"/>
-              </a:rPr>
-              <a:t>i</a:t>
-            </a:r>
-            <a:r>
-              <a:rPr sz="900"/>
-              <a:t>, </a:t>
-            </a:r>
-            <a:r>
-              <a:rPr sz="900" i="1">
-                <a:latin typeface="Cambria Math"/>
-              </a:rPr>
-              <a:t>T</a:t>
-            </a:r>
-            <a:r>
-              <a:rPr sz="800" i="1" baseline="-25000">
-                <a:latin typeface="Cambria Math"/>
-              </a:rPr>
-              <a:t>j^*</a:t>
-            </a:r>
-            <a:r>
-              <a:rPr sz="900"/>
-              <a:t>; soft-</a:t>
-            </a:r>
-            <a:r>
-              <a:rPr sz="900" i="1">
-                <a:latin typeface="Cambria Math"/>
-              </a:rPr>
-              <a:t>ρ</a:t>
-            </a:r>
-            <a:r>
-              <a:rPr sz="900"/>
-              <a:t> assignment. Score, top-</a:t>
-            </a:r>
-            <a:r>
-              <a:rPr sz="900" i="1">
-                <a:latin typeface="Cambria Math"/>
-              </a:rPr>
-              <a:t>K</a:t>
-            </a:r>
-            <a:r>
-              <a:rPr sz="900"/>
-              <a:t>, bins are deterministic.</a:t>
-            </a:r>
-          </a:p>
-          <a:p>
-            <a:pPr>
-              <a:spcBef>
-                <a:spcPts val="0"/>
-              </a:spcBef>
-              <a:spcAft>
-                <a:spcPts val="0"/>
-              </a:spcAft>
-            </a:pPr>
-            <a:r>
-              <a:rPr sz="900"/>
-              <a:t>League: </a:t>
-            </a:r>
-            <a:r>
-              <a:rPr sz="900" i="1">
-                <a:latin typeface="Cambria Math"/>
-              </a:rPr>
-              <a:t>N=5600</a:t>
-            </a:r>
-            <a:r>
-              <a:rPr sz="900"/>
-              <a:t>, </a:t>
-            </a:r>
-            <a:r>
-              <a:rPr sz="900" i="1">
-                <a:latin typeface="Cambria Math"/>
-              </a:rPr>
-              <a:t>K=560</a:t>
-            </a:r>
-            <a:r>
-              <a:rPr sz="900"/>
-              <a:t>, </a:t>
-            </a:r>
-            <a:r>
-              <a:rPr sz="900" i="1">
-                <a:latin typeface="Cambria Math"/>
-              </a:rPr>
-              <a:t>K/N=10%</a:t>
-            </a:r>
-            <a:r>
-              <a:rPr sz="900"/>
-              <a:t> (539 preset).</a:t>
+            <a:r>
+              <a:rPr sz="1100" b="1" i="0" baseline="0">
+                <a:latin typeface="Calibri"/>
+              </a:rPr>
+              <a:t>How to read this deck</a:t>
             </a:r>
           </a:p>
         </p:txBody>
@@ -4203,8 +3708,8 @@
         </p:nvSpPr>
         <p:spPr>
           <a:xfrm>
-            <a:off x="6446520" y="2660903"/>
-            <a:ext cx="5361127" cy="1417320"/>
+            <a:off x="6446520" y="1005840"/>
+            <a:ext cx="5361127" cy="1618487"/>
           </a:xfrm>
           <a:prstGeom prst="rect">
             <a:avLst/>
@@ -4218,211 +3723,86 @@
           <a:lstStyle/>
           <a:p>
             <a:pPr>
-              <a:spcBef>
-                <a:spcPts val="0"/>
-              </a:spcBef>
-              <a:spcAft>
-                <a:spcPts val="0"/>
-              </a:spcAft>
-              <a:defRPr b="1"/>
-            </a:pPr>
-            <a:r>
-              <a:rPr sz="900" i="1">
-                <a:latin typeface="Cambria Math"/>
-              </a:rPr>
-              <a:t>A</a:t>
-            </a:r>
-            <a:r>
-              <a:rPr sz="800" i="1" baseline="-25000">
-                <a:latin typeface="Cambria Math"/>
-              </a:rPr>
-              <a:t>i</a:t>
-            </a:r>
-            <a:r>
-              <a:rPr sz="900"/>
-              <a:t>: Beta(2,2) on [0,1] — \texttt{SELECTION\_539\_ABILITY\_DRAW}</a:t>
-            </a:r>
-          </a:p>
-          <a:p>
-            <a:pPr>
-              <a:spcBef>
-                <a:spcPts val="0"/>
-              </a:spcBef>
-              <a:spcAft>
-                <a:spcPts val="0"/>
-              </a:spcAft>
-            </a:pPr>
-            <a:r>
-              <a:rPr sz="900" i="1">
-                <a:latin typeface="Cambria Math"/>
-              </a:rPr>
-              <a:t>T</a:t>
-            </a:r>
-            <a:r>
-              <a:rPr sz="800" i="1" baseline="-25000">
-                <a:latin typeface="Cambria Math"/>
-              </a:rPr>
-              <a:t>j^*</a:t>
-            </a:r>
-            <a:r>
-              <a:rPr sz="900"/>
-              <a:t>: Uniform[0,1] iid per team — \texttt{draw\_target\_means}; synthetic assignment targets, not NCAA roster data</a:t>
-            </a:r>
-          </a:p>
-          <a:p>
-            <a:pPr>
-              <a:spcBef>
-                <a:spcPts val="0"/>
-              </a:spcBef>
-              <a:spcAft>
-                <a:spcPts val="0"/>
-              </a:spcAft>
-            </a:pPr>
-            <a:r>
-              <a:rPr sz="900" i="1">
-                <a:latin typeface="Cambria Math"/>
-              </a:rPr>
-              <a:t>T</a:t>
-            </a:r>
-            <a:r>
-              <a:rPr sz="800" i="1" baseline="-25000">
-                <a:latin typeface="Cambria Math"/>
-              </a:rPr>
-              <a:t>j</a:t>
-            </a:r>
-            <a:r>
-              <a:rPr sz="900"/>
-              <a:t>: realized roster mean after ASSIGN — not drawn; Sketch A 2D </a:t>
-            </a:r>
-            <a:r>
-              <a:rPr sz="900" i="1">
-                <a:latin typeface="Cambria Math"/>
-              </a:rPr>
-              <a:t>y</a:t>
-            </a:r>
-            <a:r>
-              <a:rPr sz="900"/>
-              <a:t>-axis</a:t>
-            </a:r>
-          </a:p>
-          <a:p>
-            <a:pPr>
-              <a:spcBef>
-                <a:spcPts val="0"/>
-              </a:spcBef>
-              <a:spcAft>
-                <a:spcPts val="0"/>
-              </a:spcAft>
-            </a:pPr>
-            <a:r>
-              <a:rPr sz="900" i="1">
-                <a:latin typeface="Cambria Math"/>
-              </a:rPr>
-              <a:t>λ=0.55</a:t>
-            </a:r>
-            <a:r>
-              <a:rPr sz="900"/>
-              <a:t> — \texttt{tier1\_539\_reference\_settings.json} / playground default</a:t>
-            </a:r>
-          </a:p>
-          <a:p>
-            <a:pPr>
-              <a:spcBef>
-                <a:spcPts val="0"/>
-              </a:spcBef>
-              <a:spcAft>
-                <a:spcPts val="0"/>
-              </a:spcAft>
-            </a:pPr>
-            <a:r>
-              <a:rPr sz="900" i="1">
-                <a:latin typeface="Cambria Math"/>
-              </a:rPr>
-              <a:t>\theta=0.72</a:t>
-            </a:r>
-            <a:r>
-              <a:rPr sz="900"/>
-              <a:t>, </a:t>
-            </a:r>
-            <a:r>
-              <a:rPr sz="900" i="1">
-                <a:latin typeface="Cambria Math"/>
-              </a:rPr>
-              <a:t>\gamma=10</a:t>
-            </a:r>
-            <a:r>
-              <a:rPr sz="900"/>
-              <a:t> — same 539 reference JSON</a:t>
-            </a:r>
-          </a:p>
-          <a:p>
-            <a:pPr>
-              <a:spcBef>
-                <a:spcPts val="0"/>
-              </a:spcBef>
-              <a:spcAft>
-                <a:spcPts val="0"/>
-              </a:spcAft>
-            </a:pPr>
-            <a:r>
-              <a:rPr sz="900" i="1">
-                <a:latin typeface="Cambria Math"/>
-              </a:rPr>
-              <a:t>ρ=8</a:t>
-            </a:r>
-            <a:r>
-              <a:rPr sz="900"/>
-              <a:t> — gallery fixed assign for </a:t>
-            </a:r>
-            <a:r>
-              <a:rPr sz="900" i="1">
-                <a:latin typeface="Cambria Math"/>
-              </a:rPr>
-              <a:t>λ</a:t>
-            </a:r>
-            <a:r>
-              <a:rPr sz="900"/>
-              <a:t> / </a:t>
-            </a:r>
-            <a:r>
-              <a:rPr sz="900" i="1">
-                <a:latin typeface="Cambria Math"/>
-              </a:rPr>
-              <a:t>\theta</a:t>
-            </a:r>
-            <a:r>
-              <a:rPr sz="900"/>
-              <a:t> slides (moderate-high mixing; not a 539 JSON field)</a:t>
-            </a:r>
-          </a:p>
-          <a:p>
-            <a:pPr>
-              <a:spcBef>
-                <a:spcPts val="0"/>
-              </a:spcBef>
-              <a:spcAft>
-                <a:spcPts val="0"/>
-              </a:spcAft>
-            </a:pPr>
-            <a:r>
-              <a:rPr sz="900" i="1">
-                <a:latin typeface="Cambria Math"/>
-              </a:rPr>
-              <a:t>K/N=10%</a:t>
-            </a:r>
-            <a:r>
-              <a:rPr sz="900"/>
-              <a:t> — characterization default (MBB draft </a:t>
-            </a:r>
-            <a:r>
-              <a:rPr sz="900" i="1">
-                <a:latin typeface="Cambria Math"/>
-              </a:rPr>
-              <a:t>≈</a:t>
-            </a:r>
-            <a:r>
-              <a:rPr sz="900"/>
-              <a:t> 1% is a separate calibration point)</a:t>
+              <a:buChar char="•"/>
+              <a:lnSpc>
+                <a:spcPct val="150000"/>
+              </a:lnSpc>
+            </a:pPr>
+            <a:r>
+              <a:rPr sz="1000" b="0" i="0" baseline="0">
+                <a:latin typeface="Calibri"/>
+              </a:rPr>
+              <a:t>  Not curve fitting: which rules bend synthetic selection curves — not NCAA fit yet.</a:t>
+            </a:r>
+          </a:p>
+          <a:p>
+            <a:pPr>
+              <a:buChar char="•"/>
+              <a:lnSpc>
+                <a:spcPct val="150000"/>
+              </a:lnSpc>
+            </a:pPr>
+            <a:r>
+              <a:rPr sz="1000" b="0" i="0" baseline="0">
+                <a:latin typeface="Calibri"/>
+              </a:rPr>
+              <a:t>  Three steps: ASSIGN (\rho) \rightarrow SCORE (S_i = A_i - \lambda L_C) \rightarrow SELECT (top-K); then VISUALIZE by pool-mean bin.</a:t>
+            </a:r>
+          </a:p>
+          <a:p>
+            <a:pPr>
+              <a:buChar char="•"/>
+              <a:lnSpc>
+                <a:spcPct val="150000"/>
+              </a:lnSpc>
+            </a:pPr>
+            <a:r>
+              <a:rPr sz="1000" b="0" i="0" baseline="0">
+                <a:latin typeface="Calibri"/>
+              </a:rPr>
+              <a:t>  L_C in this deck: team smooth (crowding_smooth_team) — mean peer viability over the full roster.</a:t>
+            </a:r>
+          </a:p>
+          <a:p>
+            <a:pPr>
+              <a:buChar char="•"/>
+              <a:lnSpc>
+                <a:spcPct val="150000"/>
+              </a:lnSpc>
+            </a:pPr>
+            <a:r>
+              <a:rPr sz="1000" b="0" i="0" baseline="0">
+                <a:latin typeface="Calibri"/>
+              </a:rPr>
+              <a:t>  One-at-a-time (OAT): each slide moves one knob; other settings stay at benchmark values.</a:t>
+            </a:r>
+          </a:p>
+          <a:p>
+            <a:pPr>
+              <a:buChar char="•"/>
+              <a:lnSpc>
+                <a:spcPct val="150000"/>
+              </a:lnSpc>
+            </a:pPr>
+            <a:r>
+              <a:rPr sz="1000" b="0" i="0" baseline="0">
+                <a:latin typeface="Calibri"/>
+              </a:rPr>
+              <a:t>  Seed 42 on stochastic steps: draw A_i, T_{j^*}; soft-\rho assignment. Score, top-K, bins are deterministic.</a:t>
+            </a:r>
+          </a:p>
+          <a:p>
+            <a:pPr>
+              <a:buChar char="•"/>
+              <a:lnSpc>
+                <a:spcPct val="150000"/>
+              </a:lnSpc>
+            </a:pPr>
+            <a:r>
+              <a:rPr sz="1000" b="0" i="0" baseline="0">
+                <a:latin typeface="Calibri"/>
+              </a:rPr>
+              <a:t>  League: N=5600, K=560, K/N=10% (539 preset).</a:t>
             </a:r>
           </a:p>
         </p:txBody>
@@ -4435,8 +3815,8 @@
         </p:nvSpPr>
         <p:spPr>
           <a:xfrm>
-            <a:off x="6446520" y="4114799"/>
-            <a:ext cx="5361127" cy="1975105"/>
+            <a:off x="6446520" y="2660903"/>
+            <a:ext cx="5361127" cy="256032"/>
           </a:xfrm>
           <a:prstGeom prst="rect">
             <a:avLst/>
@@ -4444,51 +3824,16 @@
           <a:noFill/>
         </p:spPr>
         <p:txBody>
-          <a:bodyPr wrap="square">
+          <a:bodyPr wrap="none">
             <a:spAutoFit/>
           </a:bodyPr>
           <a:lstStyle/>
           <a:p>
-            <a:pPr>
-              <a:spcBef>
-                <a:spcPts val="0"/>
-              </a:spcBef>
-              <a:spcAft>
-                <a:spcPts val="0"/>
-              </a:spcAft>
-              <a:defRPr b="1"/>
-            </a:pPr>
-            <a:r>
-              <a:rPr sz="900"/>
-              <a:t>Real hero: draft rate vs \textbf{poolq\_loo} (teammate quality, leave-one-out) — a \textbf{bend} at the top bins.</a:t>
-            </a:r>
-          </a:p>
-          <a:p>
-            <a:pPr>
-              <a:spcBef>
-                <a:spcPts val="0"/>
-              </a:spcBef>
-              <a:spcAft>
-                <a:spcPts val="0"/>
-              </a:spcAft>
-            </a:pPr>
-            <a:r>
-              <a:rPr sz="900"/>
-              <a:t>This deck: fraction selected vs \textbf{pool mean} in a fake league — same \emph{kind} of question, different axis and league.</a:t>
-            </a:r>
-          </a:p>
-          <a:p>
-            <a:pPr>
-              <a:spcBef>
-                <a:spcPts val="0"/>
-              </a:spcBef>
-              <a:spcAft>
-                <a:spcPts val="0"/>
-              </a:spcAft>
-            </a:pPr>
-            <a:r>
-              <a:rPr sz="900"/>
-              <a:t>Benchmarks anchor to the Alex 539 playground track so sim slides stay comparable; we have \textbf{not} re-fit those numbers to NCAA data in Phase B.</a:t>
+            <a:r>
+              <a:rPr sz="1100" b="1" i="0" baseline="0">
+                <a:latin typeface="Calibri"/>
+              </a:rPr>
+              <a:t>Benchmark values (while sweeping other knobs)</a:t>
             </a:r>
           </a:p>
         </p:txBody>
@@ -4501,8 +3846,8 @@
         </p:nvSpPr>
         <p:spPr>
           <a:xfrm>
-            <a:off x="384048" y="6126480"/>
-            <a:ext cx="11423599" cy="347472"/>
+            <a:off x="6446520" y="2916935"/>
+            <a:ext cx="5361127" cy="1161288"/>
           </a:xfrm>
           <a:prstGeom prst="rect">
             <a:avLst/>
@@ -4510,17 +3855,248 @@
           <a:noFill/>
         </p:spPr>
         <p:txBody>
+          <a:bodyPr wrap="square">
+            <a:spAutoFit/>
+          </a:bodyPr>
+          <a:lstStyle/>
+          <a:p>
+            <a:pPr>
+              <a:buChar char="•"/>
+              <a:lnSpc>
+                <a:spcPct val="150000"/>
+              </a:lnSpc>
+            </a:pPr>
+            <a:r>
+              <a:rPr sz="1000" b="0" i="0" baseline="0">
+                <a:latin typeface="Calibri"/>
+              </a:rPr>
+              <a:t>  A_i: Beta(2,2) on [0,1] — SELECTION_539_ABILITY_DRAW</a:t>
+            </a:r>
+          </a:p>
+          <a:p>
+            <a:pPr>
+              <a:buChar char="•"/>
+              <a:lnSpc>
+                <a:spcPct val="150000"/>
+              </a:lnSpc>
+            </a:pPr>
+            <a:r>
+              <a:rPr sz="1000" b="0" i="0" baseline="0">
+                <a:latin typeface="Calibri"/>
+              </a:rPr>
+              <a:t>  T_{j^*}: Uniform[0,1] iid per team — draw_target_means; synthetic targets, not NCAA data</a:t>
+            </a:r>
+          </a:p>
+          <a:p>
+            <a:pPr>
+              <a:buChar char="•"/>
+              <a:lnSpc>
+                <a:spcPct val="150000"/>
+              </a:lnSpc>
+            </a:pPr>
+            <a:r>
+              <a:rPr sz="1000" b="0" i="0" baseline="0">
+                <a:latin typeface="Calibri"/>
+              </a:rPr>
+              <a:t>  T_j: realized roster mean after ASSIGN — not drawn; Sketch A 2D y-axis</a:t>
+            </a:r>
+          </a:p>
+          <a:p>
+            <a:pPr>
+              <a:buChar char="•"/>
+              <a:lnSpc>
+                <a:spcPct val="150000"/>
+              </a:lnSpc>
+            </a:pPr>
+            <a:r>
+              <a:rPr sz="1000" b="0" i="0" baseline="0">
+                <a:latin typeface="Calibri"/>
+              </a:rPr>
+              <a:t>  \lambda=0.55 — tier1_539_reference_settings.json / playground default</a:t>
+            </a:r>
+          </a:p>
+          <a:p>
+            <a:pPr>
+              <a:buChar char="•"/>
+              <a:lnSpc>
+                <a:spcPct val="150000"/>
+              </a:lnSpc>
+            </a:pPr>
+            <a:r>
+              <a:rPr sz="1000" b="0" i="0" baseline="0">
+                <a:latin typeface="Calibri"/>
+              </a:rPr>
+              <a:t>  \theta=0.804 — F_A^{-1}(1-K/N) (naive draft on sim draw)</a:t>
+            </a:r>
+          </a:p>
+          <a:p>
+            <a:pPr>
+              <a:buChar char="•"/>
+              <a:lnSpc>
+                <a:spcPct val="150000"/>
+              </a:lnSpc>
+            </a:pPr>
+            <a:r>
+              <a:rPr sz="1000" b="0" i="0" baseline="0">
+                <a:latin typeface="Calibri"/>
+              </a:rPr>
+              <a:t>  \gamma=10 — 539 placeholder until lock on real rosters</a:t>
+            </a:r>
+          </a:p>
+          <a:p>
+            <a:pPr>
+              <a:buChar char="•"/>
+              <a:lnSpc>
+                <a:spcPct val="150000"/>
+              </a:lnSpc>
+            </a:pPr>
+            <a:r>
+              <a:rPr sz="1000" b="0" i="0" baseline="0">
+                <a:latin typeface="Calibri"/>
+              </a:rPr>
+              <a:t>  \rho=8 — gallery fixed assign for \lambda / \theta slides (moderate-high mixing)</a:t>
+            </a:r>
+          </a:p>
+          <a:p>
+            <a:pPr>
+              <a:buChar char="•"/>
+              <a:lnSpc>
+                <a:spcPct val="150000"/>
+              </a:lnSpc>
+            </a:pPr>
+            <a:r>
+              <a:rPr sz="1000" b="0" i="0" baseline="0">
+                <a:latin typeface="Calibri"/>
+              </a:rPr>
+              <a:t>  K/N=10% — characterization default (MBB draft \approx 1% is a separate calibration point)</a:t>
+            </a:r>
+          </a:p>
+        </p:txBody>
+      </p:sp>
+      <p:sp>
+        <p:nvSpPr>
+          <p:cNvPr id="9" name="TextBox 8"/>
+          <p:cNvSpPr txBox="1"/>
+          <p:nvPr/>
+        </p:nvSpPr>
+        <p:spPr>
+          <a:xfrm>
+            <a:off x="6446520" y="4114799"/>
+            <a:ext cx="5361127" cy="256032"/>
+          </a:xfrm>
+          <a:prstGeom prst="rect">
+            <a:avLst/>
+          </a:prstGeom>
+          <a:noFill/>
+        </p:spPr>
+        <p:txBody>
           <a:bodyPr wrap="none">
             <a:spAutoFit/>
           </a:bodyPr>
           <a:lstStyle/>
           <a:p>
-            <a:pPr>
-              <a:defRPr b="1"/>
-            </a:pPr>
-            <a:r>
-              <a:rPr sz="1100"/>
-              <a:t>Claim: Phase B maps which generative knobs move \emph{who gets selected} — prerequisite before Phase C calibration to the hero.</a:t>
+            <a:r>
+              <a:rPr sz="1100" b="1" i="0" baseline="0">
+                <a:latin typeface="Calibri"/>
+              </a:rPr>
+              <a:t>Empirical data (Layer A) vs this deck (Layer C)</a:t>
+            </a:r>
+          </a:p>
+        </p:txBody>
+      </p:sp>
+      <p:sp>
+        <p:nvSpPr>
+          <p:cNvPr id="10" name="TextBox 9"/>
+          <p:cNvSpPr txBox="1"/>
+          <p:nvPr/>
+        </p:nvSpPr>
+        <p:spPr>
+          <a:xfrm>
+            <a:off x="6446520" y="4370831"/>
+            <a:ext cx="5361127" cy="1682497"/>
+          </a:xfrm>
+          <a:prstGeom prst="rect">
+            <a:avLst/>
+          </a:prstGeom>
+          <a:noFill/>
+        </p:spPr>
+        <p:txBody>
+          <a:bodyPr wrap="square">
+            <a:spAutoFit/>
+          </a:bodyPr>
+          <a:lstStyle/>
+          <a:p>
+            <a:pPr>
+              <a:buChar char="•"/>
+              <a:lnSpc>
+                <a:spcPct val="150000"/>
+              </a:lnSpc>
+            </a:pPr>
+            <a:r>
+              <a:rPr sz="1000" b="0" i="0" baseline="0">
+                <a:latin typeface="Calibri"/>
+              </a:rPr>
+              <a:t>  Real hero (Layer A): draft rate vs teammate-quality ventiles — bend at the top bins (Pass A / So_Far_).</a:t>
+            </a:r>
+          </a:p>
+          <a:p>
+            <a:pPr>
+              <a:buChar char="•"/>
+              <a:lnSpc>
+                <a:spcPct val="150000"/>
+              </a:lnSpc>
+            </a:pPr>
+            <a:r>
+              <a:rPr sz="1000" b="0" i="0" baseline="0">
+                <a:latin typeface="Calibri"/>
+              </a:rPr>
+              <a:t>  This deck: fraction selected vs pool mean in a fake league — same kind of question, different axis and league.</a:t>
+            </a:r>
+          </a:p>
+          <a:p>
+            <a:pPr>
+              <a:buChar char="•"/>
+              <a:lnSpc>
+                <a:spcPct val="150000"/>
+              </a:lnSpc>
+            </a:pPr>
+            <a:r>
+              <a:rPr sz="1000" b="0" i="0" baseline="0">
+                <a:latin typeface="Calibri"/>
+              </a:rPr>
+              <a:t>  Benchmarks anchor to the Alex 539 playground track; not re-fit to NCAA data in Phase B.</a:t>
+            </a:r>
+          </a:p>
+        </p:txBody>
+      </p:sp>
+      <p:sp>
+        <p:nvSpPr>
+          <p:cNvPr id="11" name="TextBox 10"/>
+          <p:cNvSpPr txBox="1"/>
+          <p:nvPr/>
+        </p:nvSpPr>
+        <p:spPr>
+          <a:xfrm>
+            <a:off x="384048" y="6089904"/>
+            <a:ext cx="11423599" cy="384048"/>
+          </a:xfrm>
+          <a:prstGeom prst="rect">
+            <a:avLst/>
+          </a:prstGeom>
+          <a:noFill/>
+        </p:spPr>
+        <p:txBody>
+          <a:bodyPr wrap="square">
+            <a:spAutoFit/>
+          </a:bodyPr>
+          <a:lstStyle/>
+          <a:p>
+            <a:pPr algn="l"/>
+            <a:r>
+              <a:rPr sz="1100" b="1" i="0" baseline="0">
+                <a:latin typeface="Calibri"/>
+              </a:rPr>
+              <a:t>Claim: Phase B maps which generative knobs move who gets selected — prerequisite before Phase C calibration to the hero.</a:t>
             </a:r>
           </a:p>
         </p:txBody>
@@ -5409,7 +4985,7 @@
         <p:spPr>
           <a:xfrm>
             <a:off x="4773168" y="768096"/>
-            <a:ext cx="7007047" cy="3177248"/>
+            <a:ext cx="7007047" cy="3186656"/>
           </a:xfrm>
           <a:prstGeom prst="rect">
             <a:avLst/>
@@ -6111,8 +5687,8 @@
         </p:blipFill>
         <p:spPr>
           <a:xfrm>
-            <a:off x="3630168" y="1792428"/>
-            <a:ext cx="8177479" cy="3401159"/>
+            <a:off x="3630168" y="1787179"/>
+            <a:ext cx="8177479" cy="3411657"/>
           </a:xfrm>
           <a:prstGeom prst="rect">
             <a:avLst/>
@@ -6315,7 +5891,7 @@
             </a:pPr>
             <a:r>
               <a:rPr sz="1000">
-                <a:latin typeface="Courier New"/>
+                <a:latin typeface="Calibri"/>
               </a:rPr>
               <a:t>\pi_{ij} \propto \exp\left(-\rho \cdot \frac{(A_i-T_{j^*})^2}{2\sigma^2}\right)</a:t>
             </a:r>
@@ -6351,7 +5927,7 @@
               <a:rPr sz="1000" i="1">
                 <a:latin typeface="Cambria Math"/>
               </a:rPr>
-              <a:t>ρ ∈ {0.1, 1, 8, 32}</a:t>
+              <a:t>ρ ∈ {0.001, 1, 8, 32}</a:t>
             </a:r>
             <a:r>
               <a:rPr sz="1000"/>
@@ -6493,8 +6069,8 @@
         </p:blipFill>
         <p:spPr>
           <a:xfrm>
-            <a:off x="5690246" y="768096"/>
-            <a:ext cx="5172890" cy="3511296"/>
+            <a:off x="5662376" y="768096"/>
+            <a:ext cx="5228631" cy="3511296"/>
           </a:xfrm>
           <a:prstGeom prst="rect">
             <a:avLst/>
@@ -6974,7 +6550,7 @@
             </a:pPr>
             <a:r>
               <a:rPr sz="1000">
-                <a:latin typeface="Courier New"/>
+                <a:latin typeface="Calibri"/>
               </a:rPr>
               <a:t>\pi_{ij} \propto \exp\left(-\rho \cdot \frac{(A_i-T_{j^*})^2}{2\sigma^2}\right)</a:t>
             </a:r>
@@ -7010,7 +6586,7 @@
               <a:rPr sz="1000" i="1">
                 <a:latin typeface="Cambria Math"/>
               </a:rPr>
-              <a:t>ρ ∈ {0.1, 1, 8, 32}</a:t>
+              <a:t>ρ ∈ {0.001, 1, 8, 32}</a:t>
             </a:r>
           </a:p>
           <a:p>
@@ -7148,8 +6724,8 @@
         </p:blipFill>
         <p:spPr>
           <a:xfrm>
-            <a:off x="5658895" y="768096"/>
-            <a:ext cx="5235593" cy="3511296"/>
+            <a:off x="5633078" y="768096"/>
+            <a:ext cx="5287227" cy="3511296"/>
           </a:xfrm>
           <a:prstGeom prst="rect">
             <a:avLst/>
@@ -7619,7 +7195,7 @@
           <a:p>
             <a:r>
               <a:rPr sz="900"/>
-              <a:t>PD16: team </a:t>
+              <a:t>team </a:t>
             </a:r>
             <a:r>
               <a:rPr sz="900" i="1">
@@ -7645,7 +7221,7 @@
             </a:r>
             <a:r>
               <a:rPr sz="900"/>
-              <a:t> = 0.804 (naive draft); suffix=_pd16 · 48 bins · 350 teams · seed 42</a:t>
+              <a:t> = 0.804 (naive draft) · 48 bins · 350 teams · seed 42</a:t>
             </a:r>
           </a:p>
         </p:txBody>
@@ -7666,8 +7242,8 @@
         </p:blipFill>
         <p:spPr>
           <a:xfrm>
-            <a:off x="320040" y="2709049376445"/>
-            <a:ext cx="11551615" cy="6539909"/>
+            <a:off x="320040" y="2709048609898"/>
+            <a:ext cx="11551615" cy="8073004"/>
           </a:xfrm>
           <a:prstGeom prst="rect">
             <a:avLst/>
@@ -7708,7 +7284,27 @@
             </a:r>
             <a:r>
               <a:rPr sz="900"/>
-              <a:t> = one narrow spike near </a:t>
+              <a:t> (</a:t>
+            </a:r>
+            <a:r>
+              <a:rPr sz="900" i="1">
+                <a:latin typeface="Cambria Math"/>
+              </a:rPr>
+              <a:t>ρ=0.001</a:t>
+            </a:r>
+            <a:r>
+              <a:rPr sz="900"/>
+              <a:t>, </a:t>
+            </a:r>
+            <a:r>
+              <a:rPr sz="900" i="1">
+                <a:latin typeface="Cambria Math"/>
+              </a:rPr>
+              <a:t>1</a:t>
+            </a:r>
+            <a:r>
+              <a:rPr sz="900"/>
+              <a:t>) = one narrow spike near </a:t>
             </a:r>
             <a:r>
               <a:rPr sz="900" i="1">
@@ -7727,10 +7323,6 @@
                 <a:latin typeface="Cambria Math"/>
               </a:rPr>
               <a:t>≈ 0.15</a:t>
-            </a:r>
-            <a:r>
-              <a:rPr sz="900"/>
-              <a:t>. First 3 panels</a:t>
             </a:r>
           </a:p>
         </p:txBody>
@@ -8197,7 +7789,7 @@
           <a:p>
             <a:r>
               <a:rPr sz="900"/>
-              <a:t>PD16: team </a:t>
+              <a:t>team </a:t>
             </a:r>
             <a:r>
               <a:rPr sz="900" i="1">
@@ -8223,7 +7815,7 @@
             </a:r>
             <a:r>
               <a:rPr sz="900"/>
-              <a:t> = 0.804 (naive draft); suffix=_pd16 · 48 bins · 350 teams · seed 42</a:t>
+              <a:t> = 0.804 (naive draft) · 48 bins · 350 teams · seed 42</a:t>
             </a:r>
           </a:p>
         </p:txBody>
@@ -8521,8 +8113,8 @@
         </p:blipFill>
         <p:spPr>
           <a:xfrm>
-            <a:off x="3383280" y="3156378269873"/>
-            <a:ext cx="8488375" cy="5028254"/>
+            <a:off x="3383280" y="3156376992483"/>
+            <a:ext cx="8488375" cy="7583034"/>
           </a:xfrm>
           <a:prstGeom prst="rect">
             <a:avLst/>
@@ -8924,8 +8516,8 @@
         </p:blipFill>
         <p:spPr>
           <a:xfrm>
-            <a:off x="5113759" y="768096"/>
-            <a:ext cx="6325864" cy="3895344"/>
+            <a:off x="5244668" y="768096"/>
+            <a:ext cx="6064047" cy="3895344"/>
           </a:xfrm>
           <a:prstGeom prst="rect">
             <a:avLst/>
@@ -9542,8 +9134,8 @@
         </p:blipFill>
         <p:spPr>
           <a:xfrm>
-            <a:off x="4871457" y="768096"/>
-            <a:ext cx="6810469" cy="3895344"/>
+            <a:off x="4882905" y="768096"/>
+            <a:ext cx="6787572" cy="3895344"/>
           </a:xfrm>
           <a:prstGeom prst="rect">
             <a:avLst/>
